--- a/content/decks/media-studies/media-studies-s1-lesson-07-integration-and-the-planning-lock.pptx
+++ b/content/decks/media-studies/media-studies-s1-lesson-07-integration-and-the-planning-lock.pptx
@@ -2524,7 +2524,7 @@
                 <a:ea typeface="Georgia" pitchFamily="34" charset="-122"/>
                 <a:cs typeface="Georgia" pitchFamily="34" charset="-120"/>
               </a:rPr>
-              <a:t>An A1-format analysis of a self-chosen sequence over the break, plus the production shoot window.</a:t>
+              <a:t>Over the break: an A1-format analysis of a sequence you choose, plus your production shoot window.</a:t>
             </a:r>
             <a:endParaRPr lang="en-US" sz="1700" dirty="0"/>
           </a:p>
@@ -3223,12 +3223,29 @@
           <a:p>
             <a:pPr indent="0" marL="0">
               <a:lnSpc>
-                <a:spcPts val="2400"/>
+                <a:spcPts val="2300"/>
               </a:lnSpc>
               <a:buNone/>
             </a:pPr>
             <a:r>
-              <a:rPr lang="en-US" sz="1700" dirty="0">
+              <a:rPr lang="en-US" sz="1400" b="1" spc="100" kern="0" dirty="0">
+                <a:solidFill>
+                  <a:srgbClr val="4A6B5D"/>
+                </a:solidFill>
+                <a:latin typeface="Arial" pitchFamily="34" charset="0"/>
+                <a:ea typeface="Arial" pitchFamily="34" charset="-122"/>
+                <a:cs typeface="Arial" pitchFamily="34" charset="-120"/>
+              </a:rPr>
+              <a:t>TASK   </a:t>
+            </a:r>
+            <a:pPr indent="0" marL="0">
+              <a:lnSpc>
+                <a:spcPts val="2300"/>
+              </a:lnSpc>
+              <a:buNone/>
+            </a:pPr>
+            <a:r>
+              <a:rPr lang="en-US" sz="1600" dirty="0">
                 <a:solidFill>
                   <a:srgbClr val="24313F"/>
                 </a:solidFill>
@@ -3236,9 +3253,9 @@
                 <a:ea typeface="Georgia" pitchFamily="34" charset="-122"/>
                 <a:cs typeface="Georgia" pitchFamily="34" charset="-120"/>
               </a:rPr>
-              <a:t>The technical vocabulary is review now, not first teaching. Every group screens ninety seconds and says, in the syllabus's words, which shot they got right and which one failed.</a:t>
-            </a:r>
-            <a:endParaRPr lang="en-US" sz="1700" dirty="0"/>
+              <a:t>Screen ninety seconds of your raw footage. Using the syllabus terms, name one shot that worked and one that failed.</a:t>
+            </a:r>
+            <a:endParaRPr lang="en-US" sz="1400" dirty="0"/>
           </a:p>
         </p:txBody>
       </p:sp>
@@ -3703,7 +3720,7 @@
         <p:spPr>
           <a:xfrm>
             <a:off x="822960" y="5440680"/>
-            <a:ext cx="10424160" cy="640080"/>
+            <a:ext cx="10424160" cy="502920"/>
           </a:xfrm>
           <a:prstGeom prst="rect">
             <a:avLst/>
@@ -3717,22 +3734,76 @@
           <a:p>
             <a:pPr indent="0" marL="0">
               <a:lnSpc>
-                <a:spcPts val="1700"/>
+                <a:spcPts val="1650"/>
               </a:lnSpc>
               <a:buNone/>
             </a:pPr>
             <a:r>
-              <a:rPr lang="en-US" sz="1250" i="1" dirty="0">
-                <a:solidFill>
-                  <a:srgbClr val="7A7F72"/>
+              <a:rPr lang="en-US" sz="1050" b="1" spc="100" kern="0" dirty="0">
+                <a:solidFill>
+                  <a:srgbClr val="4A6B5D"/>
                 </a:solidFill>
                 <a:latin typeface="Arial" pitchFamily="34" charset="0"/>
                 <a:ea typeface="Arial" pitchFamily="34" charset="-122"/>
                 <a:cs typeface="Arial" pitchFamily="34" charset="-120"/>
               </a:rPr>
-              <a:t>This is the only session where a group finds out its audio is unusable while there is still a fortnight to reshoot. HW1 is debriefed the same day, annotated and not graded: the margin notes are A1 feedback five days early.</a:t>
-            </a:r>
-            <a:endParaRPr lang="en-US" sz="1250" dirty="0"/>
+              <a:t>WHY TODAY   </a:t>
+            </a:r>
+            <a:pPr indent="0" marL="0">
+              <a:lnSpc>
+                <a:spcPts val="1650"/>
+              </a:lnSpc>
+              <a:buNone/>
+            </a:pPr>
+            <a:r>
+              <a:rPr lang="en-US" sz="1250" dirty="0">
+                <a:solidFill>
+                  <a:srgbClr val="7A7F72"/>
+                </a:solidFill>
+                <a:latin typeface="Georgia" pitchFamily="34" charset="0"/>
+                <a:ea typeface="Georgia" pitchFamily="34" charset="-122"/>
+                <a:cs typeface="Georgia" pitchFamily="34" charset="-120"/>
+              </a:rPr>
+              <a:t>This is the last day you can discover bad audio with two weeks left to reshoot.</a:t>
+            </a:r>
+            <a:endParaRPr lang="en-US" sz="1050" dirty="0"/>
+          </a:p>
+          <a:p>
+            <a:pPr indent="0" marL="0">
+              <a:lnSpc>
+                <a:spcPts val="1650"/>
+              </a:lnSpc>
+              <a:buNone/>
+            </a:pPr>
+            <a:r>
+              <a:rPr lang="en-US" sz="1050" b="1" spc="100" kern="0" dirty="0">
+                <a:solidFill>
+                  <a:srgbClr val="4A6B5D"/>
+                </a:solidFill>
+                <a:latin typeface="Arial" pitchFamily="34" charset="0"/>
+                <a:ea typeface="Arial" pitchFamily="34" charset="-122"/>
+                <a:cs typeface="Arial" pitchFamily="34" charset="-120"/>
+              </a:rPr>
+              <a:t>HW1   </a:t>
+            </a:r>
+            <a:pPr indent="0" marL="0">
+              <a:lnSpc>
+                <a:spcPts val="1650"/>
+              </a:lnSpc>
+              <a:buNone/>
+            </a:pPr>
+            <a:r>
+              <a:rPr lang="en-US" sz="1250" dirty="0">
+                <a:solidFill>
+                  <a:srgbClr val="7A7F72"/>
+                </a:solidFill>
+                <a:latin typeface="Georgia" pitchFamily="34" charset="0"/>
+                <a:ea typeface="Georgia" pitchFamily="34" charset="-122"/>
+                <a:cs typeface="Georgia" pitchFamily="34" charset="-120"/>
+              </a:rPr>
+              <a:t>Returned annotated, not graded. The margin notes are A1 feedback, five days early.</a:t>
+            </a:r>
+            <a:endParaRPr lang="en-US" sz="1050" dirty="0"/>
           </a:p>
         </p:txBody>
       </p:sp>
@@ -4666,7 +4737,7 @@
                 <a:ea typeface="Georgia" pitchFamily="34" charset="-122"/>
                 <a:cs typeface="Georgia" pitchFamily="34" charset="-120"/>
               </a:rPr>
-              <a:t>A service corridor, walls tight; the club floor is kept out of frame.</a:t>
+              <a:t>A narrow service corridor. The club floor is kept out of frame.</a:t>
             </a:r>
             <a:endParaRPr lang="en-US" sz="1250" dirty="0"/>
           </a:p>
@@ -4828,7 +4899,7 @@
                 <a:ea typeface="Georgia" pitchFamily="34" charset="-122"/>
                 <a:cs typeface="Georgia" pitchFamily="34" charset="-120"/>
               </a:rPr>
-              <a:t>Bare practicals, warm and uneven: a working space, not a showroom.</a:t>
+              <a:t>Bare bulbs, warm and uneven: a working space, not a showroom.</a:t>
             </a:r>
             <a:endParaRPr lang="en-US" sz="1250" dirty="0"/>
           </a:p>
@@ -4909,7 +4980,7 @@
                 <a:ea typeface="Georgia" pitchFamily="34" charset="-122"/>
                 <a:cs typeface="Georgia" pitchFamily="34" charset="-120"/>
               </a:rPr>
-              <a:t>Crates, steel counters, kitchen whites: the unglamorous route in.</a:t>
+              <a:t>Crates, steel counters, kitchen uniforms: the back route in.</a:t>
             </a:r>
             <a:endParaRPr lang="en-US" sz="1250" dirty="0"/>
           </a:p>
@@ -4990,7 +5061,7 @@
                 <a:ea typeface="Georgia" pitchFamily="34" charset="-122"/>
                 <a:cs typeface="Georgia" pitchFamily="34" charset="-120"/>
               </a:rPr>
-              <a:t>The still cannot show it: the song rides over, the kitchen clatters under.</a:t>
+              <a:t>The still cannot show it: the song plays over, the kitchen clatters under.</a:t>
             </a:r>
             <a:endParaRPr lang="en-US" sz="1250" dirty="0"/>
           </a:p>
@@ -5071,7 +5142,7 @@
                 <a:ea typeface="Georgia" pitchFamily="34" charset="-122"/>
                 <a:cs typeface="Georgia" pitchFamily="34" charset="-120"/>
               </a:rPr>
-              <a:t>The refusal to cut is the meaning. Duration is the privilege.</a:t>
+              <a:t>No cut for three minutes. The unbroken take means privilege.</a:t>
             </a:r>
             <a:endParaRPr lang="en-US" sz="1250" dirty="0"/>
           </a:p>
@@ -6204,23 +6275,26 @@
         <p:spPr>
           <a:xfrm>
             <a:off x="822960" y="5943600"/>
-            <a:ext cx="10424160" cy="365760"/>
-          </a:xfrm>
-          <a:prstGeom prst="rect">
-            <a:avLst/>
-          </a:prstGeom>
-          <a:noFill/>
-          <a:ln/>
-        </p:spPr>
-        <p:txBody>
-          <a:bodyPr wrap="square" lIns="0" tIns="0" rIns="0" bIns="0" rtlCol="0" anchor="ctr"/>
-          <a:lstStyle/>
-          <a:p>
-            <a:pPr indent="0" marL="0">
-              <a:buNone/>
-            </a:pPr>
-            <a:r>
-              <a:rPr lang="en-US" sz="1250" i="1" dirty="0">
+            <a:ext cx="10424160" cy="320040"/>
+          </a:xfrm>
+          <a:prstGeom prst="rect">
+            <a:avLst/>
+          </a:prstGeom>
+          <a:noFill/>
+          <a:ln/>
+        </p:spPr>
+        <p:txBody>
+          <a:bodyPr wrap="square" lIns="0" tIns="0" rIns="0" bIns="0" rtlCol="0" anchor="t"/>
+          <a:lstStyle/>
+          <a:p>
+            <a:pPr indent="0" marL="0">
+              <a:lnSpc>
+                <a:spcPts val="1700"/>
+              </a:lnSpc>
+              <a:buNone/>
+            </a:pPr>
+            <a:r>
+              <a:rPr lang="en-US" sz="1050" b="1" spc="100" kern="0" dirty="0">
                 <a:solidFill>
                   <a:srgbClr val="7A7F72"/>
                 </a:solidFill>
@@ -6228,9 +6302,26 @@
                 <a:ea typeface="Arial" pitchFamily="34" charset="-122"/>
                 <a:cs typeface="Arial" pitchFamily="34" charset="-120"/>
               </a:rPr>
-              <a:t>It exists because the commonest failure is not ignorance. It is a whole code family left unvisited.</a:t>
-            </a:r>
-            <a:endParaRPr lang="en-US" sz="1250" dirty="0"/>
+              <a:t>WHY THIS ORDER   </a:t>
+            </a:r>
+            <a:pPr indent="0" marL="0">
+              <a:lnSpc>
+                <a:spcPts val="1700"/>
+              </a:lnSpc>
+              <a:buNone/>
+            </a:pPr>
+            <a:r>
+              <a:rPr lang="en-US" sz="1250" dirty="0">
+                <a:solidFill>
+                  <a:srgbClr val="7A7F72"/>
+                </a:solidFill>
+                <a:latin typeface="Georgia" pitchFamily="34" charset="0"/>
+                <a:ea typeface="Georgia" pitchFamily="34" charset="-122"/>
+                <a:cs typeface="Georgia" pitchFamily="34" charset="-120"/>
+              </a:rPr>
+              <a:t>The most common failure is not ignorance. It is forgetting a whole code family. The order prevents that.</a:t>
+            </a:r>
+            <a:endParaRPr lang="en-US" sz="1050" dirty="0"/>
           </a:p>
         </p:txBody>
       </p:sp>
@@ -6510,6 +6601,65 @@
           </a:p>
         </p:txBody>
       </p:sp>
+      <p:sp>
+        <p:nvSpPr>
+          <p:cNvPr id="6" name="Text 4"/>
+          <p:cNvSpPr/>
+          <p:nvPr/>
+        </p:nvSpPr>
+        <p:spPr>
+          <a:xfrm>
+            <a:off x="822960" y="5806440"/>
+            <a:ext cx="10424160" cy="640080"/>
+          </a:xfrm>
+          <a:prstGeom prst="rect">
+            <a:avLst/>
+          </a:prstGeom>
+          <a:noFill/>
+          <a:ln/>
+        </p:spPr>
+        <p:txBody>
+          <a:bodyPr wrap="square" lIns="0" tIns="0" rIns="0" bIns="0" rtlCol="0" anchor="t"/>
+          <a:lstStyle/>
+          <a:p>
+            <a:pPr indent="0" marL="0">
+              <a:lnSpc>
+                <a:spcPts val="1900"/>
+              </a:lnSpc>
+              <a:buNone/>
+            </a:pPr>
+            <a:r>
+              <a:rPr lang="en-US" sz="1200" b="1" spc="100" kern="0" dirty="0">
+                <a:solidFill>
+                  <a:srgbClr val="7A7F72"/>
+                </a:solidFill>
+                <a:latin typeface="Arial" pitchFamily="34" charset="0"/>
+                <a:ea typeface="Arial" pitchFamily="34" charset="-122"/>
+                <a:cs typeface="Arial" pitchFamily="34" charset="-120"/>
+              </a:rPr>
+              <a:t>IN PLAIN WORDS   </a:t>
+            </a:r>
+            <a:pPr indent="0" marL="0">
+              <a:lnSpc>
+                <a:spcPts val="1900"/>
+              </a:lnSpc>
+              <a:buNone/>
+            </a:pPr>
+            <a:r>
+              <a:rPr lang="en-US" sz="1400" i="1" dirty="0">
+                <a:solidFill>
+                  <a:srgbClr val="4A6B5D"/>
+                </a:solidFill>
+                <a:latin typeface="Georgia" pitchFamily="34" charset="0"/>
+                <a:ea typeface="Georgia" pitchFamily="34" charset="-122"/>
+                <a:cs typeface="Georgia" pitchFamily="34" charset="-120"/>
+              </a:rPr>
+              <a:t>Take the extract apart into its four elements, then put it back together to see how it makes meaning.</a:t>
+            </a:r>
+            <a:endParaRPr lang="en-US" sz="1200" dirty="0"/>
+          </a:p>
+        </p:txBody>
+      </p:sp>
     </p:spTree>
   </p:cSld>
   <p:clrMapOvr>
@@ -7065,23 +7215,26 @@
         <p:spPr>
           <a:xfrm>
             <a:off x="822960" y="5486400"/>
-            <a:ext cx="10424160" cy="457200"/>
-          </a:xfrm>
-          <a:prstGeom prst="rect">
-            <a:avLst/>
-          </a:prstGeom>
-          <a:noFill/>
-          <a:ln/>
-        </p:spPr>
-        <p:txBody>
-          <a:bodyPr wrap="square" lIns="0" tIns="0" rIns="0" bIns="0" rtlCol="0" anchor="ctr"/>
-          <a:lstStyle/>
-          <a:p>
-            <a:pPr indent="0" marL="0">
-              <a:buNone/>
-            </a:pPr>
-            <a:r>
-              <a:rPr lang="en-US" sz="1250" i="1" dirty="0">
+            <a:ext cx="10424160" cy="320040"/>
+          </a:xfrm>
+          <a:prstGeom prst="rect">
+            <a:avLst/>
+          </a:prstGeom>
+          <a:noFill/>
+          <a:ln/>
+        </p:spPr>
+        <p:txBody>
+          <a:bodyPr wrap="square" lIns="0" tIns="0" rIns="0" bIns="0" rtlCol="0" anchor="t"/>
+          <a:lstStyle/>
+          <a:p>
+            <a:pPr indent="0" marL="0">
+              <a:lnSpc>
+                <a:spcPts val="1700"/>
+              </a:lnSpc>
+              <a:buNone/>
+            </a:pPr>
+            <a:r>
+              <a:rPr lang="en-US" sz="1050" b="1" spc="100" kern="0" dirty="0">
                 <a:solidFill>
                   <a:srgbClr val="7A7F72"/>
                 </a:solidFill>
@@ -7089,9 +7242,26 @@
                 <a:ea typeface="Arial" pitchFamily="34" charset="-122"/>
                 <a:cs typeface="Arial" pitchFamily="34" charset="-120"/>
               </a:rPr>
-              <a:t>Written in exam register, collected, and marked in the official Paper 2 language so the feedback transfers straight to A1 in two weeks.</a:t>
-            </a:r>
-            <a:endParaRPr lang="en-US" sz="1250" dirty="0"/>
+              <a:t>MARKED   </a:t>
+            </a:r>
+            <a:pPr indent="0" marL="0">
+              <a:lnSpc>
+                <a:spcPts val="1700"/>
+              </a:lnSpc>
+              <a:buNone/>
+            </a:pPr>
+            <a:r>
+              <a:rPr lang="en-US" sz="1250" dirty="0">
+                <a:solidFill>
+                  <a:srgbClr val="7A7F72"/>
+                </a:solidFill>
+                <a:latin typeface="Georgia" pitchFamily="34" charset="0"/>
+                <a:ea typeface="Georgia" pitchFamily="34" charset="-122"/>
+                <a:cs typeface="Georgia" pitchFamily="34" charset="-120"/>
+              </a:rPr>
+              <a:t>Written in exam style and collected. Marked in the official Paper 2 language, so the feedback transfers straight to A1.</a:t>
+            </a:r>
+            <a:endParaRPr lang="en-US" sz="1050" dirty="0"/>
           </a:p>
         </p:txBody>
       </p:sp>
@@ -7440,12 +7610,12 @@
           <a:p>
             <a:pPr indent="0" marL="0">
               <a:lnSpc>
-                <a:spcPts val="2600"/>
+                <a:spcPts val="2500"/>
               </a:lnSpc>
               <a:buNone/>
             </a:pPr>
             <a:r>
-              <a:rPr lang="en-US" sz="1800" dirty="0">
+              <a:rPr lang="en-US" sz="1700" dirty="0">
                 <a:solidFill>
                   <a:srgbClr val="24313F"/>
                 </a:solidFill>
@@ -7453,9 +7623,46 @@
                 <a:ea typeface="Georgia" pitchFamily="34" charset="-122"/>
                 <a:cs typeface="Georgia" pitchFamily="34" charset="-120"/>
               </a:rPr>
-              <a:t>Rubens' assistants painted a whole ceiling from a sketch this size, because the plan answered every question before the brush touched the wall. Your C1 plan is locked when it could be shot the same way: by someone who was not in the room.</a:t>
-            </a:r>
-            <a:endParaRPr lang="en-US" sz="1800" dirty="0"/>
+              <a:t>Rubens' assistants painted a whole ceiling from a sketch this size. The plan answered every question in advance.</a:t>
+            </a:r>
+            <a:endParaRPr lang="en-US" sz="1700" dirty="0"/>
+          </a:p>
+          <a:p>
+            <a:pPr indent="0" marL="0">
+              <a:lnSpc>
+                <a:spcPts val="2500"/>
+              </a:lnSpc>
+              <a:buNone/>
+            </a:pPr>
+            <a:r>
+              <a:rPr lang="en-US" sz="1500" b="1" spc="100" kern="0" dirty="0">
+                <a:solidFill>
+                  <a:srgbClr val="4A6B5D"/>
+                </a:solidFill>
+                <a:latin typeface="Arial" pitchFamily="34" charset="0"/>
+                <a:ea typeface="Arial" pitchFamily="34" charset="-122"/>
+                <a:cs typeface="Arial" pitchFamily="34" charset="-120"/>
+              </a:rPr>
+              <a:t>THE STANDARD   </a:t>
+            </a:r>
+            <a:pPr indent="0" marL="0">
+              <a:lnSpc>
+                <a:spcPts val="2500"/>
+              </a:lnSpc>
+              <a:buNone/>
+            </a:pPr>
+            <a:r>
+              <a:rPr lang="en-US" sz="1700" dirty="0">
+                <a:solidFill>
+                  <a:srgbClr val="24313F"/>
+                </a:solidFill>
+                <a:latin typeface="Georgia" pitchFamily="34" charset="0"/>
+                <a:ea typeface="Georgia" pitchFamily="34" charset="-122"/>
+                <a:cs typeface="Georgia" pitchFamily="34" charset="-120"/>
+              </a:rPr>
+              <a:t>Your Component 1 plan is ready when a person who was not in the room could shoot it.</a:t>
+            </a:r>
+            <a:endParaRPr lang="en-US" sz="1700" dirty="0"/>
           </a:p>
         </p:txBody>
       </p:sp>
@@ -8741,7 +8948,7 @@
         <p:spPr>
           <a:xfrm>
             <a:off x="822960" y="5349240"/>
-            <a:ext cx="7498080" cy="777240"/>
+            <a:ext cx="7498080" cy="685800"/>
           </a:xfrm>
           <a:prstGeom prst="rect">
             <a:avLst/>
@@ -8755,22 +8962,76 @@
           <a:p>
             <a:pPr indent="0" marL="0">
               <a:lnSpc>
-                <a:spcPts val="1700"/>
+                <a:spcPts val="1600"/>
               </a:lnSpc>
               <a:buNone/>
             </a:pPr>
             <a:r>
-              <a:rPr lang="en-US" sz="1250" i="1" dirty="0">
-                <a:solidFill>
-                  <a:srgbClr val="7A7F72"/>
+              <a:rPr lang="en-US" sz="1050" b="1" spc="100" kern="0" dirty="0">
+                <a:solidFill>
+                  <a:srgbClr val="4A6B5D"/>
                 </a:solidFill>
                 <a:latin typeface="Arial" pitchFamily="34" charset="0"/>
                 <a:ea typeface="Arial" pitchFamily="34" charset="-122"/>
                 <a:cs typeface="Arial" pitchFamily="34" charset="-120"/>
               </a:rPr>
-              <a:t>Run as launch clearance: ten green lights or the plan does not fly. Locked means locked: later changes are documented decisions in the WS 6.4 production diary, issued today, not silent swaps. Equipment sign-out slips open today.</a:t>
-            </a:r>
-            <a:endParaRPr lang="en-US" sz="1250" dirty="0"/>
+              <a:t>THE RULE   </a:t>
+            </a:r>
+            <a:pPr indent="0" marL="0">
+              <a:lnSpc>
+                <a:spcPts val="1600"/>
+              </a:lnSpc>
+              <a:buNone/>
+            </a:pPr>
+            <a:r>
+              <a:rPr lang="en-US" sz="1250" dirty="0">
+                <a:solidFill>
+                  <a:srgbClr val="7A7F72"/>
+                </a:solidFill>
+                <a:latin typeface="Georgia" pitchFamily="34" charset="0"/>
+                <a:ea typeface="Georgia" pitchFamily="34" charset="-122"/>
+                <a:cs typeface="Georgia" pitchFamily="34" charset="-120"/>
+              </a:rPr>
+              <a:t>Ten green lights, or the plan does not pass. Locked means locked.</a:t>
+            </a:r>
+            <a:endParaRPr lang="en-US" sz="1050" dirty="0"/>
+          </a:p>
+          <a:p>
+            <a:pPr indent="0" marL="0">
+              <a:lnSpc>
+                <a:spcPts val="1600"/>
+              </a:lnSpc>
+              <a:buNone/>
+            </a:pPr>
+            <a:r>
+              <a:rPr lang="en-US" sz="1050" b="1" spc="100" kern="0" dirty="0">
+                <a:solidFill>
+                  <a:srgbClr val="4A6B5D"/>
+                </a:solidFill>
+                <a:latin typeface="Arial" pitchFamily="34" charset="0"/>
+                <a:ea typeface="Arial" pitchFamily="34" charset="-122"/>
+                <a:cs typeface="Arial" pitchFamily="34" charset="-120"/>
+              </a:rPr>
+              <a:t>CHANGES   </a:t>
+            </a:r>
+            <a:pPr indent="0" marL="0">
+              <a:lnSpc>
+                <a:spcPts val="1600"/>
+              </a:lnSpc>
+              <a:buNone/>
+            </a:pPr>
+            <a:r>
+              <a:rPr lang="en-US" sz="1250" dirty="0">
+                <a:solidFill>
+                  <a:srgbClr val="7A7F72"/>
+                </a:solidFill>
+                <a:latin typeface="Georgia" pitchFamily="34" charset="0"/>
+                <a:ea typeface="Georgia" pitchFamily="34" charset="-122"/>
+                <a:cs typeface="Georgia" pitchFamily="34" charset="-120"/>
+              </a:rPr>
+              <a:t>Later changes must be written into the WS 6.4 production diary. No silent swaps. Equipment sign-out opens today.</a:t>
+            </a:r>
+            <a:endParaRPr lang="en-US" sz="1050" dirty="0"/>
           </a:p>
         </p:txBody>
       </p:sp>

--- a/content/decks/media-studies/media-studies-s1-lesson-07-integration-and-the-planning-lock.pptx
+++ b/content/decks/media-studies/media-studies-s1-lesson-07-integration-and-the-planning-lock.pptx
@@ -513,7 +513,7 @@
           <a:p>
             <a:r>
               <a:rPr lang="en-US" dirty="0"/>
-              <a:t>Four elements taught one at a time and shot one at a time. Tuesday is where they stop being four lessons and start being one instrument.</a:t>
+              <a:t>Four elements taught one at a time and shot one at a time. Wednesday locks the plans before the holiday; Thursday, back from the break, is where they stop being four lessons and start being one instrument.</a:t>
             </a:r>
             <a:endParaRPr lang="en-US" dirty="0"/>
           </a:p>
@@ -865,7 +865,7 @@
           <a:p>
             <a:r>
               <a:rPr lang="en-US" dirty="0"/>
-              <a:t>One extract, the protocol order, everything at the same time. That paragraph is A1 with the stakes off, two weeks early.</a:t>
+              <a:t>One extract, the protocol order, everything at the same time. That paragraph is A1 with the stakes off, six days early.</a:t>
             </a:r>
             <a:endParaRPr lang="en-US" dirty="0"/>
           </a:p>
@@ -953,7 +953,7 @@
           <a:p>
             <a:r>
               <a:rPr lang="en-US" dirty="0"/>
-              <a:t>Ten minutes, teacher aloud, in protocol order, including one scripted moment of honest not-knowing: I do not know what that is called, so here is what it does. The class saw this shot in Lesson 03 as movement; today it is everything at once.</a:t>
+              <a:t>The Rubens sketch sets the standard for the lock: a plan complete enough to hand off.</a:t>
             </a:r>
             <a:endParaRPr lang="en-US" dirty="0"/>
           </a:p>
@@ -1041,7 +1041,7 @@
           <a:p>
             <a:r>
               <a:rPr lang="en-US" dirty="0"/>
-              <a:t>Modelled once on screen, then the room runs it: first extract read aloud in order, second extract twice with a cut count. Both extracts are PROPOSED content; note the chosen texts and timecodes here before teaching.</a:t>
+              <a:t>Say the sentence explicitly: locked means locked. The WS 6.4 production diary is issued at the lock and harvested at L13; the equipment sign-out slips open Wednesday. Peer review runs describe, question, suggest with the group's own L05 design board open beside the plan.</a:t>
             </a:r>
             <a:endParaRPr lang="en-US" dirty="0"/>
           </a:p>
@@ -1129,7 +1129,7 @@
           <a:p>
             <a:r>
               <a:rPr lang="en-US" dirty="0"/>
-              <a:t/>
+              <a:t>The four frames are the ones the technical decks taught with: the room has already read every one of them. Reviewers keep the group's own design board open beside the plan; costume and properties must match it, or one of the two is wrong. Foley photograph: Vancouver Film School, CC BY 2.0.</a:t>
             </a:r>
             <a:endParaRPr lang="en-US" dirty="0"/>
           </a:p>
@@ -1217,7 +1217,7 @@
           <a:p>
             <a:r>
               <a:rPr lang="en-US" dirty="0"/>
-              <a:t>Fifteen minutes, exam register, collected. At least three of the four elements must appear. Marked in the five-criteria language; the margin notes transfer straight to A1.</a:t>
+              <a:t>Ten minutes, teacher aloud, in protocol order, including one scripted moment of honest not-knowing: I do not know what that is called, so here is what it does. The class saw this shot in Lesson 03 as movement; today it is everything at once.</a:t>
             </a:r>
             <a:endParaRPr lang="en-US" dirty="0"/>
           </a:p>
@@ -1305,7 +1305,7 @@
           <a:p>
             <a:r>
               <a:rPr lang="en-US" dirty="0"/>
-              <a:t>The Rubens sketch sets the standard for the lock: a plan complete enough to hand off.</a:t>
+              <a:t>Modelled once on screen, then the room runs it: first extract read aloud in order, second extract twice with a cut count. Both extracts are PROPOSED content; note the chosen texts and timecodes here before teaching.</a:t>
             </a:r>
             <a:endParaRPr lang="en-US" dirty="0"/>
           </a:p>
@@ -1393,7 +1393,7 @@
           <a:p>
             <a:r>
               <a:rPr lang="en-US" dirty="0"/>
-              <a:t>Say the sentence explicitly: locked means locked. The WS 6.4 production diary is issued at the lock and harvested at L13; the equipment sign-out slips open Wednesday. Peer review runs describe, question, suggest with the group's own L05 design board open beside the plan.</a:t>
+              <a:t/>
             </a:r>
             <a:endParaRPr lang="en-US" dirty="0"/>
           </a:p>
@@ -1481,7 +1481,7 @@
           <a:p>
             <a:r>
               <a:rPr lang="en-US" dirty="0"/>
-              <a:t>The four frames are the ones the technical decks taught with: the room has already read every one of them. Reviewers keep the group's own design board open beside the plan; costume and properties must match it, or one of the two is wrong. Foley photograph: Vancouver Film School, CC BY 2.0.</a:t>
+              <a:t>Fifteen minutes, exam register, collected. At least three of the four elements must appear. Marked in the five-criteria language; the margin notes transfer straight to A1.</a:t>
             </a:r>
             <a:endParaRPr lang="en-US" dirty="0"/>
           </a:p>
@@ -2089,7 +2089,7 @@
                 <a:ea typeface="Arial" pitchFamily="34" charset="-122"/>
                 <a:cs typeface="Arial" pitchFamily="34" charset="-120"/>
               </a:rPr>
-              <a:t>Three days  ·  Tuesday 29, Wednesday 30 September, then Friday 9 October after the break</a:t>
+              <a:t>Three days  ·  Wednesday 30 September, then Thursday 8 and Friday 9 October after the break</a:t>
             </a:r>
             <a:endParaRPr lang="en-US" sz="1300" dirty="0"/>
           </a:p>
@@ -2339,7 +2339,7 @@
                 <a:ea typeface="Arial" pitchFamily="34" charset="-122"/>
                 <a:cs typeface="Arial" pitchFamily="34" charset="-120"/>
               </a:rPr>
-              <a:t>TUE 29 SEP</a:t>
+              <a:t>THU 8 OCT</a:t>
             </a:r>
             <a:endParaRPr lang="en-US" sz="1100" dirty="0"/>
           </a:p>
@@ -4311,7 +4311,7 @@
                 <a:ea typeface="Arial" pitchFamily="34" charset="-122"/>
                 <a:cs typeface="Arial" pitchFamily="34" charset="-120"/>
               </a:rPr>
-              <a:t>TUESDAY</a:t>
+              <a:t>INTEGRATION</a:t>
             </a:r>
             <a:endParaRPr lang="en-US" sz="1100" dirty="0"/>
           </a:p>
@@ -4434,174 +4434,9 @@
           <a:chExt cx="0" cy="0"/>
         </a:xfrm>
       </p:grpSpPr>
-      <p:sp>
-        <p:nvSpPr>
-          <p:cNvPr id="2" name="Text 0"/>
-          <p:cNvSpPr/>
-          <p:nvPr/>
-        </p:nvSpPr>
-        <p:spPr>
-          <a:xfrm>
-            <a:off x="822960" y="457200"/>
-            <a:ext cx="6400800" cy="274320"/>
-          </a:xfrm>
-          <a:prstGeom prst="rect">
-            <a:avLst/>
-          </a:prstGeom>
-          <a:noFill/>
-          <a:ln/>
-        </p:spPr>
-        <p:txBody>
-          <a:bodyPr wrap="square" lIns="0" tIns="0" rIns="0" bIns="0" rtlCol="0" anchor="ctr"/>
-          <a:lstStyle/>
-          <a:p>
-            <a:pPr algn="l" indent="0" marL="0">
-              <a:buNone/>
-            </a:pPr>
-            <a:r>
-              <a:rPr lang="en-US" sz="1100" b="1" spc="250" kern="0" dirty="0">
-                <a:solidFill>
-                  <a:srgbClr val="4A6B5D"/>
-                </a:solidFill>
-                <a:latin typeface="Arial" pitchFamily="34" charset="0"/>
-                <a:ea typeface="Arial" pitchFamily="34" charset="-122"/>
-                <a:cs typeface="Arial" pitchFamily="34" charset="-120"/>
-              </a:rPr>
-              <a:t>THE MODELLED READ</a:t>
-            </a:r>
-            <a:endParaRPr lang="en-US" sz="1100" dirty="0"/>
-          </a:p>
-        </p:txBody>
-      </p:sp>
-      <p:sp>
-        <p:nvSpPr>
-          <p:cNvPr id="3" name="Text 1"/>
-          <p:cNvSpPr/>
-          <p:nvPr/>
-        </p:nvSpPr>
-        <p:spPr>
-          <a:xfrm>
-            <a:off x="6793992" y="457200"/>
-            <a:ext cx="4572000" cy="274320"/>
-          </a:xfrm>
-          <a:prstGeom prst="rect">
-            <a:avLst/>
-          </a:prstGeom>
-          <a:noFill/>
-          <a:ln/>
-        </p:spPr>
-        <p:txBody>
-          <a:bodyPr wrap="square" lIns="0" tIns="0" rIns="0" bIns="0" rtlCol="0" anchor="ctr"/>
-          <a:lstStyle/>
-          <a:p>
-            <a:pPr algn="r" indent="0" marL="0">
-              <a:buNone/>
-            </a:pPr>
-            <a:r>
-              <a:rPr lang="en-US" sz="1100" b="1" spc="250" kern="0" dirty="0">
-                <a:solidFill>
-                  <a:srgbClr val="7A7F72"/>
-                </a:solidFill>
-                <a:latin typeface="Arial" pitchFamily="34" charset="0"/>
-                <a:ea typeface="Arial" pitchFamily="34" charset="-122"/>
-                <a:cs typeface="Arial" pitchFamily="34" charset="-120"/>
-              </a:rPr>
-              <a:t>ONE FRAME THE ROOM ALREADY KNOWS</a:t>
-            </a:r>
-            <a:endParaRPr lang="en-US" sz="1100" dirty="0"/>
-          </a:p>
-        </p:txBody>
-      </p:sp>
-      <p:sp>
-        <p:nvSpPr>
-          <p:cNvPr id="4" name="Shape 2"/>
-          <p:cNvSpPr/>
-          <p:nvPr/>
-        </p:nvSpPr>
-        <p:spPr>
-          <a:xfrm>
-            <a:off x="822960" y="786384"/>
-            <a:ext cx="10543032" cy="0"/>
-          </a:xfrm>
-          <a:prstGeom prst="line">
-            <a:avLst/>
-          </a:prstGeom>
-          <a:noFill/>
-          <a:ln w="9525">
-            <a:solidFill>
-              <a:srgbClr val="D9D4C4"/>
-            </a:solidFill>
-            <a:prstDash val="solid"/>
-          </a:ln>
-        </p:spPr>
-      </p:sp>
-      <p:sp>
-        <p:nvSpPr>
-          <p:cNvPr id="5" name="Text 3"/>
-          <p:cNvSpPr/>
-          <p:nvPr/>
-        </p:nvSpPr>
-        <p:spPr>
-          <a:xfrm>
-            <a:off x="822960" y="932688"/>
-            <a:ext cx="10543032" cy="594360"/>
-          </a:xfrm>
-          <a:prstGeom prst="rect">
-            <a:avLst/>
-          </a:prstGeom>
-          <a:noFill/>
-          <a:ln/>
-        </p:spPr>
-        <p:txBody>
-          <a:bodyPr wrap="square" lIns="0" tIns="0" rIns="0" bIns="0" rtlCol="0" anchor="ctr"/>
-          <a:lstStyle/>
-          <a:p>
-            <a:pPr indent="0" marL="0">
-              <a:buNone/>
-            </a:pPr>
-            <a:r>
-              <a:rPr lang="en-US" sz="3000" dirty="0">
-                <a:solidFill>
-                  <a:srgbClr val="24313F"/>
-                </a:solidFill>
-                <a:latin typeface="Georgia" pitchFamily="34" charset="0"/>
-                <a:ea typeface="Georgia" pitchFamily="34" charset="-122"/>
-                <a:cs typeface="Georgia" pitchFamily="34" charset="-120"/>
-              </a:rPr>
-              <a:t>Everything at once, in order</a:t>
-            </a:r>
-            <a:endParaRPr lang="en-US" sz="3000" dirty="0"/>
-          </a:p>
-        </p:txBody>
-      </p:sp>
-      <p:sp>
-        <p:nvSpPr>
-          <p:cNvPr id="6" name="Shape 4"/>
-          <p:cNvSpPr/>
-          <p:nvPr/>
-        </p:nvSpPr>
-        <p:spPr>
-          <a:xfrm>
-            <a:off x="822960" y="1645920"/>
-            <a:ext cx="6035040" cy="4160520"/>
-          </a:xfrm>
-          <a:prstGeom prst="rect">
-            <a:avLst/>
-          </a:prstGeom>
-          <a:solidFill>
-            <a:srgbClr val="FAF8F1"/>
-          </a:solidFill>
-          <a:ln w="9525">
-            <a:solidFill>
-              <a:srgbClr val="D9D4C4"/>
-            </a:solidFill>
-            <a:prstDash val="solid"/>
-          </a:ln>
-        </p:spPr>
-      </p:sp>
       <p:pic>
         <p:nvPicPr>
-          <p:cNvPr id="7" name="Image 0" descr="/Users/dogan/Documents/Vaults/Courses/wiki/classes/media-studies/decks/_build/img/goodfellas-copa-2.jpg">    </p:cNvPr>
+          <p:cNvPr id="2" name="Image 0" descr="/Users/dogan/Documents/Vaults/Courses/wiki/classes/media-studies/decks/_build/img/crops/rubens-sketch_a664.jpg">    </p:cNvPr>
           <p:cNvPicPr>
             <a:picLocks noChangeAspect="1"/>
           </p:cNvPicPr>
@@ -4615,8 +4450,8 @@
         </p:blipFill>
         <p:spPr>
           <a:xfrm>
-            <a:off x="950976" y="2104446"/>
-            <a:ext cx="5779008" cy="3243468"/>
+            <a:off x="7635240" y="0"/>
+            <a:ext cx="4553712" cy="6858000"/>
           </a:xfrm>
           <a:prstGeom prst="rect">
             <a:avLst/>
@@ -4625,30 +4460,32 @@
       </p:pic>
       <p:sp>
         <p:nvSpPr>
-          <p:cNvPr id="8" name="Text 5"/>
-          <p:cNvSpPr/>
-          <p:nvPr/>
-        </p:nvSpPr>
-        <p:spPr>
-          <a:xfrm>
-            <a:off x="822960" y="5852160"/>
-            <a:ext cx="6035040" cy="320040"/>
-          </a:xfrm>
-          <a:prstGeom prst="rect">
-            <a:avLst/>
-          </a:prstGeom>
-          <a:noFill/>
-          <a:ln/>
-        </p:spPr>
-        <p:txBody>
-          <a:bodyPr wrap="square" lIns="0" tIns="0" rIns="0" bIns="0" rtlCol="0" anchor="ctr"/>
-          <a:lstStyle/>
-          <a:p>
-            <a:pPr algn="ctr" indent="0" marL="0">
-              <a:buNone/>
-            </a:pPr>
-            <a:r>
-              <a:rPr lang="en-US" sz="1050" dirty="0">
+          <p:cNvPr id="3" name="Text 0"/>
+          <p:cNvSpPr/>
+          <p:nvPr/>
+        </p:nvSpPr>
+        <p:spPr>
+          <a:xfrm>
+            <a:off x="7818120" y="6126480"/>
+            <a:ext cx="4187952" cy="365760"/>
+          </a:xfrm>
+          <a:prstGeom prst="rect">
+            <a:avLst/>
+          </a:prstGeom>
+          <a:solidFill>
+            <a:srgbClr val="FAF8F1"/>
+          </a:solidFill>
+          <a:ln/>
+        </p:spPr>
+        <p:txBody>
+          <a:bodyPr wrap="square" lIns="0" tIns="0" rIns="0" bIns="0" rtlCol="0" anchor="ctr"/>
+          <a:lstStyle/>
+          <a:p>
+            <a:pPr indent="0" marL="0">
+              <a:buNone/>
+            </a:pPr>
+            <a:r>
+              <a:rPr lang="en-US" sz="950" spc="50" kern="0" dirty="0">
                 <a:solidFill>
                   <a:srgbClr val="7A7F72"/>
                 </a:solidFill>
@@ -4656,38 +4493,38 @@
                 <a:ea typeface="Arial" pitchFamily="34" charset="-122"/>
                 <a:cs typeface="Arial" pitchFamily="34" charset="-120"/>
               </a:rPr>
-              <a:t>Goodfellas (1990), dir. Martin Scorsese. The Copacabana take, mid-corridor.</a:t>
-            </a:r>
-            <a:endParaRPr lang="en-US" sz="1050" dirty="0"/>
-          </a:p>
-        </p:txBody>
-      </p:sp>
-      <p:sp>
-        <p:nvSpPr>
-          <p:cNvPr id="9" name="Text 6"/>
-          <p:cNvSpPr/>
-          <p:nvPr/>
-        </p:nvSpPr>
-        <p:spPr>
-          <a:xfrm>
-            <a:off x="6903720" y="1645920"/>
-            <a:ext cx="1691640" cy="658368"/>
-          </a:xfrm>
-          <a:prstGeom prst="rect">
-            <a:avLst/>
-          </a:prstGeom>
-          <a:noFill/>
-          <a:ln/>
-        </p:spPr>
-        <p:txBody>
-          <a:bodyPr wrap="square" lIns="0" tIns="0" rIns="0" bIns="0" rtlCol="0" anchor="t"/>
-          <a:lstStyle/>
-          <a:p>
-            <a:pPr indent="0" marL="0">
-              <a:buNone/>
-            </a:pPr>
-            <a:r>
-              <a:rPr lang="en-US" sz="1150" b="1" spc="50" kern="0" dirty="0">
+              <a:t>Rubens, Multiple Sketch for the Banqueting House Ceiling, c. 1629</a:t>
+            </a:r>
+            <a:endParaRPr lang="en-US" sz="950" dirty="0"/>
+          </a:p>
+        </p:txBody>
+      </p:sp>
+      <p:sp>
+        <p:nvSpPr>
+          <p:cNvPr id="4" name="Text 1"/>
+          <p:cNvSpPr/>
+          <p:nvPr/>
+        </p:nvSpPr>
+        <p:spPr>
+          <a:xfrm>
+            <a:off x="822960" y="685800"/>
+            <a:ext cx="4572000" cy="274320"/>
+          </a:xfrm>
+          <a:prstGeom prst="rect">
+            <a:avLst/>
+          </a:prstGeom>
+          <a:noFill/>
+          <a:ln/>
+        </p:spPr>
+        <p:txBody>
+          <a:bodyPr wrap="square" lIns="0" tIns="0" rIns="0" bIns="0" rtlCol="0" anchor="ctr"/>
+          <a:lstStyle/>
+          <a:p>
+            <a:pPr algn="l" indent="0" marL="0">
+              <a:buNone/>
+            </a:pPr>
+            <a:r>
+              <a:rPr lang="en-US" sz="1100" b="1" spc="250" kern="0" dirty="0">
                 <a:solidFill>
                   <a:srgbClr val="4A6B5D"/>
                 </a:solidFill>
@@ -4695,469 +4532,22 @@
                 <a:ea typeface="Arial" pitchFamily="34" charset="-122"/>
                 <a:cs typeface="Arial" pitchFamily="34" charset="-120"/>
               </a:rPr>
-              <a:t>1 · Framing</a:t>
-            </a:r>
-            <a:endParaRPr lang="en-US" sz="1150" dirty="0"/>
-          </a:p>
-        </p:txBody>
-      </p:sp>
-      <p:sp>
-        <p:nvSpPr>
-          <p:cNvPr id="10" name="Text 7"/>
-          <p:cNvSpPr/>
-          <p:nvPr/>
-        </p:nvSpPr>
-        <p:spPr>
-          <a:xfrm>
-            <a:off x="8641080" y="1645920"/>
-            <a:ext cx="2743200" cy="658368"/>
-          </a:xfrm>
-          <a:prstGeom prst="rect">
-            <a:avLst/>
-          </a:prstGeom>
-          <a:noFill/>
-          <a:ln/>
-        </p:spPr>
-        <p:txBody>
-          <a:bodyPr wrap="square" lIns="0" tIns="0" rIns="0" bIns="0" rtlCol="0" anchor="t"/>
-          <a:lstStyle/>
-          <a:p>
-            <a:pPr indent="0" marL="0">
-              <a:lnSpc>
-                <a:spcPts val="1500"/>
-              </a:lnSpc>
-              <a:buNone/>
-            </a:pPr>
-            <a:r>
-              <a:rPr lang="en-US" sz="1250" dirty="0">
-                <a:solidFill>
-                  <a:srgbClr val="24313F"/>
-                </a:solidFill>
-                <a:latin typeface="Georgia" pitchFamily="34" charset="0"/>
-                <a:ea typeface="Georgia" pitchFamily="34" charset="-122"/>
-                <a:cs typeface="Georgia" pitchFamily="34" charset="-120"/>
-              </a:rPr>
-              <a:t>A narrow service corridor. The club floor is kept out of frame.</a:t>
-            </a:r>
-            <a:endParaRPr lang="en-US" sz="1250" dirty="0"/>
-          </a:p>
-        </p:txBody>
-      </p:sp>
-      <p:sp>
-        <p:nvSpPr>
-          <p:cNvPr id="11" name="Text 8"/>
-          <p:cNvSpPr/>
-          <p:nvPr/>
-        </p:nvSpPr>
-        <p:spPr>
-          <a:xfrm>
-            <a:off x="6903720" y="2359152"/>
-            <a:ext cx="1691640" cy="658368"/>
-          </a:xfrm>
-          <a:prstGeom prst="rect">
-            <a:avLst/>
-          </a:prstGeom>
-          <a:noFill/>
-          <a:ln/>
-        </p:spPr>
-        <p:txBody>
-          <a:bodyPr wrap="square" lIns="0" tIns="0" rIns="0" bIns="0" rtlCol="0" anchor="t"/>
-          <a:lstStyle/>
-          <a:p>
-            <a:pPr indent="0" marL="0">
-              <a:buNone/>
-            </a:pPr>
-            <a:r>
-              <a:rPr lang="en-US" sz="1150" b="1" spc="50" kern="0" dirty="0">
-                <a:solidFill>
-                  <a:srgbClr val="4A6B5D"/>
-                </a:solidFill>
-                <a:latin typeface="Arial" pitchFamily="34" charset="0"/>
-                <a:ea typeface="Arial" pitchFamily="34" charset="-122"/>
-                <a:cs typeface="Arial" pitchFamily="34" charset="-120"/>
-              </a:rPr>
-              <a:t>2 · Camera</a:t>
-            </a:r>
-            <a:endParaRPr lang="en-US" sz="1150" dirty="0"/>
-          </a:p>
-        </p:txBody>
-      </p:sp>
-      <p:sp>
-        <p:nvSpPr>
-          <p:cNvPr id="12" name="Text 9"/>
-          <p:cNvSpPr/>
-          <p:nvPr/>
-        </p:nvSpPr>
-        <p:spPr>
-          <a:xfrm>
-            <a:off x="8641080" y="2359152"/>
-            <a:ext cx="2743200" cy="658368"/>
-          </a:xfrm>
-          <a:prstGeom prst="rect">
-            <a:avLst/>
-          </a:prstGeom>
-          <a:noFill/>
-          <a:ln/>
-        </p:spPr>
-        <p:txBody>
-          <a:bodyPr wrap="square" lIns="0" tIns="0" rIns="0" bIns="0" rtlCol="0" anchor="t"/>
-          <a:lstStyle/>
-          <a:p>
-            <a:pPr indent="0" marL="0">
-              <a:lnSpc>
-                <a:spcPts val="1500"/>
-              </a:lnSpc>
-              <a:buNone/>
-            </a:pPr>
-            <a:r>
-              <a:rPr lang="en-US" sz="1250" dirty="0">
-                <a:solidFill>
-                  <a:srgbClr val="24313F"/>
-                </a:solidFill>
-                <a:latin typeface="Georgia" pitchFamily="34" charset="0"/>
-                <a:ea typeface="Georgia" pitchFamily="34" charset="-122"/>
-                <a:cs typeface="Georgia" pitchFamily="34" charset="-120"/>
-              </a:rPr>
-              <a:t>Steadicam, eye level, gliding forward without a cut.</a:t>
-            </a:r>
-            <a:endParaRPr lang="en-US" sz="1250" dirty="0"/>
-          </a:p>
-        </p:txBody>
-      </p:sp>
-      <p:sp>
-        <p:nvSpPr>
-          <p:cNvPr id="13" name="Text 10"/>
-          <p:cNvSpPr/>
-          <p:nvPr/>
-        </p:nvSpPr>
-        <p:spPr>
-          <a:xfrm>
-            <a:off x="6903720" y="3072384"/>
-            <a:ext cx="1691640" cy="658368"/>
-          </a:xfrm>
-          <a:prstGeom prst="rect">
-            <a:avLst/>
-          </a:prstGeom>
-          <a:noFill/>
-          <a:ln/>
-        </p:spPr>
-        <p:txBody>
-          <a:bodyPr wrap="square" lIns="0" tIns="0" rIns="0" bIns="0" rtlCol="0" anchor="t"/>
-          <a:lstStyle/>
-          <a:p>
-            <a:pPr indent="0" marL="0">
-              <a:buNone/>
-            </a:pPr>
-            <a:r>
-              <a:rPr lang="en-US" sz="1150" b="1" spc="50" kern="0" dirty="0">
-                <a:solidFill>
-                  <a:srgbClr val="4A6B5D"/>
-                </a:solidFill>
-                <a:latin typeface="Arial" pitchFamily="34" charset="0"/>
-                <a:ea typeface="Arial" pitchFamily="34" charset="-122"/>
-                <a:cs typeface="Arial" pitchFamily="34" charset="-120"/>
-              </a:rPr>
-              <a:t>3 · Light</a:t>
-            </a:r>
-            <a:endParaRPr lang="en-US" sz="1150" dirty="0"/>
-          </a:p>
-        </p:txBody>
-      </p:sp>
-      <p:sp>
-        <p:nvSpPr>
-          <p:cNvPr id="14" name="Text 11"/>
-          <p:cNvSpPr/>
-          <p:nvPr/>
-        </p:nvSpPr>
-        <p:spPr>
-          <a:xfrm>
-            <a:off x="8641080" y="3072384"/>
-            <a:ext cx="2743200" cy="658368"/>
-          </a:xfrm>
-          <a:prstGeom prst="rect">
-            <a:avLst/>
-          </a:prstGeom>
-          <a:noFill/>
-          <a:ln/>
-        </p:spPr>
-        <p:txBody>
-          <a:bodyPr wrap="square" lIns="0" tIns="0" rIns="0" bIns="0" rtlCol="0" anchor="t"/>
-          <a:lstStyle/>
-          <a:p>
-            <a:pPr indent="0" marL="0">
-              <a:lnSpc>
-                <a:spcPts val="1500"/>
-              </a:lnSpc>
-              <a:buNone/>
-            </a:pPr>
-            <a:r>
-              <a:rPr lang="en-US" sz="1250" dirty="0">
-                <a:solidFill>
-                  <a:srgbClr val="24313F"/>
-                </a:solidFill>
-                <a:latin typeface="Georgia" pitchFamily="34" charset="0"/>
-                <a:ea typeface="Georgia" pitchFamily="34" charset="-122"/>
-                <a:cs typeface="Georgia" pitchFamily="34" charset="-120"/>
-              </a:rPr>
-              <a:t>Bare bulbs, warm and uneven: a working space, not a showroom.</a:t>
-            </a:r>
-            <a:endParaRPr lang="en-US" sz="1250" dirty="0"/>
-          </a:p>
-        </p:txBody>
-      </p:sp>
-      <p:sp>
-        <p:nvSpPr>
-          <p:cNvPr id="15" name="Text 12"/>
-          <p:cNvSpPr/>
-          <p:nvPr/>
-        </p:nvSpPr>
-        <p:spPr>
-          <a:xfrm>
-            <a:off x="6903720" y="3785616"/>
-            <a:ext cx="1691640" cy="658368"/>
-          </a:xfrm>
-          <a:prstGeom prst="rect">
-            <a:avLst/>
-          </a:prstGeom>
-          <a:noFill/>
-          <a:ln/>
-        </p:spPr>
-        <p:txBody>
-          <a:bodyPr wrap="square" lIns="0" tIns="0" rIns="0" bIns="0" rtlCol="0" anchor="t"/>
-          <a:lstStyle/>
-          <a:p>
-            <a:pPr indent="0" marL="0">
-              <a:buNone/>
-            </a:pPr>
-            <a:r>
-              <a:rPr lang="en-US" sz="1150" b="1" spc="50" kern="0" dirty="0">
-                <a:solidFill>
-                  <a:srgbClr val="4A6B5D"/>
-                </a:solidFill>
-                <a:latin typeface="Arial" pitchFamily="34" charset="0"/>
-                <a:ea typeface="Arial" pitchFamily="34" charset="-122"/>
-                <a:cs typeface="Arial" pitchFamily="34" charset="-120"/>
-              </a:rPr>
-              <a:t>4 · Mise-en-scène</a:t>
-            </a:r>
-            <a:endParaRPr lang="en-US" sz="1150" dirty="0"/>
-          </a:p>
-        </p:txBody>
-      </p:sp>
-      <p:sp>
-        <p:nvSpPr>
-          <p:cNvPr id="16" name="Text 13"/>
-          <p:cNvSpPr/>
-          <p:nvPr/>
-        </p:nvSpPr>
-        <p:spPr>
-          <a:xfrm>
-            <a:off x="8641080" y="3785616"/>
-            <a:ext cx="2743200" cy="658368"/>
-          </a:xfrm>
-          <a:prstGeom prst="rect">
-            <a:avLst/>
-          </a:prstGeom>
-          <a:noFill/>
-          <a:ln/>
-        </p:spPr>
-        <p:txBody>
-          <a:bodyPr wrap="square" lIns="0" tIns="0" rIns="0" bIns="0" rtlCol="0" anchor="t"/>
-          <a:lstStyle/>
-          <a:p>
-            <a:pPr indent="0" marL="0">
-              <a:lnSpc>
-                <a:spcPts val="1500"/>
-              </a:lnSpc>
-              <a:buNone/>
-            </a:pPr>
-            <a:r>
-              <a:rPr lang="en-US" sz="1250" dirty="0">
-                <a:solidFill>
-                  <a:srgbClr val="24313F"/>
-                </a:solidFill>
-                <a:latin typeface="Georgia" pitchFamily="34" charset="0"/>
-                <a:ea typeface="Georgia" pitchFamily="34" charset="-122"/>
-                <a:cs typeface="Georgia" pitchFamily="34" charset="-120"/>
-              </a:rPr>
-              <a:t>Crates, steel counters, kitchen uniforms: the back route in.</a:t>
-            </a:r>
-            <a:endParaRPr lang="en-US" sz="1250" dirty="0"/>
-          </a:p>
-        </p:txBody>
-      </p:sp>
-      <p:sp>
-        <p:nvSpPr>
-          <p:cNvPr id="17" name="Text 14"/>
-          <p:cNvSpPr/>
-          <p:nvPr/>
-        </p:nvSpPr>
-        <p:spPr>
-          <a:xfrm>
-            <a:off x="6903720" y="4498848"/>
-            <a:ext cx="1691640" cy="658368"/>
-          </a:xfrm>
-          <a:prstGeom prst="rect">
-            <a:avLst/>
-          </a:prstGeom>
-          <a:noFill/>
-          <a:ln/>
-        </p:spPr>
-        <p:txBody>
-          <a:bodyPr wrap="square" lIns="0" tIns="0" rIns="0" bIns="0" rtlCol="0" anchor="t"/>
-          <a:lstStyle/>
-          <a:p>
-            <a:pPr indent="0" marL="0">
-              <a:buNone/>
-            </a:pPr>
-            <a:r>
-              <a:rPr lang="en-US" sz="1150" b="1" spc="50" kern="0" dirty="0">
-                <a:solidFill>
-                  <a:srgbClr val="4A6B5D"/>
-                </a:solidFill>
-                <a:latin typeface="Arial" pitchFamily="34" charset="0"/>
-                <a:ea typeface="Arial" pitchFamily="34" charset="-122"/>
-                <a:cs typeface="Arial" pitchFamily="34" charset="-120"/>
-              </a:rPr>
-              <a:t>5 · Sound</a:t>
-            </a:r>
-            <a:endParaRPr lang="en-US" sz="1150" dirty="0"/>
-          </a:p>
-        </p:txBody>
-      </p:sp>
-      <p:sp>
-        <p:nvSpPr>
-          <p:cNvPr id="18" name="Text 15"/>
-          <p:cNvSpPr/>
-          <p:nvPr/>
-        </p:nvSpPr>
-        <p:spPr>
-          <a:xfrm>
-            <a:off x="8641080" y="4498848"/>
-            <a:ext cx="2743200" cy="658368"/>
-          </a:xfrm>
-          <a:prstGeom prst="rect">
-            <a:avLst/>
-          </a:prstGeom>
-          <a:noFill/>
-          <a:ln/>
-        </p:spPr>
-        <p:txBody>
-          <a:bodyPr wrap="square" lIns="0" tIns="0" rIns="0" bIns="0" rtlCol="0" anchor="t"/>
-          <a:lstStyle/>
-          <a:p>
-            <a:pPr indent="0" marL="0">
-              <a:lnSpc>
-                <a:spcPts val="1500"/>
-              </a:lnSpc>
-              <a:buNone/>
-            </a:pPr>
-            <a:r>
-              <a:rPr lang="en-US" sz="1250" dirty="0">
-                <a:solidFill>
-                  <a:srgbClr val="24313F"/>
-                </a:solidFill>
-                <a:latin typeface="Georgia" pitchFamily="34" charset="0"/>
-                <a:ea typeface="Georgia" pitchFamily="34" charset="-122"/>
-                <a:cs typeface="Georgia" pitchFamily="34" charset="-120"/>
-              </a:rPr>
-              <a:t>The still cannot show it: the song plays over, the kitchen clatters under.</a:t>
-            </a:r>
-            <a:endParaRPr lang="en-US" sz="1250" dirty="0"/>
-          </a:p>
-        </p:txBody>
-      </p:sp>
-      <p:sp>
-        <p:nvSpPr>
-          <p:cNvPr id="19" name="Text 16"/>
-          <p:cNvSpPr/>
-          <p:nvPr/>
-        </p:nvSpPr>
-        <p:spPr>
-          <a:xfrm>
-            <a:off x="6903720" y="5212080"/>
-            <a:ext cx="1691640" cy="658368"/>
-          </a:xfrm>
-          <a:prstGeom prst="rect">
-            <a:avLst/>
-          </a:prstGeom>
-          <a:noFill/>
-          <a:ln/>
-        </p:spPr>
-        <p:txBody>
-          <a:bodyPr wrap="square" lIns="0" tIns="0" rIns="0" bIns="0" rtlCol="0" anchor="t"/>
-          <a:lstStyle/>
-          <a:p>
-            <a:pPr indent="0" marL="0">
-              <a:buNone/>
-            </a:pPr>
-            <a:r>
-              <a:rPr lang="en-US" sz="1150" b="1" spc="50" kern="0" dirty="0">
-                <a:solidFill>
-                  <a:srgbClr val="4A6B5D"/>
-                </a:solidFill>
-                <a:latin typeface="Arial" pitchFamily="34" charset="0"/>
-                <a:ea typeface="Arial" pitchFamily="34" charset="-122"/>
-                <a:cs typeface="Arial" pitchFamily="34" charset="-120"/>
-              </a:rPr>
-              <a:t>6 · Edit</a:t>
-            </a:r>
-            <a:endParaRPr lang="en-US" sz="1150" dirty="0"/>
-          </a:p>
-        </p:txBody>
-      </p:sp>
-      <p:sp>
-        <p:nvSpPr>
-          <p:cNvPr id="20" name="Text 17"/>
-          <p:cNvSpPr/>
-          <p:nvPr/>
-        </p:nvSpPr>
-        <p:spPr>
-          <a:xfrm>
-            <a:off x="8641080" y="5212080"/>
-            <a:ext cx="2743200" cy="658368"/>
-          </a:xfrm>
-          <a:prstGeom prst="rect">
-            <a:avLst/>
-          </a:prstGeom>
-          <a:noFill/>
-          <a:ln/>
-        </p:spPr>
-        <p:txBody>
-          <a:bodyPr wrap="square" lIns="0" tIns="0" rIns="0" bIns="0" rtlCol="0" anchor="t"/>
-          <a:lstStyle/>
-          <a:p>
-            <a:pPr indent="0" marL="0">
-              <a:lnSpc>
-                <a:spcPts val="1500"/>
-              </a:lnSpc>
-              <a:buNone/>
-            </a:pPr>
-            <a:r>
-              <a:rPr lang="en-US" sz="1250" dirty="0">
-                <a:solidFill>
-                  <a:srgbClr val="24313F"/>
-                </a:solidFill>
-                <a:latin typeface="Georgia" pitchFamily="34" charset="0"/>
-                <a:ea typeface="Georgia" pitchFamily="34" charset="-122"/>
-                <a:cs typeface="Georgia" pitchFamily="34" charset="-120"/>
-              </a:rPr>
-              <a:t>No cut for three minutes. The unbroken take means privilege.</a:t>
-            </a:r>
-            <a:endParaRPr lang="en-US" sz="1250" dirty="0"/>
-          </a:p>
-        </p:txBody>
-      </p:sp>
-      <p:sp>
-        <p:nvSpPr>
-          <p:cNvPr id="21" name="Shape 18"/>
-          <p:cNvSpPr/>
-          <p:nvPr/>
-        </p:nvSpPr>
-        <p:spPr>
-          <a:xfrm>
-            <a:off x="822960" y="6382512"/>
-            <a:ext cx="10543032" cy="0"/>
+              <a:t>THE BAR</a:t>
+            </a:r>
+            <a:endParaRPr lang="en-US" sz="1100" dirty="0"/>
+          </a:p>
+        </p:txBody>
+      </p:sp>
+      <p:sp>
+        <p:nvSpPr>
+          <p:cNvPr id="5" name="Shape 2"/>
+          <p:cNvSpPr/>
+          <p:nvPr/>
+        </p:nvSpPr>
+        <p:spPr>
+          <a:xfrm>
+            <a:off x="822960" y="1051560"/>
+            <a:ext cx="6492240" cy="0"/>
           </a:xfrm>
           <a:prstGeom prst="line">
             <a:avLst/>
@@ -5173,79 +4563,142 @@
       </p:sp>
       <p:sp>
         <p:nvSpPr>
-          <p:cNvPr id="22" name="Text 19"/>
-          <p:cNvSpPr/>
-          <p:nvPr/>
-        </p:nvSpPr>
-        <p:spPr>
-          <a:xfrm>
-            <a:off x="822960" y="6419088"/>
-            <a:ext cx="7315200" cy="274320"/>
-          </a:xfrm>
-          <a:prstGeom prst="rect">
-            <a:avLst/>
-          </a:prstGeom>
-          <a:noFill/>
-          <a:ln/>
-        </p:spPr>
-        <p:txBody>
-          <a:bodyPr wrap="square" lIns="0" tIns="0" rIns="0" bIns="0" rtlCol="0" anchor="ctr"/>
-          <a:lstStyle/>
-          <a:p>
-            <a:pPr indent="0" marL="0">
-              <a:buNone/>
-            </a:pPr>
-            <a:r>
-              <a:rPr lang="en-US" sz="900" spc="150" kern="0" dirty="0">
-                <a:solidFill>
-                  <a:srgbClr val="7A7F72"/>
+          <p:cNvPr id="6" name="Text 3"/>
+          <p:cNvSpPr/>
+          <p:nvPr/>
+        </p:nvSpPr>
+        <p:spPr>
+          <a:xfrm>
+            <a:off x="822960" y="1234440"/>
+            <a:ext cx="6492240" cy="1737360"/>
+          </a:xfrm>
+          <a:prstGeom prst="rect">
+            <a:avLst/>
+          </a:prstGeom>
+          <a:noFill/>
+          <a:ln/>
+        </p:spPr>
+        <p:txBody>
+          <a:bodyPr wrap="square" lIns="0" tIns="0" rIns="0" bIns="0" rtlCol="0" anchor="t"/>
+          <a:lstStyle/>
+          <a:p>
+            <a:pPr indent="0" marL="0">
+              <a:lnSpc>
+                <a:spcPts val="4600"/>
+              </a:lnSpc>
+              <a:buNone/>
+            </a:pPr>
+            <a:r>
+              <a:rPr lang="en-US" sz="4400" dirty="0">
+                <a:solidFill>
+                  <a:srgbClr val="24313F"/>
+                </a:solidFill>
+                <a:latin typeface="Georgia" pitchFamily="34" charset="0"/>
+                <a:ea typeface="Georgia" pitchFamily="34" charset="-122"/>
+                <a:cs typeface="Georgia" pitchFamily="34" charset="-120"/>
+              </a:rPr>
+              <a:t>Painted from</a:t>
+            </a:r>
+            <a:endParaRPr lang="en-US" sz="4400" dirty="0"/>
+          </a:p>
+          <a:p>
+            <a:pPr indent="0" marL="0">
+              <a:lnSpc>
+                <a:spcPts val="4600"/>
+              </a:lnSpc>
+              <a:buNone/>
+            </a:pPr>
+            <a:r>
+              <a:rPr lang="en-US" sz="4400" dirty="0">
+                <a:solidFill>
+                  <a:srgbClr val="24313F"/>
+                </a:solidFill>
+                <a:latin typeface="Georgia" pitchFamily="34" charset="0"/>
+                <a:ea typeface="Georgia" pitchFamily="34" charset="-122"/>
+                <a:cs typeface="Georgia" pitchFamily="34" charset="-120"/>
+              </a:rPr>
+              <a:t>the sketch</a:t>
+            </a:r>
+            <a:endParaRPr lang="en-US" sz="4400" dirty="0"/>
+          </a:p>
+        </p:txBody>
+      </p:sp>
+      <p:sp>
+        <p:nvSpPr>
+          <p:cNvPr id="7" name="Text 4"/>
+          <p:cNvSpPr/>
+          <p:nvPr/>
+        </p:nvSpPr>
+        <p:spPr>
+          <a:xfrm>
+            <a:off x="822960" y="3246120"/>
+            <a:ext cx="6583680" cy="2560320"/>
+          </a:xfrm>
+          <a:prstGeom prst="rect">
+            <a:avLst/>
+          </a:prstGeom>
+          <a:noFill/>
+          <a:ln/>
+        </p:spPr>
+        <p:txBody>
+          <a:bodyPr wrap="square" lIns="0" tIns="0" rIns="0" bIns="0" rtlCol="0" anchor="t"/>
+          <a:lstStyle/>
+          <a:p>
+            <a:pPr indent="0" marL="0">
+              <a:lnSpc>
+                <a:spcPts val="2500"/>
+              </a:lnSpc>
+              <a:buNone/>
+            </a:pPr>
+            <a:r>
+              <a:rPr lang="en-US" sz="1700" dirty="0">
+                <a:solidFill>
+                  <a:srgbClr val="24313F"/>
+                </a:solidFill>
+                <a:latin typeface="Georgia" pitchFamily="34" charset="0"/>
+                <a:ea typeface="Georgia" pitchFamily="34" charset="-122"/>
+                <a:cs typeface="Georgia" pitchFamily="34" charset="-120"/>
+              </a:rPr>
+              <a:t>Rubens' assistants painted a whole ceiling from a sketch this size. The plan answered every question in advance.</a:t>
+            </a:r>
+            <a:endParaRPr lang="en-US" sz="1700" dirty="0"/>
+          </a:p>
+          <a:p>
+            <a:pPr indent="0" marL="0">
+              <a:lnSpc>
+                <a:spcPts val="2500"/>
+              </a:lnSpc>
+              <a:buNone/>
+            </a:pPr>
+            <a:r>
+              <a:rPr lang="en-US" sz="1500" b="1" spc="100" kern="0" dirty="0">
+                <a:solidFill>
+                  <a:srgbClr val="4A6B5D"/>
                 </a:solidFill>
                 <a:latin typeface="Arial" pitchFamily="34" charset="0"/>
                 <a:ea typeface="Arial" pitchFamily="34" charset="-122"/>
                 <a:cs typeface="Arial" pitchFamily="34" charset="-120"/>
               </a:rPr>
-              <a:t>MEDIA STUDIES 9607 · SEMESTER I</a:t>
-            </a:r>
-            <a:endParaRPr lang="en-US" sz="900" dirty="0"/>
-          </a:p>
-        </p:txBody>
-      </p:sp>
-      <p:sp>
-        <p:nvSpPr>
-          <p:cNvPr id="23" name="Text 20"/>
-          <p:cNvSpPr/>
-          <p:nvPr/>
-        </p:nvSpPr>
-        <p:spPr>
-          <a:xfrm>
-            <a:off x="10268712" y="6355080"/>
-            <a:ext cx="1097280" cy="365760"/>
-          </a:xfrm>
-          <a:prstGeom prst="rect">
-            <a:avLst/>
-          </a:prstGeom>
-          <a:noFill/>
-          <a:ln/>
-        </p:spPr>
-        <p:txBody>
-          <a:bodyPr wrap="square" lIns="0" tIns="0" rIns="0" bIns="0" rtlCol="0" anchor="ctr"/>
-          <a:lstStyle/>
-          <a:p>
-            <a:pPr algn="r" indent="0" marL="0">
-              <a:buNone/>
-            </a:pPr>
-            <a:r>
-              <a:rPr lang="en-US" sz="1600" dirty="0">
-                <a:solidFill>
-                  <a:srgbClr val="A3C1AD"/>
-                </a:solidFill>
-                <a:latin typeface="Georgia" pitchFamily="34" charset="0"/>
-                <a:ea typeface="Georgia" pitchFamily="34" charset="-122"/>
-                <a:cs typeface="Georgia" pitchFamily="34" charset="-120"/>
-              </a:rPr>
-              <a:t>01</a:t>
-            </a:r>
-            <a:endParaRPr lang="en-US" sz="1600" dirty="0"/>
+              <a:t>THE STANDARD   </a:t>
+            </a:r>
+            <a:pPr indent="0" marL="0">
+              <a:lnSpc>
+                <a:spcPts val="2500"/>
+              </a:lnSpc>
+              <a:buNone/>
+            </a:pPr>
+            <a:r>
+              <a:rPr lang="en-US" sz="1700" dirty="0">
+                <a:solidFill>
+                  <a:srgbClr val="24313F"/>
+                </a:solidFill>
+                <a:latin typeface="Georgia" pitchFamily="34" charset="0"/>
+                <a:ea typeface="Georgia" pitchFamily="34" charset="-122"/>
+                <a:cs typeface="Georgia" pitchFamily="34" charset="-120"/>
+              </a:rPr>
+              <a:t>Your Component 1 plan is ready when a person who was not in the room could shoot it.</a:t>
+            </a:r>
+            <a:endParaRPr lang="en-US" sz="1700" dirty="0"/>
           </a:p>
         </p:txBody>
       </p:sp>
@@ -5314,7 +4767,7 @@
                 <a:ea typeface="Arial" pitchFamily="34" charset="-122"/>
                 <a:cs typeface="Arial" pitchFamily="34" charset="-120"/>
               </a:rPr>
-              <a:t>THE VIEWING PROTOCOL</a:t>
+              <a:t>THE LOCK · TEN ITEMS</a:t>
             </a:r>
             <a:endParaRPr lang="en-US" sz="1100" dirty="0"/>
           </a:p>
@@ -5353,7 +4806,7 @@
                 <a:ea typeface="Arial" pitchFamily="34" charset="-122"/>
                 <a:cs typeface="Arial" pitchFamily="34" charset="-120"/>
               </a:rPr>
-              <a:t>SAME ORDER, EVERY EXTRACT, FOR TWO YEARS</a:t>
+              <a:t>DESCRIBE, QUESTION, SUGGEST</a:t>
             </a:r>
             <a:endParaRPr lang="en-US" sz="1100" dirty="0"/>
           </a:p>
@@ -5415,7 +4868,7 @@
                 <a:ea typeface="Georgia" pitchFamily="34" charset="-122"/>
                 <a:cs typeface="Georgia" pitchFamily="34" charset="-120"/>
               </a:rPr>
-              <a:t>Six passes, always in this order</a:t>
+              <a:t>The shootability checklist</a:t>
             </a:r>
             <a:endParaRPr lang="en-US" sz="3200" dirty="0"/>
           </a:p>
@@ -5423,23 +4876,42 @@
       </p:sp>
       <p:sp>
         <p:nvSpPr>
-          <p:cNvPr id="6" name="Shape 4"/>
-          <p:cNvSpPr/>
-          <p:nvPr/>
-        </p:nvSpPr>
-        <p:spPr>
-          <a:xfrm>
-            <a:off x="822960" y="1783080"/>
-            <a:ext cx="566928" cy="566928"/>
-          </a:xfrm>
-          <a:prstGeom prst="rect">
-            <a:avLst/>
-          </a:prstGeom>
-          <a:solidFill>
-            <a:srgbClr val="A3C1AD"/>
-          </a:solidFill>
-          <a:ln/>
-        </p:spPr>
+          <p:cNvPr id="6" name="Text 4"/>
+          <p:cNvSpPr/>
+          <p:nvPr/>
+        </p:nvSpPr>
+        <p:spPr>
+          <a:xfrm>
+            <a:off x="822960" y="1828800"/>
+            <a:ext cx="548640" cy="502920"/>
+          </a:xfrm>
+          <a:prstGeom prst="rect">
+            <a:avLst/>
+          </a:prstGeom>
+          <a:noFill/>
+          <a:ln/>
+        </p:spPr>
+        <p:txBody>
+          <a:bodyPr wrap="square" lIns="0" tIns="0" rIns="0" bIns="0" rtlCol="0" anchor="ctr"/>
+          <a:lstStyle/>
+          <a:p>
+            <a:pPr indent="0" marL="0">
+              <a:buNone/>
+            </a:pPr>
+            <a:r>
+              <a:rPr lang="en-US" sz="1700" dirty="0">
+                <a:solidFill>
+                  <a:srgbClr val="A3C1AD"/>
+                </a:solidFill>
+                <a:latin typeface="Georgia" pitchFamily="34" charset="0"/>
+                <a:ea typeface="Georgia" pitchFamily="34" charset="-122"/>
+                <a:cs typeface="Georgia" pitchFamily="34" charset="-120"/>
+              </a:rPr>
+              <a:t>01</a:t>
+            </a:r>
+            <a:endParaRPr lang="en-US" sz="1700" dirty="0"/>
+          </a:p>
+        </p:txBody>
       </p:sp>
       <p:sp>
         <p:nvSpPr>
@@ -5449,24 +4921,24 @@
         </p:nvSpPr>
         <p:spPr>
           <a:xfrm>
-            <a:off x="822960" y="1783080"/>
-            <a:ext cx="566928" cy="566928"/>
-          </a:xfrm>
-          <a:prstGeom prst="rect">
-            <a:avLst/>
-          </a:prstGeom>
-          <a:noFill/>
-          <a:ln/>
-        </p:spPr>
-        <p:txBody>
-          <a:bodyPr wrap="square" lIns="0" tIns="0" rIns="0" bIns="0" rtlCol="0" anchor="ctr"/>
-          <a:lstStyle/>
-          <a:p>
-            <a:pPr algn="ctr" indent="0" marL="0">
-              <a:buNone/>
-            </a:pPr>
-            <a:r>
-              <a:rPr lang="en-US" sz="2000" dirty="0">
+            <a:off x="1371600" y="1828800"/>
+            <a:ext cx="3154680" cy="502920"/>
+          </a:xfrm>
+          <a:prstGeom prst="rect">
+            <a:avLst/>
+          </a:prstGeom>
+          <a:noFill/>
+          <a:ln/>
+        </p:spPr>
+        <p:txBody>
+          <a:bodyPr wrap="square" lIns="0" tIns="0" rIns="0" bIns="0" rtlCol="0" anchor="ctr"/>
+          <a:lstStyle/>
+          <a:p>
+            <a:pPr indent="0" marL="0">
+              <a:buNone/>
+            </a:pPr>
+            <a:r>
+              <a:rPr lang="en-US" sz="1450" dirty="0">
                 <a:solidFill>
                   <a:srgbClr val="24313F"/>
                 </a:solidFill>
@@ -5474,867 +4946,22 @@
                 <a:ea typeface="Georgia" pitchFamily="34" charset="-122"/>
                 <a:cs typeface="Georgia" pitchFamily="34" charset="-120"/>
               </a:rPr>
-              <a:t>1</a:t>
-            </a:r>
-            <a:endParaRPr lang="en-US" sz="2000" dirty="0"/>
-          </a:p>
-        </p:txBody>
-      </p:sp>
-      <p:sp>
-        <p:nvSpPr>
-          <p:cNvPr id="8" name="Text 6"/>
-          <p:cNvSpPr/>
-          <p:nvPr/>
-        </p:nvSpPr>
-        <p:spPr>
-          <a:xfrm>
-            <a:off x="1645920" y="1783080"/>
-            <a:ext cx="2743200" cy="566928"/>
-          </a:xfrm>
-          <a:prstGeom prst="rect">
-            <a:avLst/>
-          </a:prstGeom>
-          <a:noFill/>
-          <a:ln/>
-        </p:spPr>
-        <p:txBody>
-          <a:bodyPr wrap="square" lIns="0" tIns="0" rIns="0" bIns="0" rtlCol="0" anchor="ctr"/>
-          <a:lstStyle/>
-          <a:p>
-            <a:pPr indent="0" marL="0">
-              <a:buNone/>
-            </a:pPr>
-            <a:r>
-              <a:rPr lang="en-US" sz="2100" dirty="0">
-                <a:solidFill>
-                  <a:srgbClr val="4A6B5D"/>
-                </a:solidFill>
-                <a:latin typeface="Georgia" pitchFamily="34" charset="0"/>
-                <a:ea typeface="Georgia" pitchFamily="34" charset="-122"/>
-                <a:cs typeface="Georgia" pitchFamily="34" charset="-120"/>
-              </a:rPr>
-              <a:t>Framing</a:t>
-            </a:r>
-            <a:endParaRPr lang="en-US" sz="2100" dirty="0"/>
-          </a:p>
-        </p:txBody>
-      </p:sp>
-      <p:sp>
-        <p:nvSpPr>
-          <p:cNvPr id="9" name="Text 7"/>
-          <p:cNvSpPr/>
-          <p:nvPr/>
-        </p:nvSpPr>
-        <p:spPr>
-          <a:xfrm>
-            <a:off x="4480560" y="1783080"/>
-            <a:ext cx="7498080" cy="566928"/>
-          </a:xfrm>
-          <a:prstGeom prst="rect">
-            <a:avLst/>
-          </a:prstGeom>
-          <a:noFill/>
-          <a:ln/>
-        </p:spPr>
-        <p:txBody>
-          <a:bodyPr wrap="square" lIns="0" tIns="0" rIns="0" bIns="0" rtlCol="0" anchor="ctr"/>
-          <a:lstStyle/>
-          <a:p>
-            <a:pPr indent="0" marL="0">
-              <a:buNone/>
-            </a:pPr>
-            <a:r>
-              <a:rPr lang="en-US" sz="1550" dirty="0">
-                <a:solidFill>
-                  <a:srgbClr val="24313F"/>
-                </a:solidFill>
-                <a:latin typeface="Georgia" pitchFamily="34" charset="0"/>
-                <a:ea typeface="Georgia" pitchFamily="34" charset="-122"/>
-                <a:cs typeface="Georgia" pitchFamily="34" charset="-120"/>
-              </a:rPr>
-              <a:t>What is in the frame, and what has been kept out of it.</a:t>
-            </a:r>
-            <a:endParaRPr lang="en-US" sz="1550" dirty="0"/>
-          </a:p>
-        </p:txBody>
-      </p:sp>
-      <p:sp>
-        <p:nvSpPr>
-          <p:cNvPr id="10" name="Shape 8"/>
-          <p:cNvSpPr/>
-          <p:nvPr/>
-        </p:nvSpPr>
-        <p:spPr>
-          <a:xfrm>
-            <a:off x="822960" y="2441448"/>
-            <a:ext cx="566928" cy="566928"/>
-          </a:xfrm>
-          <a:prstGeom prst="rect">
-            <a:avLst/>
-          </a:prstGeom>
-          <a:solidFill>
-            <a:srgbClr val="A3C1AD"/>
-          </a:solidFill>
-          <a:ln/>
-        </p:spPr>
-      </p:sp>
-      <p:sp>
-        <p:nvSpPr>
-          <p:cNvPr id="11" name="Text 9"/>
-          <p:cNvSpPr/>
-          <p:nvPr/>
-        </p:nvSpPr>
-        <p:spPr>
-          <a:xfrm>
-            <a:off x="822960" y="2441448"/>
-            <a:ext cx="566928" cy="566928"/>
-          </a:xfrm>
-          <a:prstGeom prst="rect">
-            <a:avLst/>
-          </a:prstGeom>
-          <a:noFill/>
-          <a:ln/>
-        </p:spPr>
-        <p:txBody>
-          <a:bodyPr wrap="square" lIns="0" tIns="0" rIns="0" bIns="0" rtlCol="0" anchor="ctr"/>
-          <a:lstStyle/>
-          <a:p>
-            <a:pPr algn="ctr" indent="0" marL="0">
-              <a:buNone/>
-            </a:pPr>
-            <a:r>
-              <a:rPr lang="en-US" sz="2000" dirty="0">
-                <a:solidFill>
-                  <a:srgbClr val="24313F"/>
-                </a:solidFill>
-                <a:latin typeface="Georgia" pitchFamily="34" charset="0"/>
-                <a:ea typeface="Georgia" pitchFamily="34" charset="-122"/>
-                <a:cs typeface="Georgia" pitchFamily="34" charset="-120"/>
-              </a:rPr>
-              <a:t>2</a:t>
-            </a:r>
-            <a:endParaRPr lang="en-US" sz="2000" dirty="0"/>
-          </a:p>
-        </p:txBody>
-      </p:sp>
-      <p:sp>
-        <p:nvSpPr>
-          <p:cNvPr id="12" name="Text 10"/>
-          <p:cNvSpPr/>
-          <p:nvPr/>
-        </p:nvSpPr>
-        <p:spPr>
-          <a:xfrm>
-            <a:off x="1645920" y="2441448"/>
-            <a:ext cx="2743200" cy="566928"/>
-          </a:xfrm>
-          <a:prstGeom prst="rect">
-            <a:avLst/>
-          </a:prstGeom>
-          <a:noFill/>
-          <a:ln/>
-        </p:spPr>
-        <p:txBody>
-          <a:bodyPr wrap="square" lIns="0" tIns="0" rIns="0" bIns="0" rtlCol="0" anchor="ctr"/>
-          <a:lstStyle/>
-          <a:p>
-            <a:pPr indent="0" marL="0">
-              <a:buNone/>
-            </a:pPr>
-            <a:r>
-              <a:rPr lang="en-US" sz="2100" dirty="0">
-                <a:solidFill>
-                  <a:srgbClr val="4A6B5D"/>
-                </a:solidFill>
-                <a:latin typeface="Georgia" pitchFamily="34" charset="0"/>
-                <a:ea typeface="Georgia" pitchFamily="34" charset="-122"/>
-                <a:cs typeface="Georgia" pitchFamily="34" charset="-120"/>
-              </a:rPr>
-              <a:t>Camera</a:t>
-            </a:r>
-            <a:endParaRPr lang="en-US" sz="2100" dirty="0"/>
-          </a:p>
-        </p:txBody>
-      </p:sp>
-      <p:sp>
-        <p:nvSpPr>
-          <p:cNvPr id="13" name="Text 11"/>
-          <p:cNvSpPr/>
-          <p:nvPr/>
-        </p:nvSpPr>
-        <p:spPr>
-          <a:xfrm>
-            <a:off x="4480560" y="2441448"/>
-            <a:ext cx="7498080" cy="566928"/>
-          </a:xfrm>
-          <a:prstGeom prst="rect">
-            <a:avLst/>
-          </a:prstGeom>
-          <a:noFill/>
-          <a:ln/>
-        </p:spPr>
-        <p:txBody>
-          <a:bodyPr wrap="square" lIns="0" tIns="0" rIns="0" bIns="0" rtlCol="0" anchor="ctr"/>
-          <a:lstStyle/>
-          <a:p>
-            <a:pPr indent="0" marL="0">
-              <a:buNone/>
-            </a:pPr>
-            <a:r>
-              <a:rPr lang="en-US" sz="1550" dirty="0">
-                <a:solidFill>
-                  <a:srgbClr val="24313F"/>
-                </a:solidFill>
-                <a:latin typeface="Georgia" pitchFamily="34" charset="0"/>
-                <a:ea typeface="Georgia" pitchFamily="34" charset="-122"/>
-                <a:cs typeface="Georgia" pitchFamily="34" charset="-120"/>
-              </a:rPr>
-              <a:t>Shot, angle, movement, composition. Lesson 03.</a:t>
-            </a:r>
-            <a:endParaRPr lang="en-US" sz="1550" dirty="0"/>
-          </a:p>
-        </p:txBody>
-      </p:sp>
-      <p:sp>
-        <p:nvSpPr>
-          <p:cNvPr id="14" name="Shape 12"/>
-          <p:cNvSpPr/>
-          <p:nvPr/>
-        </p:nvSpPr>
-        <p:spPr>
-          <a:xfrm>
-            <a:off x="822960" y="3099816"/>
-            <a:ext cx="566928" cy="566928"/>
-          </a:xfrm>
-          <a:prstGeom prst="rect">
-            <a:avLst/>
-          </a:prstGeom>
-          <a:solidFill>
-            <a:srgbClr val="A3C1AD"/>
-          </a:solidFill>
-          <a:ln/>
-        </p:spPr>
-      </p:sp>
-      <p:sp>
-        <p:nvSpPr>
-          <p:cNvPr id="15" name="Text 13"/>
-          <p:cNvSpPr/>
-          <p:nvPr/>
-        </p:nvSpPr>
-        <p:spPr>
-          <a:xfrm>
-            <a:off x="822960" y="3099816"/>
-            <a:ext cx="566928" cy="566928"/>
-          </a:xfrm>
-          <a:prstGeom prst="rect">
-            <a:avLst/>
-          </a:prstGeom>
-          <a:noFill/>
-          <a:ln/>
-        </p:spPr>
-        <p:txBody>
-          <a:bodyPr wrap="square" lIns="0" tIns="0" rIns="0" bIns="0" rtlCol="0" anchor="ctr"/>
-          <a:lstStyle/>
-          <a:p>
-            <a:pPr algn="ctr" indent="0" marL="0">
-              <a:buNone/>
-            </a:pPr>
-            <a:r>
-              <a:rPr lang="en-US" sz="2000" dirty="0">
-                <a:solidFill>
-                  <a:srgbClr val="24313F"/>
-                </a:solidFill>
-                <a:latin typeface="Georgia" pitchFamily="34" charset="0"/>
-                <a:ea typeface="Georgia" pitchFamily="34" charset="-122"/>
-                <a:cs typeface="Georgia" pitchFamily="34" charset="-120"/>
-              </a:rPr>
-              <a:t>3</a:t>
-            </a:r>
-            <a:endParaRPr lang="en-US" sz="2000" dirty="0"/>
-          </a:p>
-        </p:txBody>
-      </p:sp>
-      <p:sp>
-        <p:nvSpPr>
-          <p:cNvPr id="16" name="Text 14"/>
-          <p:cNvSpPr/>
-          <p:nvPr/>
-        </p:nvSpPr>
-        <p:spPr>
-          <a:xfrm>
-            <a:off x="1645920" y="3099816"/>
-            <a:ext cx="2743200" cy="566928"/>
-          </a:xfrm>
-          <a:prstGeom prst="rect">
-            <a:avLst/>
-          </a:prstGeom>
-          <a:noFill/>
-          <a:ln/>
-        </p:spPr>
-        <p:txBody>
-          <a:bodyPr wrap="square" lIns="0" tIns="0" rIns="0" bIns="0" rtlCol="0" anchor="ctr"/>
-          <a:lstStyle/>
-          <a:p>
-            <a:pPr indent="0" marL="0">
-              <a:buNone/>
-            </a:pPr>
-            <a:r>
-              <a:rPr lang="en-US" sz="2100" dirty="0">
-                <a:solidFill>
-                  <a:srgbClr val="4A6B5D"/>
-                </a:solidFill>
-                <a:latin typeface="Georgia" pitchFamily="34" charset="0"/>
-                <a:ea typeface="Georgia" pitchFamily="34" charset="-122"/>
-                <a:cs typeface="Georgia" pitchFamily="34" charset="-120"/>
-              </a:rPr>
-              <a:t>Light</a:t>
-            </a:r>
-            <a:endParaRPr lang="en-US" sz="2100" dirty="0"/>
-          </a:p>
-        </p:txBody>
-      </p:sp>
-      <p:sp>
-        <p:nvSpPr>
-          <p:cNvPr id="17" name="Text 15"/>
-          <p:cNvSpPr/>
-          <p:nvPr/>
-        </p:nvSpPr>
-        <p:spPr>
-          <a:xfrm>
-            <a:off x="4480560" y="3099816"/>
-            <a:ext cx="7498080" cy="566928"/>
-          </a:xfrm>
-          <a:prstGeom prst="rect">
-            <a:avLst/>
-          </a:prstGeom>
-          <a:noFill/>
-          <a:ln/>
-        </p:spPr>
-        <p:txBody>
-          <a:bodyPr wrap="square" lIns="0" tIns="0" rIns="0" bIns="0" rtlCol="0" anchor="ctr"/>
-          <a:lstStyle/>
-          <a:p>
-            <a:pPr indent="0" marL="0">
-              <a:buNone/>
-            </a:pPr>
-            <a:r>
-              <a:rPr lang="en-US" sz="1550" dirty="0">
-                <a:solidFill>
-                  <a:srgbClr val="24313F"/>
-                </a:solidFill>
-                <a:latin typeface="Georgia" pitchFamily="34" charset="0"/>
-                <a:ea typeface="Georgia" pitchFamily="34" charset="-122"/>
-                <a:cs typeface="Georgia" pitchFamily="34" charset="-120"/>
-              </a:rPr>
-              <a:t>Direction, quality, contrast, and what it makes important. Lesson 05.</a:t>
-            </a:r>
-            <a:endParaRPr lang="en-US" sz="1550" dirty="0"/>
-          </a:p>
-        </p:txBody>
-      </p:sp>
-      <p:sp>
-        <p:nvSpPr>
-          <p:cNvPr id="18" name="Shape 16"/>
-          <p:cNvSpPr/>
-          <p:nvPr/>
-        </p:nvSpPr>
-        <p:spPr>
-          <a:xfrm>
-            <a:off x="822960" y="3758184"/>
-            <a:ext cx="566928" cy="566928"/>
-          </a:xfrm>
-          <a:prstGeom prst="rect">
-            <a:avLst/>
-          </a:prstGeom>
-          <a:solidFill>
-            <a:srgbClr val="A3C1AD"/>
-          </a:solidFill>
-          <a:ln/>
-        </p:spPr>
-      </p:sp>
-      <p:sp>
-        <p:nvSpPr>
-          <p:cNvPr id="19" name="Text 17"/>
-          <p:cNvSpPr/>
-          <p:nvPr/>
-        </p:nvSpPr>
-        <p:spPr>
-          <a:xfrm>
-            <a:off x="822960" y="3758184"/>
-            <a:ext cx="566928" cy="566928"/>
-          </a:xfrm>
-          <a:prstGeom prst="rect">
-            <a:avLst/>
-          </a:prstGeom>
-          <a:noFill/>
-          <a:ln/>
-        </p:spPr>
-        <p:txBody>
-          <a:bodyPr wrap="square" lIns="0" tIns="0" rIns="0" bIns="0" rtlCol="0" anchor="ctr"/>
-          <a:lstStyle/>
-          <a:p>
-            <a:pPr algn="ctr" indent="0" marL="0">
-              <a:buNone/>
-            </a:pPr>
-            <a:r>
-              <a:rPr lang="en-US" sz="2000" dirty="0">
-                <a:solidFill>
-                  <a:srgbClr val="24313F"/>
-                </a:solidFill>
-                <a:latin typeface="Georgia" pitchFamily="34" charset="0"/>
-                <a:ea typeface="Georgia" pitchFamily="34" charset="-122"/>
-                <a:cs typeface="Georgia" pitchFamily="34" charset="-120"/>
-              </a:rPr>
-              <a:t>4</a:t>
-            </a:r>
-            <a:endParaRPr lang="en-US" sz="2000" dirty="0"/>
-          </a:p>
-        </p:txBody>
-      </p:sp>
-      <p:sp>
-        <p:nvSpPr>
-          <p:cNvPr id="20" name="Text 18"/>
-          <p:cNvSpPr/>
-          <p:nvPr/>
-        </p:nvSpPr>
-        <p:spPr>
-          <a:xfrm>
-            <a:off x="1645920" y="3758184"/>
-            <a:ext cx="2743200" cy="566928"/>
-          </a:xfrm>
-          <a:prstGeom prst="rect">
-            <a:avLst/>
-          </a:prstGeom>
-          <a:noFill/>
-          <a:ln/>
-        </p:spPr>
-        <p:txBody>
-          <a:bodyPr wrap="square" lIns="0" tIns="0" rIns="0" bIns="0" rtlCol="0" anchor="ctr"/>
-          <a:lstStyle/>
-          <a:p>
-            <a:pPr indent="0" marL="0">
-              <a:buNone/>
-            </a:pPr>
-            <a:r>
-              <a:rPr lang="en-US" sz="2100" dirty="0">
-                <a:solidFill>
-                  <a:srgbClr val="4A6B5D"/>
-                </a:solidFill>
-                <a:latin typeface="Georgia" pitchFamily="34" charset="0"/>
-                <a:ea typeface="Georgia" pitchFamily="34" charset="-122"/>
-                <a:cs typeface="Georgia" pitchFamily="34" charset="-120"/>
-              </a:rPr>
-              <a:t>Mise-en-scène</a:t>
-            </a:r>
-            <a:endParaRPr lang="en-US" sz="2100" dirty="0"/>
-          </a:p>
-        </p:txBody>
-      </p:sp>
-      <p:sp>
-        <p:nvSpPr>
-          <p:cNvPr id="21" name="Text 19"/>
-          <p:cNvSpPr/>
-          <p:nvPr/>
-        </p:nvSpPr>
-        <p:spPr>
-          <a:xfrm>
-            <a:off x="4480560" y="3758184"/>
-            <a:ext cx="7498080" cy="566928"/>
-          </a:xfrm>
-          <a:prstGeom prst="rect">
-            <a:avLst/>
-          </a:prstGeom>
-          <a:noFill/>
-          <a:ln/>
-        </p:spPr>
-        <p:txBody>
-          <a:bodyPr wrap="square" lIns="0" tIns="0" rIns="0" bIns="0" rtlCol="0" anchor="ctr"/>
-          <a:lstStyle/>
-          <a:p>
-            <a:pPr indent="0" marL="0">
-              <a:buNone/>
-            </a:pPr>
-            <a:r>
-              <a:rPr lang="en-US" sz="1550" dirty="0">
-                <a:solidFill>
-                  <a:srgbClr val="24313F"/>
-                </a:solidFill>
-                <a:latin typeface="Georgia" pitchFamily="34" charset="0"/>
-                <a:ea typeface="Georgia" pitchFamily="34" charset="-122"/>
-                <a:cs typeface="Georgia" pitchFamily="34" charset="-120"/>
-              </a:rPr>
-              <a:t>Location, costume, properties, colour. Lesson 05.</a:t>
-            </a:r>
-            <a:endParaRPr lang="en-US" sz="1550" dirty="0"/>
-          </a:p>
-        </p:txBody>
-      </p:sp>
-      <p:sp>
-        <p:nvSpPr>
-          <p:cNvPr id="22" name="Shape 20"/>
-          <p:cNvSpPr/>
-          <p:nvPr/>
-        </p:nvSpPr>
-        <p:spPr>
-          <a:xfrm>
-            <a:off x="822960" y="4416552"/>
-            <a:ext cx="566928" cy="566928"/>
-          </a:xfrm>
-          <a:prstGeom prst="rect">
-            <a:avLst/>
-          </a:prstGeom>
-          <a:solidFill>
-            <a:srgbClr val="A3C1AD"/>
-          </a:solidFill>
-          <a:ln/>
-        </p:spPr>
-      </p:sp>
-      <p:sp>
-        <p:nvSpPr>
-          <p:cNvPr id="23" name="Text 21"/>
-          <p:cNvSpPr/>
-          <p:nvPr/>
-        </p:nvSpPr>
-        <p:spPr>
-          <a:xfrm>
-            <a:off x="822960" y="4416552"/>
-            <a:ext cx="566928" cy="566928"/>
-          </a:xfrm>
-          <a:prstGeom prst="rect">
-            <a:avLst/>
-          </a:prstGeom>
-          <a:noFill/>
-          <a:ln/>
-        </p:spPr>
-        <p:txBody>
-          <a:bodyPr wrap="square" lIns="0" tIns="0" rIns="0" bIns="0" rtlCol="0" anchor="ctr"/>
-          <a:lstStyle/>
-          <a:p>
-            <a:pPr algn="ctr" indent="0" marL="0">
-              <a:buNone/>
-            </a:pPr>
-            <a:r>
-              <a:rPr lang="en-US" sz="2000" dirty="0">
-                <a:solidFill>
-                  <a:srgbClr val="24313F"/>
-                </a:solidFill>
-                <a:latin typeface="Georgia" pitchFamily="34" charset="0"/>
-                <a:ea typeface="Georgia" pitchFamily="34" charset="-122"/>
-                <a:cs typeface="Georgia" pitchFamily="34" charset="-120"/>
-              </a:rPr>
-              <a:t>5</a:t>
-            </a:r>
-            <a:endParaRPr lang="en-US" sz="2000" dirty="0"/>
-          </a:p>
-        </p:txBody>
-      </p:sp>
-      <p:sp>
-        <p:nvSpPr>
-          <p:cNvPr id="24" name="Text 22"/>
-          <p:cNvSpPr/>
-          <p:nvPr/>
-        </p:nvSpPr>
-        <p:spPr>
-          <a:xfrm>
-            <a:off x="1645920" y="4416552"/>
-            <a:ext cx="2743200" cy="566928"/>
-          </a:xfrm>
-          <a:prstGeom prst="rect">
-            <a:avLst/>
-          </a:prstGeom>
-          <a:noFill/>
-          <a:ln/>
-        </p:spPr>
-        <p:txBody>
-          <a:bodyPr wrap="square" lIns="0" tIns="0" rIns="0" bIns="0" rtlCol="0" anchor="ctr"/>
-          <a:lstStyle/>
-          <a:p>
-            <a:pPr indent="0" marL="0">
-              <a:buNone/>
-            </a:pPr>
-            <a:r>
-              <a:rPr lang="en-US" sz="2100" dirty="0">
-                <a:solidFill>
-                  <a:srgbClr val="4A6B5D"/>
-                </a:solidFill>
-                <a:latin typeface="Georgia" pitchFamily="34" charset="0"/>
-                <a:ea typeface="Georgia" pitchFamily="34" charset="-122"/>
-                <a:cs typeface="Georgia" pitchFamily="34" charset="-120"/>
-              </a:rPr>
-              <a:t>Sound</a:t>
-            </a:r>
-            <a:endParaRPr lang="en-US" sz="2100" dirty="0"/>
-          </a:p>
-        </p:txBody>
-      </p:sp>
-      <p:sp>
-        <p:nvSpPr>
-          <p:cNvPr id="25" name="Text 23"/>
-          <p:cNvSpPr/>
-          <p:nvPr/>
-        </p:nvSpPr>
-        <p:spPr>
-          <a:xfrm>
-            <a:off x="4480560" y="4416552"/>
-            <a:ext cx="7498080" cy="566928"/>
-          </a:xfrm>
-          <a:prstGeom prst="rect">
-            <a:avLst/>
-          </a:prstGeom>
-          <a:noFill/>
-          <a:ln/>
-        </p:spPr>
-        <p:txBody>
-          <a:bodyPr wrap="square" lIns="0" tIns="0" rIns="0" bIns="0" rtlCol="0" anchor="ctr"/>
-          <a:lstStyle/>
-          <a:p>
-            <a:pPr indent="0" marL="0">
-              <a:buNone/>
-            </a:pPr>
-            <a:r>
-              <a:rPr lang="en-US" sz="1550" dirty="0">
-                <a:solidFill>
-                  <a:srgbClr val="24313F"/>
-                </a:solidFill>
-                <a:latin typeface="Georgia" pitchFamily="34" charset="0"/>
-                <a:ea typeface="Georgia" pitchFamily="34" charset="-122"/>
-                <a:cs typeface="Georgia" pitchFamily="34" charset="-120"/>
-              </a:rPr>
-              <a:t>Diegetic and non-diegetic, perspective, the bridge. Lesson 04.</a:t>
-            </a:r>
-            <a:endParaRPr lang="en-US" sz="1550" dirty="0"/>
-          </a:p>
-        </p:txBody>
-      </p:sp>
-      <p:sp>
-        <p:nvSpPr>
-          <p:cNvPr id="26" name="Shape 24"/>
-          <p:cNvSpPr/>
-          <p:nvPr/>
-        </p:nvSpPr>
-        <p:spPr>
-          <a:xfrm>
-            <a:off x="822960" y="5074920"/>
-            <a:ext cx="566928" cy="566928"/>
-          </a:xfrm>
-          <a:prstGeom prst="rect">
-            <a:avLst/>
-          </a:prstGeom>
-          <a:solidFill>
-            <a:srgbClr val="A3C1AD"/>
-          </a:solidFill>
-          <a:ln/>
-        </p:spPr>
-      </p:sp>
-      <p:sp>
-        <p:nvSpPr>
-          <p:cNvPr id="27" name="Text 25"/>
-          <p:cNvSpPr/>
-          <p:nvPr/>
-        </p:nvSpPr>
-        <p:spPr>
-          <a:xfrm>
-            <a:off x="822960" y="5074920"/>
-            <a:ext cx="566928" cy="566928"/>
-          </a:xfrm>
-          <a:prstGeom prst="rect">
-            <a:avLst/>
-          </a:prstGeom>
-          <a:noFill/>
-          <a:ln/>
-        </p:spPr>
-        <p:txBody>
-          <a:bodyPr wrap="square" lIns="0" tIns="0" rIns="0" bIns="0" rtlCol="0" anchor="ctr"/>
-          <a:lstStyle/>
-          <a:p>
-            <a:pPr algn="ctr" indent="0" marL="0">
-              <a:buNone/>
-            </a:pPr>
-            <a:r>
-              <a:rPr lang="en-US" sz="2000" dirty="0">
-                <a:solidFill>
-                  <a:srgbClr val="24313F"/>
-                </a:solidFill>
-                <a:latin typeface="Georgia" pitchFamily="34" charset="0"/>
-                <a:ea typeface="Georgia" pitchFamily="34" charset="-122"/>
-                <a:cs typeface="Georgia" pitchFamily="34" charset="-120"/>
-              </a:rPr>
-              <a:t>6</a:t>
-            </a:r>
-            <a:endParaRPr lang="en-US" sz="2000" dirty="0"/>
-          </a:p>
-        </p:txBody>
-      </p:sp>
-      <p:sp>
-        <p:nvSpPr>
-          <p:cNvPr id="28" name="Text 26"/>
-          <p:cNvSpPr/>
-          <p:nvPr/>
-        </p:nvSpPr>
-        <p:spPr>
-          <a:xfrm>
-            <a:off x="1645920" y="5074920"/>
-            <a:ext cx="2743200" cy="566928"/>
-          </a:xfrm>
-          <a:prstGeom prst="rect">
-            <a:avLst/>
-          </a:prstGeom>
-          <a:noFill/>
-          <a:ln/>
-        </p:spPr>
-        <p:txBody>
-          <a:bodyPr wrap="square" lIns="0" tIns="0" rIns="0" bIns="0" rtlCol="0" anchor="ctr"/>
-          <a:lstStyle/>
-          <a:p>
-            <a:pPr indent="0" marL="0">
-              <a:buNone/>
-            </a:pPr>
-            <a:r>
-              <a:rPr lang="en-US" sz="2100" dirty="0">
-                <a:solidFill>
-                  <a:srgbClr val="4A6B5D"/>
-                </a:solidFill>
-                <a:latin typeface="Georgia" pitchFamily="34" charset="0"/>
-                <a:ea typeface="Georgia" pitchFamily="34" charset="-122"/>
-                <a:cs typeface="Georgia" pitchFamily="34" charset="-120"/>
-              </a:rPr>
-              <a:t>Edit</a:t>
-            </a:r>
-            <a:endParaRPr lang="en-US" sz="2100" dirty="0"/>
-          </a:p>
-        </p:txBody>
-      </p:sp>
-      <p:sp>
-        <p:nvSpPr>
-          <p:cNvPr id="29" name="Text 27"/>
-          <p:cNvSpPr/>
-          <p:nvPr/>
-        </p:nvSpPr>
-        <p:spPr>
-          <a:xfrm>
-            <a:off x="4480560" y="5074920"/>
-            <a:ext cx="7498080" cy="566928"/>
-          </a:xfrm>
-          <a:prstGeom prst="rect">
-            <a:avLst/>
-          </a:prstGeom>
-          <a:noFill/>
-          <a:ln/>
-        </p:spPr>
-        <p:txBody>
-          <a:bodyPr wrap="square" lIns="0" tIns="0" rIns="0" bIns="0" rtlCol="0" anchor="ctr"/>
-          <a:lstStyle/>
-          <a:p>
-            <a:pPr indent="0" marL="0">
-              <a:buNone/>
-            </a:pPr>
-            <a:r>
-              <a:rPr lang="en-US" sz="1550" dirty="0">
-                <a:solidFill>
-                  <a:srgbClr val="24313F"/>
-                </a:solidFill>
-                <a:latin typeface="Georgia" pitchFamily="34" charset="0"/>
-                <a:ea typeface="Georgia" pitchFamily="34" charset="-122"/>
-                <a:cs typeface="Georgia" pitchFamily="34" charset="-120"/>
-              </a:rPr>
-              <a:t>The cut rate, the system, what the order does. Lesson 06.</a:t>
-            </a:r>
-            <a:endParaRPr lang="en-US" sz="1550" dirty="0"/>
-          </a:p>
-        </p:txBody>
-      </p:sp>
-      <p:sp>
-        <p:nvSpPr>
-          <p:cNvPr id="30" name="Shape 28"/>
-          <p:cNvSpPr/>
-          <p:nvPr/>
-        </p:nvSpPr>
-        <p:spPr>
-          <a:xfrm>
-            <a:off x="822960" y="5806440"/>
-            <a:ext cx="914400" cy="0"/>
-          </a:xfrm>
-          <a:prstGeom prst="line">
-            <a:avLst/>
-          </a:prstGeom>
-          <a:noFill/>
-          <a:ln w="31750">
-            <a:solidFill>
-              <a:srgbClr val="8C3A38"/>
-            </a:solidFill>
-            <a:prstDash val="solid"/>
-          </a:ln>
-        </p:spPr>
-      </p:sp>
-      <p:sp>
-        <p:nvSpPr>
-          <p:cNvPr id="31" name="Text 29"/>
-          <p:cNvSpPr/>
-          <p:nvPr/>
-        </p:nvSpPr>
-        <p:spPr>
-          <a:xfrm>
-            <a:off x="822960" y="5943600"/>
-            <a:ext cx="10424160" cy="320040"/>
-          </a:xfrm>
-          <a:prstGeom prst="rect">
-            <a:avLst/>
-          </a:prstGeom>
-          <a:noFill/>
-          <a:ln/>
-        </p:spPr>
-        <p:txBody>
-          <a:bodyPr wrap="square" lIns="0" tIns="0" rIns="0" bIns="0" rtlCol="0" anchor="t"/>
-          <a:lstStyle/>
-          <a:p>
-            <a:pPr indent="0" marL="0">
-              <a:lnSpc>
-                <a:spcPts val="1700"/>
-              </a:lnSpc>
-              <a:buNone/>
-            </a:pPr>
-            <a:r>
-              <a:rPr lang="en-US" sz="1050" b="1" spc="100" kern="0" dirty="0">
-                <a:solidFill>
-                  <a:srgbClr val="7A7F72"/>
-                </a:solidFill>
-                <a:latin typeface="Arial" pitchFamily="34" charset="0"/>
-                <a:ea typeface="Arial" pitchFamily="34" charset="-122"/>
-                <a:cs typeface="Arial" pitchFamily="34" charset="-120"/>
-              </a:rPr>
-              <a:t>WHY THIS ORDER   </a:t>
-            </a:r>
-            <a:pPr indent="0" marL="0">
-              <a:lnSpc>
-                <a:spcPts val="1700"/>
-              </a:lnSpc>
-              <a:buNone/>
-            </a:pPr>
-            <a:r>
-              <a:rPr lang="en-US" sz="1250" dirty="0">
-                <a:solidFill>
-                  <a:srgbClr val="7A7F72"/>
-                </a:solidFill>
-                <a:latin typeface="Georgia" pitchFamily="34" charset="0"/>
-                <a:ea typeface="Georgia" pitchFamily="34" charset="-122"/>
-                <a:cs typeface="Georgia" pitchFamily="34" charset="-120"/>
-              </a:rPr>
-              <a:t>The most common failure is not ignorance. It is forgetting a whole code family. The order prevents that.</a:t>
-            </a:r>
-            <a:endParaRPr lang="en-US" sz="1050" dirty="0"/>
-          </a:p>
-        </p:txBody>
-      </p:sp>
-      <p:sp>
-        <p:nvSpPr>
-          <p:cNvPr id="32" name="Shape 30"/>
-          <p:cNvSpPr/>
-          <p:nvPr/>
-        </p:nvSpPr>
-        <p:spPr>
-          <a:xfrm>
-            <a:off x="822960" y="6382512"/>
-            <a:ext cx="10543032" cy="0"/>
+              <a:t>Numbered shots</a:t>
+            </a:r>
+            <a:endParaRPr lang="en-US" sz="1450" dirty="0"/>
+          </a:p>
+        </p:txBody>
+      </p:sp>
+      <p:sp>
+        <p:nvSpPr>
+          <p:cNvPr id="8" name="Shape 6"/>
+          <p:cNvSpPr/>
+          <p:nvPr/>
+        </p:nvSpPr>
+        <p:spPr>
+          <a:xfrm>
+            <a:off x="822960" y="2377440"/>
+            <a:ext cx="3611880" cy="0"/>
           </a:xfrm>
           <a:prstGeom prst="line">
             <a:avLst/>
@@ -6350,30 +4977,991 @@
       </p:sp>
       <p:sp>
         <p:nvSpPr>
+          <p:cNvPr id="9" name="Text 7"/>
+          <p:cNvSpPr/>
+          <p:nvPr/>
+        </p:nvSpPr>
+        <p:spPr>
+          <a:xfrm>
+            <a:off x="822960" y="2487168"/>
+            <a:ext cx="548640" cy="502920"/>
+          </a:xfrm>
+          <a:prstGeom prst="rect">
+            <a:avLst/>
+          </a:prstGeom>
+          <a:noFill/>
+          <a:ln/>
+        </p:spPr>
+        <p:txBody>
+          <a:bodyPr wrap="square" lIns="0" tIns="0" rIns="0" bIns="0" rtlCol="0" anchor="ctr"/>
+          <a:lstStyle/>
+          <a:p>
+            <a:pPr indent="0" marL="0">
+              <a:buNone/>
+            </a:pPr>
+            <a:r>
+              <a:rPr lang="en-US" sz="1700" dirty="0">
+                <a:solidFill>
+                  <a:srgbClr val="A3C1AD"/>
+                </a:solidFill>
+                <a:latin typeface="Georgia" pitchFamily="34" charset="0"/>
+                <a:ea typeface="Georgia" pitchFamily="34" charset="-122"/>
+                <a:cs typeface="Georgia" pitchFamily="34" charset="-120"/>
+              </a:rPr>
+              <a:t>02</a:t>
+            </a:r>
+            <a:endParaRPr lang="en-US" sz="1700" dirty="0"/>
+          </a:p>
+        </p:txBody>
+      </p:sp>
+      <p:sp>
+        <p:nvSpPr>
+          <p:cNvPr id="10" name="Text 8"/>
+          <p:cNvSpPr/>
+          <p:nvPr/>
+        </p:nvSpPr>
+        <p:spPr>
+          <a:xfrm>
+            <a:off x="1371600" y="2487168"/>
+            <a:ext cx="3154680" cy="502920"/>
+          </a:xfrm>
+          <a:prstGeom prst="rect">
+            <a:avLst/>
+          </a:prstGeom>
+          <a:noFill/>
+          <a:ln/>
+        </p:spPr>
+        <p:txBody>
+          <a:bodyPr wrap="square" lIns="0" tIns="0" rIns="0" bIns="0" rtlCol="0" anchor="ctr"/>
+          <a:lstStyle/>
+          <a:p>
+            <a:pPr indent="0" marL="0">
+              <a:buNone/>
+            </a:pPr>
+            <a:r>
+              <a:rPr lang="en-US" sz="1450" dirty="0">
+                <a:solidFill>
+                  <a:srgbClr val="24313F"/>
+                </a:solidFill>
+                <a:latin typeface="Georgia" pitchFamily="34" charset="0"/>
+                <a:ea typeface="Georgia" pitchFamily="34" charset="-122"/>
+                <a:cs typeface="Georgia" pitchFamily="34" charset="-120"/>
+              </a:rPr>
+              <a:t>Confirmed locations</a:t>
+            </a:r>
+            <a:endParaRPr lang="en-US" sz="1450" dirty="0"/>
+          </a:p>
+        </p:txBody>
+      </p:sp>
+      <p:sp>
+        <p:nvSpPr>
+          <p:cNvPr id="11" name="Shape 9"/>
+          <p:cNvSpPr/>
+          <p:nvPr/>
+        </p:nvSpPr>
+        <p:spPr>
+          <a:xfrm>
+            <a:off x="822960" y="3035808"/>
+            <a:ext cx="3611880" cy="0"/>
+          </a:xfrm>
+          <a:prstGeom prst="line">
+            <a:avLst/>
+          </a:prstGeom>
+          <a:noFill/>
+          <a:ln w="9525">
+            <a:solidFill>
+              <a:srgbClr val="D9D4C4"/>
+            </a:solidFill>
+            <a:prstDash val="solid"/>
+          </a:ln>
+        </p:spPr>
+      </p:sp>
+      <p:sp>
+        <p:nvSpPr>
+          <p:cNvPr id="12" name="Text 10"/>
+          <p:cNvSpPr/>
+          <p:nvPr/>
+        </p:nvSpPr>
+        <p:spPr>
+          <a:xfrm>
+            <a:off x="822960" y="3145536"/>
+            <a:ext cx="548640" cy="502920"/>
+          </a:xfrm>
+          <a:prstGeom prst="rect">
+            <a:avLst/>
+          </a:prstGeom>
+          <a:noFill/>
+          <a:ln/>
+        </p:spPr>
+        <p:txBody>
+          <a:bodyPr wrap="square" lIns="0" tIns="0" rIns="0" bIns="0" rtlCol="0" anchor="ctr"/>
+          <a:lstStyle/>
+          <a:p>
+            <a:pPr indent="0" marL="0">
+              <a:buNone/>
+            </a:pPr>
+            <a:r>
+              <a:rPr lang="en-US" sz="1700" dirty="0">
+                <a:solidFill>
+                  <a:srgbClr val="A3C1AD"/>
+                </a:solidFill>
+                <a:latin typeface="Georgia" pitchFamily="34" charset="0"/>
+                <a:ea typeface="Georgia" pitchFamily="34" charset="-122"/>
+                <a:cs typeface="Georgia" pitchFamily="34" charset="-120"/>
+              </a:rPr>
+              <a:t>03</a:t>
+            </a:r>
+            <a:endParaRPr lang="en-US" sz="1700" dirty="0"/>
+          </a:p>
+        </p:txBody>
+      </p:sp>
+      <p:sp>
+        <p:nvSpPr>
+          <p:cNvPr id="13" name="Text 11"/>
+          <p:cNvSpPr/>
+          <p:nvPr/>
+        </p:nvSpPr>
+        <p:spPr>
+          <a:xfrm>
+            <a:off x="1371600" y="3145536"/>
+            <a:ext cx="3154680" cy="502920"/>
+          </a:xfrm>
+          <a:prstGeom prst="rect">
+            <a:avLst/>
+          </a:prstGeom>
+          <a:noFill/>
+          <a:ln/>
+        </p:spPr>
+        <p:txBody>
+          <a:bodyPr wrap="square" lIns="0" tIns="0" rIns="0" bIns="0" rtlCol="0" anchor="ctr"/>
+          <a:lstStyle/>
+          <a:p>
+            <a:pPr indent="0" marL="0">
+              <a:buNone/>
+            </a:pPr>
+            <a:r>
+              <a:rPr lang="en-US" sz="1450" dirty="0">
+                <a:solidFill>
+                  <a:srgbClr val="24313F"/>
+                </a:solidFill>
+                <a:latin typeface="Georgia" pitchFamily="34" charset="0"/>
+                <a:ea typeface="Georgia" pitchFamily="34" charset="-122"/>
+                <a:cs typeface="Georgia" pitchFamily="34" charset="-120"/>
+              </a:rPr>
+              <a:t>Cast attached to dates</a:t>
+            </a:r>
+            <a:endParaRPr lang="en-US" sz="1450" dirty="0"/>
+          </a:p>
+        </p:txBody>
+      </p:sp>
+      <p:sp>
+        <p:nvSpPr>
+          <p:cNvPr id="14" name="Shape 12"/>
+          <p:cNvSpPr/>
+          <p:nvPr/>
+        </p:nvSpPr>
+        <p:spPr>
+          <a:xfrm>
+            <a:off x="822960" y="3694176"/>
+            <a:ext cx="3611880" cy="0"/>
+          </a:xfrm>
+          <a:prstGeom prst="line">
+            <a:avLst/>
+          </a:prstGeom>
+          <a:noFill/>
+          <a:ln w="9525">
+            <a:solidFill>
+              <a:srgbClr val="D9D4C4"/>
+            </a:solidFill>
+            <a:prstDash val="solid"/>
+          </a:ln>
+        </p:spPr>
+      </p:sp>
+      <p:sp>
+        <p:nvSpPr>
+          <p:cNvPr id="15" name="Text 13"/>
+          <p:cNvSpPr/>
+          <p:nvPr/>
+        </p:nvSpPr>
+        <p:spPr>
+          <a:xfrm>
+            <a:off x="822960" y="3803904"/>
+            <a:ext cx="548640" cy="502920"/>
+          </a:xfrm>
+          <a:prstGeom prst="rect">
+            <a:avLst/>
+          </a:prstGeom>
+          <a:noFill/>
+          <a:ln/>
+        </p:spPr>
+        <p:txBody>
+          <a:bodyPr wrap="square" lIns="0" tIns="0" rIns="0" bIns="0" rtlCol="0" anchor="ctr"/>
+          <a:lstStyle/>
+          <a:p>
+            <a:pPr indent="0" marL="0">
+              <a:buNone/>
+            </a:pPr>
+            <a:r>
+              <a:rPr lang="en-US" sz="1700" dirty="0">
+                <a:solidFill>
+                  <a:srgbClr val="A3C1AD"/>
+                </a:solidFill>
+                <a:latin typeface="Georgia" pitchFamily="34" charset="0"/>
+                <a:ea typeface="Georgia" pitchFamily="34" charset="-122"/>
+                <a:cs typeface="Georgia" pitchFamily="34" charset="-120"/>
+              </a:rPr>
+              <a:t>04</a:t>
+            </a:r>
+            <a:endParaRPr lang="en-US" sz="1700" dirty="0"/>
+          </a:p>
+        </p:txBody>
+      </p:sp>
+      <p:sp>
+        <p:nvSpPr>
+          <p:cNvPr id="16" name="Text 14"/>
+          <p:cNvSpPr/>
+          <p:nvPr/>
+        </p:nvSpPr>
+        <p:spPr>
+          <a:xfrm>
+            <a:off x="1371600" y="3803904"/>
+            <a:ext cx="3154680" cy="502920"/>
+          </a:xfrm>
+          <a:prstGeom prst="rect">
+            <a:avLst/>
+          </a:prstGeom>
+          <a:noFill/>
+          <a:ln/>
+        </p:spPr>
+        <p:txBody>
+          <a:bodyPr wrap="square" lIns="0" tIns="0" rIns="0" bIns="0" rtlCol="0" anchor="ctr"/>
+          <a:lstStyle/>
+          <a:p>
+            <a:pPr indent="0" marL="0">
+              <a:buNone/>
+            </a:pPr>
+            <a:r>
+              <a:rPr lang="en-US" sz="1450" dirty="0">
+                <a:solidFill>
+                  <a:srgbClr val="24313F"/>
+                </a:solidFill>
+                <a:latin typeface="Georgia" pitchFamily="34" charset="0"/>
+                <a:ea typeface="Georgia" pitchFamily="34" charset="-122"/>
+                <a:cs typeface="Georgia" pitchFamily="34" charset="-120"/>
+              </a:rPr>
+              <a:t>Equipment per session</a:t>
+            </a:r>
+            <a:endParaRPr lang="en-US" sz="1450" dirty="0"/>
+          </a:p>
+        </p:txBody>
+      </p:sp>
+      <p:sp>
+        <p:nvSpPr>
+          <p:cNvPr id="17" name="Shape 15"/>
+          <p:cNvSpPr/>
+          <p:nvPr/>
+        </p:nvSpPr>
+        <p:spPr>
+          <a:xfrm>
+            <a:off x="822960" y="4352544"/>
+            <a:ext cx="3611880" cy="0"/>
+          </a:xfrm>
+          <a:prstGeom prst="line">
+            <a:avLst/>
+          </a:prstGeom>
+          <a:noFill/>
+          <a:ln w="9525">
+            <a:solidFill>
+              <a:srgbClr val="D9D4C4"/>
+            </a:solidFill>
+            <a:prstDash val="solid"/>
+          </a:ln>
+        </p:spPr>
+      </p:sp>
+      <p:sp>
+        <p:nvSpPr>
+          <p:cNvPr id="18" name="Text 16"/>
+          <p:cNvSpPr/>
+          <p:nvPr/>
+        </p:nvSpPr>
+        <p:spPr>
+          <a:xfrm>
+            <a:off x="822960" y="4462272"/>
+            <a:ext cx="548640" cy="502920"/>
+          </a:xfrm>
+          <a:prstGeom prst="rect">
+            <a:avLst/>
+          </a:prstGeom>
+          <a:noFill/>
+          <a:ln/>
+        </p:spPr>
+        <p:txBody>
+          <a:bodyPr wrap="square" lIns="0" tIns="0" rIns="0" bIns="0" rtlCol="0" anchor="ctr"/>
+          <a:lstStyle/>
+          <a:p>
+            <a:pPr indent="0" marL="0">
+              <a:buNone/>
+            </a:pPr>
+            <a:r>
+              <a:rPr lang="en-US" sz="1700" dirty="0">
+                <a:solidFill>
+                  <a:srgbClr val="A3C1AD"/>
+                </a:solidFill>
+                <a:latin typeface="Georgia" pitchFamily="34" charset="0"/>
+                <a:ea typeface="Georgia" pitchFamily="34" charset="-122"/>
+                <a:cs typeface="Georgia" pitchFamily="34" charset="-120"/>
+              </a:rPr>
+              <a:t>05</a:t>
+            </a:r>
+            <a:endParaRPr lang="en-US" sz="1700" dirty="0"/>
+          </a:p>
+        </p:txBody>
+      </p:sp>
+      <p:sp>
+        <p:nvSpPr>
+          <p:cNvPr id="19" name="Text 17"/>
+          <p:cNvSpPr/>
+          <p:nvPr/>
+        </p:nvSpPr>
+        <p:spPr>
+          <a:xfrm>
+            <a:off x="1371600" y="4462272"/>
+            <a:ext cx="3154680" cy="502920"/>
+          </a:xfrm>
+          <a:prstGeom prst="rect">
+            <a:avLst/>
+          </a:prstGeom>
+          <a:noFill/>
+          <a:ln/>
+        </p:spPr>
+        <p:txBody>
+          <a:bodyPr wrap="square" lIns="0" tIns="0" rIns="0" bIns="0" rtlCol="0" anchor="ctr"/>
+          <a:lstStyle/>
+          <a:p>
+            <a:pPr indent="0" marL="0">
+              <a:buNone/>
+            </a:pPr>
+            <a:r>
+              <a:rPr lang="en-US" sz="1450" dirty="0">
+                <a:solidFill>
+                  <a:srgbClr val="24313F"/>
+                </a:solidFill>
+                <a:latin typeface="Georgia" pitchFamily="34" charset="0"/>
+                <a:ea typeface="Georgia" pitchFamily="34" charset="-122"/>
+                <a:cs typeface="Georgia" pitchFamily="34" charset="-120"/>
+              </a:rPr>
+              <a:t>A contingency day</a:t>
+            </a:r>
+            <a:endParaRPr lang="en-US" sz="1450" dirty="0"/>
+          </a:p>
+        </p:txBody>
+      </p:sp>
+      <p:sp>
+        <p:nvSpPr>
+          <p:cNvPr id="20" name="Shape 18"/>
+          <p:cNvSpPr/>
+          <p:nvPr/>
+        </p:nvSpPr>
+        <p:spPr>
+          <a:xfrm>
+            <a:off x="822960" y="5010912"/>
+            <a:ext cx="3611880" cy="0"/>
+          </a:xfrm>
+          <a:prstGeom prst="line">
+            <a:avLst/>
+          </a:prstGeom>
+          <a:noFill/>
+          <a:ln w="9525">
+            <a:solidFill>
+              <a:srgbClr val="D9D4C4"/>
+            </a:solidFill>
+            <a:prstDash val="solid"/>
+          </a:ln>
+        </p:spPr>
+      </p:sp>
+      <p:sp>
+        <p:nvSpPr>
+          <p:cNvPr id="21" name="Text 19"/>
+          <p:cNvSpPr/>
+          <p:nvPr/>
+        </p:nvSpPr>
+        <p:spPr>
+          <a:xfrm>
+            <a:off x="4754880" y="1828800"/>
+            <a:ext cx="548640" cy="502920"/>
+          </a:xfrm>
+          <a:prstGeom prst="rect">
+            <a:avLst/>
+          </a:prstGeom>
+          <a:noFill/>
+          <a:ln/>
+        </p:spPr>
+        <p:txBody>
+          <a:bodyPr wrap="square" lIns="0" tIns="0" rIns="0" bIns="0" rtlCol="0" anchor="ctr"/>
+          <a:lstStyle/>
+          <a:p>
+            <a:pPr indent="0" marL="0">
+              <a:buNone/>
+            </a:pPr>
+            <a:r>
+              <a:rPr lang="en-US" sz="1700" dirty="0">
+                <a:solidFill>
+                  <a:srgbClr val="A3C1AD"/>
+                </a:solidFill>
+                <a:latin typeface="Georgia" pitchFamily="34" charset="0"/>
+                <a:ea typeface="Georgia" pitchFamily="34" charset="-122"/>
+                <a:cs typeface="Georgia" pitchFamily="34" charset="-120"/>
+              </a:rPr>
+              <a:t>06</a:t>
+            </a:r>
+            <a:endParaRPr lang="en-US" sz="1700" dirty="0"/>
+          </a:p>
+        </p:txBody>
+      </p:sp>
+      <p:sp>
+        <p:nvSpPr>
+          <p:cNvPr id="22" name="Text 20"/>
+          <p:cNvSpPr/>
+          <p:nvPr/>
+        </p:nvSpPr>
+        <p:spPr>
+          <a:xfrm>
+            <a:off x="5303520" y="1828800"/>
+            <a:ext cx="3154680" cy="502920"/>
+          </a:xfrm>
+          <a:prstGeom prst="rect">
+            <a:avLst/>
+          </a:prstGeom>
+          <a:noFill/>
+          <a:ln/>
+        </p:spPr>
+        <p:txBody>
+          <a:bodyPr wrap="square" lIns="0" tIns="0" rIns="0" bIns="0" rtlCol="0" anchor="ctr"/>
+          <a:lstStyle/>
+          <a:p>
+            <a:pPr indent="0" marL="0">
+              <a:buNone/>
+            </a:pPr>
+            <a:r>
+              <a:rPr lang="en-US" sz="1450" dirty="0">
+                <a:solidFill>
+                  <a:srgbClr val="24313F"/>
+                </a:solidFill>
+                <a:latin typeface="Georgia" pitchFamily="34" charset="0"/>
+                <a:ea typeface="Georgia" pitchFamily="34" charset="-122"/>
+                <a:cs typeface="Georgia" pitchFamily="34" charset="-120"/>
+              </a:rPr>
+              <a:t>Assigned roles</a:t>
+            </a:r>
+            <a:endParaRPr lang="en-US" sz="1450" dirty="0"/>
+          </a:p>
+        </p:txBody>
+      </p:sp>
+      <p:sp>
+        <p:nvSpPr>
+          <p:cNvPr id="23" name="Shape 21"/>
+          <p:cNvSpPr/>
+          <p:nvPr/>
+        </p:nvSpPr>
+        <p:spPr>
+          <a:xfrm>
+            <a:off x="4754880" y="2377440"/>
+            <a:ext cx="3611880" cy="0"/>
+          </a:xfrm>
+          <a:prstGeom prst="line">
+            <a:avLst/>
+          </a:prstGeom>
+          <a:noFill/>
+          <a:ln w="9525">
+            <a:solidFill>
+              <a:srgbClr val="D9D4C4"/>
+            </a:solidFill>
+            <a:prstDash val="solid"/>
+          </a:ln>
+        </p:spPr>
+      </p:sp>
+      <p:sp>
+        <p:nvSpPr>
+          <p:cNvPr id="24" name="Text 22"/>
+          <p:cNvSpPr/>
+          <p:nvPr/>
+        </p:nvSpPr>
+        <p:spPr>
+          <a:xfrm>
+            <a:off x="4754880" y="2487168"/>
+            <a:ext cx="548640" cy="502920"/>
+          </a:xfrm>
+          <a:prstGeom prst="rect">
+            <a:avLst/>
+          </a:prstGeom>
+          <a:noFill/>
+          <a:ln/>
+        </p:spPr>
+        <p:txBody>
+          <a:bodyPr wrap="square" lIns="0" tIns="0" rIns="0" bIns="0" rtlCol="0" anchor="ctr"/>
+          <a:lstStyle/>
+          <a:p>
+            <a:pPr indent="0" marL="0">
+              <a:buNone/>
+            </a:pPr>
+            <a:r>
+              <a:rPr lang="en-US" sz="1700" dirty="0">
+                <a:solidFill>
+                  <a:srgbClr val="A3C1AD"/>
+                </a:solidFill>
+                <a:latin typeface="Georgia" pitchFamily="34" charset="0"/>
+                <a:ea typeface="Georgia" pitchFamily="34" charset="-122"/>
+                <a:cs typeface="Georgia" pitchFamily="34" charset="-120"/>
+              </a:rPr>
+              <a:t>07</a:t>
+            </a:r>
+            <a:endParaRPr lang="en-US" sz="1700" dirty="0"/>
+          </a:p>
+        </p:txBody>
+      </p:sp>
+      <p:sp>
+        <p:nvSpPr>
+          <p:cNvPr id="25" name="Text 23"/>
+          <p:cNvSpPr/>
+          <p:nvPr/>
+        </p:nvSpPr>
+        <p:spPr>
+          <a:xfrm>
+            <a:off x="5303520" y="2487168"/>
+            <a:ext cx="3154680" cy="502920"/>
+          </a:xfrm>
+          <a:prstGeom prst="rect">
+            <a:avLst/>
+          </a:prstGeom>
+          <a:noFill/>
+          <a:ln/>
+        </p:spPr>
+        <p:txBody>
+          <a:bodyPr wrap="square" lIns="0" tIns="0" rIns="0" bIns="0" rtlCol="0" anchor="ctr"/>
+          <a:lstStyle/>
+          <a:p>
+            <a:pPr indent="0" marL="0">
+              <a:buNone/>
+            </a:pPr>
+            <a:r>
+              <a:rPr lang="en-US" sz="1450" dirty="0">
+                <a:solidFill>
+                  <a:srgbClr val="24313F"/>
+                </a:solidFill>
+                <a:latin typeface="Georgia" pitchFamily="34" charset="0"/>
+                <a:ea typeface="Georgia" pitchFamily="34" charset="-122"/>
+                <a:cs typeface="Georgia" pitchFamily="34" charset="-120"/>
+              </a:rPr>
+              <a:t>Costume and props</a:t>
+            </a:r>
+            <a:endParaRPr lang="en-US" sz="1450" dirty="0"/>
+          </a:p>
+        </p:txBody>
+      </p:sp>
+      <p:sp>
+        <p:nvSpPr>
+          <p:cNvPr id="26" name="Shape 24"/>
+          <p:cNvSpPr/>
+          <p:nvPr/>
+        </p:nvSpPr>
+        <p:spPr>
+          <a:xfrm>
+            <a:off x="4754880" y="3035808"/>
+            <a:ext cx="3611880" cy="0"/>
+          </a:xfrm>
+          <a:prstGeom prst="line">
+            <a:avLst/>
+          </a:prstGeom>
+          <a:noFill/>
+          <a:ln w="9525">
+            <a:solidFill>
+              <a:srgbClr val="D9D4C4"/>
+            </a:solidFill>
+            <a:prstDash val="solid"/>
+          </a:ln>
+        </p:spPr>
+      </p:sp>
+      <p:sp>
+        <p:nvSpPr>
+          <p:cNvPr id="27" name="Text 25"/>
+          <p:cNvSpPr/>
+          <p:nvPr/>
+        </p:nvSpPr>
+        <p:spPr>
+          <a:xfrm>
+            <a:off x="4754880" y="3145536"/>
+            <a:ext cx="548640" cy="502920"/>
+          </a:xfrm>
+          <a:prstGeom prst="rect">
+            <a:avLst/>
+          </a:prstGeom>
+          <a:noFill/>
+          <a:ln/>
+        </p:spPr>
+        <p:txBody>
+          <a:bodyPr wrap="square" lIns="0" tIns="0" rIns="0" bIns="0" rtlCol="0" anchor="ctr"/>
+          <a:lstStyle/>
+          <a:p>
+            <a:pPr indent="0" marL="0">
+              <a:buNone/>
+            </a:pPr>
+            <a:r>
+              <a:rPr lang="en-US" sz="1700" dirty="0">
+                <a:solidFill>
+                  <a:srgbClr val="A3C1AD"/>
+                </a:solidFill>
+                <a:latin typeface="Georgia" pitchFamily="34" charset="0"/>
+                <a:ea typeface="Georgia" pitchFamily="34" charset="-122"/>
+                <a:cs typeface="Georgia" pitchFamily="34" charset="-120"/>
+              </a:rPr>
+              <a:t>08</a:t>
+            </a:r>
+            <a:endParaRPr lang="en-US" sz="1700" dirty="0"/>
+          </a:p>
+        </p:txBody>
+      </p:sp>
+      <p:sp>
+        <p:nvSpPr>
+          <p:cNvPr id="28" name="Text 26"/>
+          <p:cNvSpPr/>
+          <p:nvPr/>
+        </p:nvSpPr>
+        <p:spPr>
+          <a:xfrm>
+            <a:off x="5303520" y="3145536"/>
+            <a:ext cx="3154680" cy="502920"/>
+          </a:xfrm>
+          <a:prstGeom prst="rect">
+            <a:avLst/>
+          </a:prstGeom>
+          <a:noFill/>
+          <a:ln/>
+        </p:spPr>
+        <p:txBody>
+          <a:bodyPr wrap="square" lIns="0" tIns="0" rIns="0" bIns="0" rtlCol="0" anchor="ctr"/>
+          <a:lstStyle/>
+          <a:p>
+            <a:pPr indent="0" marL="0">
+              <a:buNone/>
+            </a:pPr>
+            <a:r>
+              <a:rPr lang="en-US" sz="1450" dirty="0">
+                <a:solidFill>
+                  <a:srgbClr val="24313F"/>
+                </a:solidFill>
+                <a:latin typeface="Georgia" pitchFamily="34" charset="0"/>
+                <a:ea typeface="Georgia" pitchFamily="34" charset="-122"/>
+                <a:cs typeface="Georgia" pitchFamily="34" charset="-120"/>
+              </a:rPr>
+              <a:t>Storyboard matches shot list</a:t>
+            </a:r>
+            <a:endParaRPr lang="en-US" sz="1450" dirty="0"/>
+          </a:p>
+        </p:txBody>
+      </p:sp>
+      <p:sp>
+        <p:nvSpPr>
+          <p:cNvPr id="29" name="Shape 27"/>
+          <p:cNvSpPr/>
+          <p:nvPr/>
+        </p:nvSpPr>
+        <p:spPr>
+          <a:xfrm>
+            <a:off x="4754880" y="3694176"/>
+            <a:ext cx="3611880" cy="0"/>
+          </a:xfrm>
+          <a:prstGeom prst="line">
+            <a:avLst/>
+          </a:prstGeom>
+          <a:noFill/>
+          <a:ln w="9525">
+            <a:solidFill>
+              <a:srgbClr val="D9D4C4"/>
+            </a:solidFill>
+            <a:prstDash val="solid"/>
+          </a:ln>
+        </p:spPr>
+      </p:sp>
+      <p:sp>
+        <p:nvSpPr>
+          <p:cNvPr id="30" name="Text 28"/>
+          <p:cNvSpPr/>
+          <p:nvPr/>
+        </p:nvSpPr>
+        <p:spPr>
+          <a:xfrm>
+            <a:off x="4754880" y="3803904"/>
+            <a:ext cx="548640" cy="502920"/>
+          </a:xfrm>
+          <a:prstGeom prst="rect">
+            <a:avLst/>
+          </a:prstGeom>
+          <a:noFill/>
+          <a:ln/>
+        </p:spPr>
+        <p:txBody>
+          <a:bodyPr wrap="square" lIns="0" tIns="0" rIns="0" bIns="0" rtlCol="0" anchor="ctr"/>
+          <a:lstStyle/>
+          <a:p>
+            <a:pPr indent="0" marL="0">
+              <a:buNone/>
+            </a:pPr>
+            <a:r>
+              <a:rPr lang="en-US" sz="1700" dirty="0">
+                <a:solidFill>
+                  <a:srgbClr val="A3C1AD"/>
+                </a:solidFill>
+                <a:latin typeface="Georgia" pitchFamily="34" charset="0"/>
+                <a:ea typeface="Georgia" pitchFamily="34" charset="-122"/>
+                <a:cs typeface="Georgia" pitchFamily="34" charset="-120"/>
+              </a:rPr>
+              <a:t>09</a:t>
+            </a:r>
+            <a:endParaRPr lang="en-US" sz="1700" dirty="0"/>
+          </a:p>
+        </p:txBody>
+      </p:sp>
+      <p:sp>
+        <p:nvSpPr>
+          <p:cNvPr id="31" name="Text 29"/>
+          <p:cNvSpPr/>
+          <p:nvPr/>
+        </p:nvSpPr>
+        <p:spPr>
+          <a:xfrm>
+            <a:off x="5303520" y="3803904"/>
+            <a:ext cx="3154680" cy="502920"/>
+          </a:xfrm>
+          <a:prstGeom prst="rect">
+            <a:avLst/>
+          </a:prstGeom>
+          <a:noFill/>
+          <a:ln/>
+        </p:spPr>
+        <p:txBody>
+          <a:bodyPr wrap="square" lIns="0" tIns="0" rIns="0" bIns="0" rtlCol="0" anchor="ctr"/>
+          <a:lstStyle/>
+          <a:p>
+            <a:pPr indent="0" marL="0">
+              <a:buNone/>
+            </a:pPr>
+            <a:r>
+              <a:rPr lang="en-US" sz="1450" dirty="0">
+                <a:solidFill>
+                  <a:srgbClr val="24313F"/>
+                </a:solidFill>
+                <a:latin typeface="Georgia" pitchFamily="34" charset="0"/>
+                <a:ea typeface="Georgia" pitchFamily="34" charset="-122"/>
+                <a:cs typeface="Georgia" pitchFamily="34" charset="-120"/>
+              </a:rPr>
+              <a:t>Schedule fits the break</a:t>
+            </a:r>
+            <a:endParaRPr lang="en-US" sz="1450" dirty="0"/>
+          </a:p>
+        </p:txBody>
+      </p:sp>
+      <p:sp>
+        <p:nvSpPr>
+          <p:cNvPr id="32" name="Shape 30"/>
+          <p:cNvSpPr/>
+          <p:nvPr/>
+        </p:nvSpPr>
+        <p:spPr>
+          <a:xfrm>
+            <a:off x="4754880" y="4352544"/>
+            <a:ext cx="3611880" cy="0"/>
+          </a:xfrm>
+          <a:prstGeom prst="line">
+            <a:avLst/>
+          </a:prstGeom>
+          <a:noFill/>
+          <a:ln w="9525">
+            <a:solidFill>
+              <a:srgbClr val="D9D4C4"/>
+            </a:solidFill>
+            <a:prstDash val="solid"/>
+          </a:ln>
+        </p:spPr>
+      </p:sp>
+      <p:sp>
+        <p:nvSpPr>
           <p:cNvPr id="33" name="Text 31"/>
           <p:cNvSpPr/>
           <p:nvPr/>
         </p:nvSpPr>
         <p:spPr>
           <a:xfrm>
-            <a:off x="822960" y="6419088"/>
-            <a:ext cx="7315200" cy="274320"/>
-          </a:xfrm>
-          <a:prstGeom prst="rect">
-            <a:avLst/>
-          </a:prstGeom>
-          <a:noFill/>
-          <a:ln/>
-        </p:spPr>
-        <p:txBody>
-          <a:bodyPr wrap="square" lIns="0" tIns="0" rIns="0" bIns="0" rtlCol="0" anchor="ctr"/>
-          <a:lstStyle/>
-          <a:p>
-            <a:pPr indent="0" marL="0">
-              <a:buNone/>
-            </a:pPr>
-            <a:r>
-              <a:rPr lang="en-US" sz="900" spc="150" kern="0" dirty="0">
+            <a:off x="4754880" y="4462272"/>
+            <a:ext cx="548640" cy="502920"/>
+          </a:xfrm>
+          <a:prstGeom prst="rect">
+            <a:avLst/>
+          </a:prstGeom>
+          <a:noFill/>
+          <a:ln/>
+        </p:spPr>
+        <p:txBody>
+          <a:bodyPr wrap="square" lIns="0" tIns="0" rIns="0" bIns="0" rtlCol="0" anchor="ctr"/>
+          <a:lstStyle/>
+          <a:p>
+            <a:pPr indent="0" marL="0">
+              <a:buNone/>
+            </a:pPr>
+            <a:r>
+              <a:rPr lang="en-US" sz="1700" dirty="0">
+                <a:solidFill>
+                  <a:srgbClr val="A3C1AD"/>
+                </a:solidFill>
+                <a:latin typeface="Georgia" pitchFamily="34" charset="0"/>
+                <a:ea typeface="Georgia" pitchFamily="34" charset="-122"/>
+                <a:cs typeface="Georgia" pitchFamily="34" charset="-120"/>
+              </a:rPr>
+              <a:t>10</a:t>
+            </a:r>
+            <a:endParaRPr lang="en-US" sz="1700" dirty="0"/>
+          </a:p>
+        </p:txBody>
+      </p:sp>
+      <p:sp>
+        <p:nvSpPr>
+          <p:cNvPr id="34" name="Text 32"/>
+          <p:cNvSpPr/>
+          <p:nvPr/>
+        </p:nvSpPr>
+        <p:spPr>
+          <a:xfrm>
+            <a:off x="5303520" y="4462272"/>
+            <a:ext cx="3154680" cy="502920"/>
+          </a:xfrm>
+          <a:prstGeom prst="rect">
+            <a:avLst/>
+          </a:prstGeom>
+          <a:noFill/>
+          <a:ln/>
+        </p:spPr>
+        <p:txBody>
+          <a:bodyPr wrap="square" lIns="0" tIns="0" rIns="0" bIns="0" rtlCol="0" anchor="ctr"/>
+          <a:lstStyle/>
+          <a:p>
+            <a:pPr indent="0" marL="0">
+              <a:buNone/>
+            </a:pPr>
+            <a:r>
+              <a:rPr lang="en-US" sz="1450" dirty="0">
+                <a:solidFill>
+                  <a:srgbClr val="24313F"/>
+                </a:solidFill>
+                <a:latin typeface="Georgia" pitchFamily="34" charset="0"/>
+                <a:ea typeface="Georgia" pitchFamily="34" charset="-122"/>
+                <a:cs typeface="Georgia" pitchFamily="34" charset="-120"/>
+              </a:rPr>
+              <a:t>No outside dependencies</a:t>
+            </a:r>
+            <a:endParaRPr lang="en-US" sz="1450" dirty="0"/>
+          </a:p>
+        </p:txBody>
+      </p:sp>
+      <p:sp>
+        <p:nvSpPr>
+          <p:cNvPr id="35" name="Shape 33"/>
+          <p:cNvSpPr/>
+          <p:nvPr/>
+        </p:nvSpPr>
+        <p:spPr>
+          <a:xfrm>
+            <a:off x="4754880" y="5010912"/>
+            <a:ext cx="3611880" cy="0"/>
+          </a:xfrm>
+          <a:prstGeom prst="line">
+            <a:avLst/>
+          </a:prstGeom>
+          <a:noFill/>
+          <a:ln w="9525">
+            <a:solidFill>
+              <a:srgbClr val="D9D4C4"/>
+            </a:solidFill>
+            <a:prstDash val="solid"/>
+          </a:ln>
+        </p:spPr>
+      </p:sp>
+      <p:sp>
+        <p:nvSpPr>
+          <p:cNvPr id="36" name="Shape 34"/>
+          <p:cNvSpPr/>
+          <p:nvPr/>
+        </p:nvSpPr>
+        <p:spPr>
+          <a:xfrm>
+            <a:off x="8549640" y="1417320"/>
+            <a:ext cx="2926080" cy="3977640"/>
+          </a:xfrm>
+          <a:prstGeom prst="rect">
+            <a:avLst/>
+          </a:prstGeom>
+          <a:solidFill>
+            <a:srgbClr val="FAF8F1"/>
+          </a:solidFill>
+          <a:ln w="9525">
+            <a:solidFill>
+              <a:srgbClr val="D9D4C4"/>
+            </a:solidFill>
+            <a:prstDash val="solid"/>
+          </a:ln>
+        </p:spPr>
+      </p:sp>
+      <p:pic>
+        <p:nvPicPr>
+          <p:cNvPr id="37" name="Image 0" descr="/Users/dogan/Documents/Vaults/Courses/wiki/classes/media-studies/decks/_build/img/ws68.jpg">    </p:cNvPr>
+          <p:cNvPicPr>
+            <a:picLocks noChangeAspect="1"/>
+          </p:cNvPicPr>
+          <p:nvPr/>
+        </p:nvPicPr>
+        <p:blipFill>
+          <a:blip r:embed="rId1"/>
+          <a:stretch>
+            <a:fillRect/>
+          </a:stretch>
+        </p:blipFill>
+        <p:spPr>
+          <a:xfrm>
+            <a:off x="8697627" y="1545336"/>
+            <a:ext cx="2630106" cy="3721608"/>
+          </a:xfrm>
+          <a:prstGeom prst="rect">
+            <a:avLst/>
+          </a:prstGeom>
+        </p:spPr>
+      </p:pic>
+      <p:sp>
+        <p:nvSpPr>
+          <p:cNvPr id="38" name="Text 35"/>
+          <p:cNvSpPr/>
+          <p:nvPr/>
+        </p:nvSpPr>
+        <p:spPr>
+          <a:xfrm>
+            <a:off x="8366760" y="5440680"/>
+            <a:ext cx="3291840" cy="457200"/>
+          </a:xfrm>
+          <a:prstGeom prst="rect">
+            <a:avLst/>
+          </a:prstGeom>
+          <a:noFill/>
+          <a:ln/>
+        </p:spPr>
+        <p:txBody>
+          <a:bodyPr wrap="square" lIns="0" tIns="0" rIns="0" bIns="0" rtlCol="0" anchor="t"/>
+          <a:lstStyle/>
+          <a:p>
+            <a:pPr algn="ctr" indent="0" marL="0">
+              <a:lnSpc>
+                <a:spcPts val="1300"/>
+              </a:lnSpc>
+              <a:buNone/>
+            </a:pPr>
+            <a:r>
+              <a:rPr lang="en-US" sz="1000" dirty="0">
                 <a:solidFill>
                   <a:srgbClr val="7A7F72"/>
                 </a:solidFill>
@@ -6381,6 +5969,164 @@
                 <a:ea typeface="Arial" pitchFamily="34" charset="-122"/>
                 <a:cs typeface="Arial" pitchFamily="34" charset="-120"/>
               </a:rPr>
+              <a:t>WS 6.8, the storyboard sheet the plan is drawn on</a:t>
+            </a:r>
+            <a:endParaRPr lang="en-US" sz="1000" dirty="0"/>
+          </a:p>
+        </p:txBody>
+      </p:sp>
+      <p:sp>
+        <p:nvSpPr>
+          <p:cNvPr id="39" name="Text 36"/>
+          <p:cNvSpPr/>
+          <p:nvPr/>
+        </p:nvSpPr>
+        <p:spPr>
+          <a:xfrm>
+            <a:off x="822960" y="5349240"/>
+            <a:ext cx="7498080" cy="685800"/>
+          </a:xfrm>
+          <a:prstGeom prst="rect">
+            <a:avLst/>
+          </a:prstGeom>
+          <a:noFill/>
+          <a:ln/>
+        </p:spPr>
+        <p:txBody>
+          <a:bodyPr wrap="square" lIns="0" tIns="0" rIns="0" bIns="0" rtlCol="0" anchor="t"/>
+          <a:lstStyle/>
+          <a:p>
+            <a:pPr indent="0" marL="0">
+              <a:lnSpc>
+                <a:spcPts val="1600"/>
+              </a:lnSpc>
+              <a:buNone/>
+            </a:pPr>
+            <a:r>
+              <a:rPr lang="en-US" sz="1050" b="1" spc="100" kern="0" dirty="0">
+                <a:solidFill>
+                  <a:srgbClr val="4A6B5D"/>
+                </a:solidFill>
+                <a:latin typeface="Arial" pitchFamily="34" charset="0"/>
+                <a:ea typeface="Arial" pitchFamily="34" charset="-122"/>
+                <a:cs typeface="Arial" pitchFamily="34" charset="-120"/>
+              </a:rPr>
+              <a:t>THE RULE   </a:t>
+            </a:r>
+            <a:pPr indent="0" marL="0">
+              <a:lnSpc>
+                <a:spcPts val="1600"/>
+              </a:lnSpc>
+              <a:buNone/>
+            </a:pPr>
+            <a:r>
+              <a:rPr lang="en-US" sz="1250" dirty="0">
+                <a:solidFill>
+                  <a:srgbClr val="7A7F72"/>
+                </a:solidFill>
+                <a:latin typeface="Georgia" pitchFamily="34" charset="0"/>
+                <a:ea typeface="Georgia" pitchFamily="34" charset="-122"/>
+                <a:cs typeface="Georgia" pitchFamily="34" charset="-120"/>
+              </a:rPr>
+              <a:t>Ten green lights, or the plan does not pass. Locked means locked.</a:t>
+            </a:r>
+            <a:endParaRPr lang="en-US" sz="1050" dirty="0"/>
+          </a:p>
+          <a:p>
+            <a:pPr indent="0" marL="0">
+              <a:lnSpc>
+                <a:spcPts val="1600"/>
+              </a:lnSpc>
+              <a:buNone/>
+            </a:pPr>
+            <a:r>
+              <a:rPr lang="en-US" sz="1050" b="1" spc="100" kern="0" dirty="0">
+                <a:solidFill>
+                  <a:srgbClr val="4A6B5D"/>
+                </a:solidFill>
+                <a:latin typeface="Arial" pitchFamily="34" charset="0"/>
+                <a:ea typeface="Arial" pitchFamily="34" charset="-122"/>
+                <a:cs typeface="Arial" pitchFamily="34" charset="-120"/>
+              </a:rPr>
+              <a:t>CHANGES   </a:t>
+            </a:r>
+            <a:pPr indent="0" marL="0">
+              <a:lnSpc>
+                <a:spcPts val="1600"/>
+              </a:lnSpc>
+              <a:buNone/>
+            </a:pPr>
+            <a:r>
+              <a:rPr lang="en-US" sz="1250" dirty="0">
+                <a:solidFill>
+                  <a:srgbClr val="7A7F72"/>
+                </a:solidFill>
+                <a:latin typeface="Georgia" pitchFamily="34" charset="0"/>
+                <a:ea typeface="Georgia" pitchFamily="34" charset="-122"/>
+                <a:cs typeface="Georgia" pitchFamily="34" charset="-120"/>
+              </a:rPr>
+              <a:t>Later changes must be written into the WS 6.4 production diary. No silent swaps. Equipment sign-out opens today.</a:t>
+            </a:r>
+            <a:endParaRPr lang="en-US" sz="1050" dirty="0"/>
+          </a:p>
+        </p:txBody>
+      </p:sp>
+      <p:sp>
+        <p:nvSpPr>
+          <p:cNvPr id="40" name="Shape 37"/>
+          <p:cNvSpPr/>
+          <p:nvPr/>
+        </p:nvSpPr>
+        <p:spPr>
+          <a:xfrm>
+            <a:off x="822960" y="6382512"/>
+            <a:ext cx="10543032" cy="0"/>
+          </a:xfrm>
+          <a:prstGeom prst="line">
+            <a:avLst/>
+          </a:prstGeom>
+          <a:noFill/>
+          <a:ln w="9525">
+            <a:solidFill>
+              <a:srgbClr val="D9D4C4"/>
+            </a:solidFill>
+            <a:prstDash val="solid"/>
+          </a:ln>
+        </p:spPr>
+      </p:sp>
+      <p:sp>
+        <p:nvSpPr>
+          <p:cNvPr id="41" name="Text 38"/>
+          <p:cNvSpPr/>
+          <p:nvPr/>
+        </p:nvSpPr>
+        <p:spPr>
+          <a:xfrm>
+            <a:off x="822960" y="6419088"/>
+            <a:ext cx="7315200" cy="274320"/>
+          </a:xfrm>
+          <a:prstGeom prst="rect">
+            <a:avLst/>
+          </a:prstGeom>
+          <a:noFill/>
+          <a:ln/>
+        </p:spPr>
+        <p:txBody>
+          <a:bodyPr wrap="square" lIns="0" tIns="0" rIns="0" bIns="0" rtlCol="0" anchor="ctr"/>
+          <a:lstStyle/>
+          <a:p>
+            <a:pPr indent="0" marL="0">
+              <a:buNone/>
+            </a:pPr>
+            <a:r>
+              <a:rPr lang="en-US" sz="900" spc="150" kern="0" dirty="0">
+                <a:solidFill>
+                  <a:srgbClr val="7A7F72"/>
+                </a:solidFill>
+                <a:latin typeface="Arial" pitchFamily="34" charset="0"/>
+                <a:ea typeface="Arial" pitchFamily="34" charset="-122"/>
+                <a:cs typeface="Arial" pitchFamily="34" charset="-120"/>
+              </a:rPr>
               <a:t>MEDIA STUDIES 9607 · SEMESTER I</a:t>
             </a:r>
             <a:endParaRPr lang="en-US" sz="900" dirty="0"/>
@@ -6389,7 +6135,7 @@
       </p:sp>
       <p:sp>
         <p:nvSpPr>
-          <p:cNvPr id="34" name="Text 32"/>
+          <p:cNvPr id="42" name="Text 39"/>
           <p:cNvSpPr/>
           <p:nvPr/>
         </p:nvSpPr>
@@ -6420,7 +6166,7 @@
                 <a:ea typeface="Georgia" pitchFamily="34" charset="-122"/>
                 <a:cs typeface="Georgia" pitchFamily="34" charset="-120"/>
               </a:rPr>
-              <a:t>02</a:t>
+              <a:t>01</a:t>
             </a:r>
             <a:endParaRPr lang="en-US" sz="1600" dirty="0"/>
           </a:p>
@@ -6440,7 +6186,7 @@
     <p:bg>
       <p:bgPr>
         <a:solidFill>
-          <a:srgbClr val="E8EFE7"/>
+          <a:srgbClr val="FAF8F1"/>
         </a:solidFill>
       </p:bgPr>
     </p:bg>
@@ -6466,34 +6212,34 @@
         </p:nvSpPr>
         <p:spPr>
           <a:xfrm>
-            <a:off x="502920" y="548640"/>
-            <a:ext cx="1828800" cy="1828800"/>
-          </a:xfrm>
-          <a:prstGeom prst="rect">
-            <a:avLst/>
-          </a:prstGeom>
-          <a:noFill/>
-          <a:ln/>
-        </p:spPr>
-        <p:txBody>
-          <a:bodyPr wrap="square" lIns="0" tIns="0" rIns="0" bIns="0" rtlCol="0" anchor="t"/>
-          <a:lstStyle/>
-          <a:p>
-            <a:pPr indent="0" marL="0">
-              <a:buNone/>
-            </a:pPr>
-            <a:r>
-              <a:rPr lang="en-US" sz="20000" dirty="0">
-                <a:solidFill>
-                  <a:srgbClr val="A3C1AD"/>
-                </a:solidFill>
-                <a:latin typeface="Georgia" pitchFamily="34" charset="0"/>
-                <a:ea typeface="Georgia" pitchFamily="34" charset="-122"/>
-                <a:cs typeface="Georgia" pitchFamily="34" charset="-120"/>
-              </a:rPr>
-              <a:t>“</a:t>
-            </a:r>
-            <a:endParaRPr lang="en-US" sz="20000" dirty="0"/>
+            <a:off x="822960" y="457200"/>
+            <a:ext cx="6400800" cy="274320"/>
+          </a:xfrm>
+          <a:prstGeom prst="rect">
+            <a:avLst/>
+          </a:prstGeom>
+          <a:noFill/>
+          <a:ln/>
+        </p:spPr>
+        <p:txBody>
+          <a:bodyPr wrap="square" lIns="0" tIns="0" rIns="0" bIns="0" rtlCol="0" anchor="ctr"/>
+          <a:lstStyle/>
+          <a:p>
+            <a:pPr algn="l" indent="0" marL="0">
+              <a:buNone/>
+            </a:pPr>
+            <a:r>
+              <a:rPr lang="en-US" sz="1100" b="1" spc="250" kern="0" dirty="0">
+                <a:solidFill>
+                  <a:srgbClr val="4A6B5D"/>
+                </a:solidFill>
+                <a:latin typeface="Arial" pitchFamily="34" charset="0"/>
+                <a:ea typeface="Arial" pitchFamily="34" charset="-122"/>
+                <a:cs typeface="Arial" pitchFamily="34" charset="-120"/>
+              </a:rPr>
+              <a:t>WHAT ARRIVES AT THE LOCK</a:t>
+            </a:r>
+            <a:endParaRPr lang="en-US" sz="1100" dirty="0"/>
           </a:p>
         </p:txBody>
       </p:sp>
@@ -6505,37 +6251,34 @@
         </p:nvSpPr>
         <p:spPr>
           <a:xfrm>
-            <a:off x="822960" y="1783080"/>
-            <a:ext cx="10424160" cy="3291840"/>
-          </a:xfrm>
-          <a:prstGeom prst="rect">
-            <a:avLst/>
-          </a:prstGeom>
-          <a:noFill/>
-          <a:ln/>
-        </p:spPr>
-        <p:txBody>
-          <a:bodyPr wrap="square" lIns="0" tIns="0" rIns="0" bIns="0" rtlCol="0" anchor="ctr"/>
-          <a:lstStyle/>
-          <a:p>
-            <a:pPr indent="0" marL="0">
-              <a:lnSpc>
-                <a:spcPts val="3800"/>
-              </a:lnSpc>
-              <a:buNone/>
-            </a:pPr>
-            <a:r>
-              <a:rPr lang="en-US" sz="2800" dirty="0">
-                <a:solidFill>
-                  <a:srgbClr val="24313F"/>
-                </a:solidFill>
-                <a:latin typeface="Georgia" pitchFamily="34" charset="0"/>
-                <a:ea typeface="Georgia" pitchFamily="34" charset="-122"/>
-                <a:cs typeface="Georgia" pitchFamily="34" charset="-120"/>
-              </a:rPr>
-              <a:t>The principle here is to break down an extract from a TV drama into its component parts and then reassemble them in order to reach some insights into how it produces particular meanings.</a:t>
-            </a:r>
-            <a:endParaRPr lang="en-US" sz="2800" dirty="0"/>
+            <a:off x="6793992" y="457200"/>
+            <a:ext cx="4572000" cy="274320"/>
+          </a:xfrm>
+          <a:prstGeom prst="rect">
+            <a:avLst/>
+          </a:prstGeom>
+          <a:noFill/>
+          <a:ln/>
+        </p:spPr>
+        <p:txBody>
+          <a:bodyPr wrap="square" lIns="0" tIns="0" rIns="0" bIns="0" rtlCol="0" anchor="ctr"/>
+          <a:lstStyle/>
+          <a:p>
+            <a:pPr algn="r" indent="0" marL="0">
+              <a:buNone/>
+            </a:pPr>
+            <a:r>
+              <a:rPr lang="en-US" sz="1100" b="1" spc="250" kern="0" dirty="0">
+                <a:solidFill>
+                  <a:srgbClr val="7A7F72"/>
+                </a:solidFill>
+                <a:latin typeface="Arial" pitchFamily="34" charset="0"/>
+                <a:ea typeface="Arial" pitchFamily="34" charset="-122"/>
+                <a:cs typeface="Arial" pitchFamily="34" charset="-120"/>
+              </a:rPr>
+              <a:t>FOUR BUILDS, ALREADY DATED ON THE BLOG</a:t>
+            </a:r>
+            <a:endParaRPr lang="en-US" sz="1100" dirty="0"/>
           </a:p>
         </p:txBody>
       </p:sp>
@@ -6547,16 +6290,16 @@
         </p:nvSpPr>
         <p:spPr>
           <a:xfrm>
-            <a:off x="822960" y="5029200"/>
-            <a:ext cx="914400" cy="0"/>
+            <a:off x="822960" y="786384"/>
+            <a:ext cx="10543032" cy="0"/>
           </a:xfrm>
           <a:prstGeom prst="line">
             <a:avLst/>
           </a:prstGeom>
           <a:noFill/>
-          <a:ln w="31750">
+          <a:ln w="9525">
             <a:solidFill>
-              <a:srgbClr val="8C3A38"/>
+              <a:srgbClr val="D9D4C4"/>
             </a:solidFill>
             <a:prstDash val="solid"/>
           </a:ln>
@@ -6564,30 +6307,79 @@
       </p:sp>
       <p:sp>
         <p:nvSpPr>
-          <p:cNvPr id="5" name="Text 3"/>
-          <p:cNvSpPr/>
-          <p:nvPr/>
-        </p:nvSpPr>
-        <p:spPr>
-          <a:xfrm>
-            <a:off x="822960" y="5212080"/>
-            <a:ext cx="10058400" cy="457200"/>
-          </a:xfrm>
-          <a:prstGeom prst="rect">
-            <a:avLst/>
-          </a:prstGeom>
-          <a:noFill/>
-          <a:ln/>
-        </p:spPr>
-        <p:txBody>
-          <a:bodyPr wrap="square" lIns="0" tIns="0" rIns="0" bIns="0" rtlCol="0" anchor="ctr"/>
-          <a:lstStyle/>
-          <a:p>
-            <a:pPr indent="0" marL="0">
-              <a:buNone/>
-            </a:pPr>
-            <a:r>
-              <a:rPr lang="en-US" sz="1400" spc="100" kern="0" dirty="0">
+          <p:cNvPr id="5" name="Shape 3"/>
+          <p:cNvSpPr/>
+          <p:nvPr/>
+        </p:nvSpPr>
+        <p:spPr>
+          <a:xfrm>
+            <a:off x="822960" y="1051560"/>
+            <a:ext cx="5088636" cy="2084832"/>
+          </a:xfrm>
+          <a:prstGeom prst="rect">
+            <a:avLst/>
+          </a:prstGeom>
+          <a:solidFill>
+            <a:srgbClr val="FAF8F1"/>
+          </a:solidFill>
+          <a:ln w="9525">
+            <a:solidFill>
+              <a:srgbClr val="D9D4C4"/>
+            </a:solidFill>
+            <a:prstDash val="solid"/>
+          </a:ln>
+        </p:spPr>
+      </p:sp>
+      <p:pic>
+        <p:nvPicPr>
+          <p:cNvPr id="6" name="Image 0" descr="/Users/dogan/Documents/Vaults/Courses/wiki/classes/media-studies/decks/_build/img/goodfellas-copa-1.jpg">    </p:cNvPr>
+          <p:cNvPicPr>
+            <a:picLocks noChangeAspect="1"/>
+          </p:cNvPicPr>
+          <p:nvPr/>
+        </p:nvPicPr>
+        <p:blipFill>
+          <a:blip r:embed="rId1"/>
+          <a:stretch>
+            <a:fillRect/>
+          </a:stretch>
+        </p:blipFill>
+        <p:spPr>
+          <a:xfrm>
+            <a:off x="1738058" y="1179576"/>
+            <a:ext cx="3258441" cy="1828800"/>
+          </a:xfrm>
+          <a:prstGeom prst="rect">
+            <a:avLst/>
+          </a:prstGeom>
+        </p:spPr>
+      </p:pic>
+      <p:sp>
+        <p:nvSpPr>
+          <p:cNvPr id="7" name="Text 4"/>
+          <p:cNvSpPr/>
+          <p:nvPr/>
+        </p:nvSpPr>
+        <p:spPr>
+          <a:xfrm>
+            <a:off x="822960" y="3172968"/>
+            <a:ext cx="2377440" cy="292608"/>
+          </a:xfrm>
+          <a:prstGeom prst="rect">
+            <a:avLst/>
+          </a:prstGeom>
+          <a:noFill/>
+          <a:ln/>
+        </p:spPr>
+        <p:txBody>
+          <a:bodyPr wrap="square" lIns="0" tIns="0" rIns="0" bIns="0" rtlCol="0" anchor="ctr"/>
+          <a:lstStyle/>
+          <a:p>
+            <a:pPr indent="0" marL="0">
+              <a:buNone/>
+            </a:pPr>
+            <a:r>
+              <a:rPr lang="en-US" sz="1150" b="1" spc="100" kern="0" dirty="0">
                 <a:solidFill>
                   <a:srgbClr val="4A6B5D"/>
                 </a:solidFill>
@@ -6595,68 +6387,530 @@
                 <a:ea typeface="Arial" pitchFamily="34" charset="-122"/>
                 <a:cs typeface="Arial" pitchFamily="34" charset="-120"/>
               </a:rPr>
-              <a:t>Cambridge Scheme of Work, Component 2 Section A</a:t>
-            </a:r>
-            <a:endParaRPr lang="en-US" sz="1400" dirty="0"/>
-          </a:p>
-        </p:txBody>
-      </p:sp>
-      <p:sp>
-        <p:nvSpPr>
-          <p:cNvPr id="6" name="Text 4"/>
-          <p:cNvSpPr/>
-          <p:nvPr/>
-        </p:nvSpPr>
-        <p:spPr>
-          <a:xfrm>
-            <a:off x="822960" y="5806440"/>
-            <a:ext cx="10424160" cy="640080"/>
-          </a:xfrm>
-          <a:prstGeom prst="rect">
-            <a:avLst/>
-          </a:prstGeom>
-          <a:noFill/>
-          <a:ln/>
-        </p:spPr>
-        <p:txBody>
-          <a:bodyPr wrap="square" lIns="0" tIns="0" rIns="0" bIns="0" rtlCol="0" anchor="t"/>
-          <a:lstStyle/>
-          <a:p>
-            <a:pPr indent="0" marL="0">
-              <a:lnSpc>
-                <a:spcPts val="1900"/>
-              </a:lnSpc>
-              <a:buNone/>
-            </a:pPr>
-            <a:r>
-              <a:rPr lang="en-US" sz="1200" b="1" spc="100" kern="0" dirty="0">
+              <a:t>CS3 · Camera</a:t>
+            </a:r>
+            <a:endParaRPr lang="en-US" sz="1150" dirty="0"/>
+          </a:p>
+        </p:txBody>
+      </p:sp>
+      <p:sp>
+        <p:nvSpPr>
+          <p:cNvPr id="8" name="Text 5"/>
+          <p:cNvSpPr/>
+          <p:nvPr/>
+        </p:nvSpPr>
+        <p:spPr>
+          <a:xfrm>
+            <a:off x="3200400" y="3172968"/>
+            <a:ext cx="2711196" cy="292608"/>
+          </a:xfrm>
+          <a:prstGeom prst="rect">
+            <a:avLst/>
+          </a:prstGeom>
+          <a:noFill/>
+          <a:ln/>
+        </p:spPr>
+        <p:txBody>
+          <a:bodyPr wrap="square" lIns="0" tIns="0" rIns="0" bIns="0" rtlCol="0" anchor="ctr"/>
+          <a:lstStyle/>
+          <a:p>
+            <a:pPr indent="0" marL="0">
+              <a:buNone/>
+            </a:pPr>
+            <a:r>
+              <a:rPr lang="en-US" sz="1200" i="1" dirty="0">
                 <a:solidFill>
                   <a:srgbClr val="7A7F72"/>
+                </a:solidFill>
+                <a:latin typeface="Georgia" pitchFamily="34" charset="0"/>
+                <a:ea typeface="Georgia" pitchFamily="34" charset="-122"/>
+                <a:cs typeface="Georgia" pitchFamily="34" charset="-120"/>
+              </a:rPr>
+              <a:t>a shot vocabulary, proven on six frames</a:t>
+            </a:r>
+            <a:endParaRPr lang="en-US" sz="1200" dirty="0"/>
+          </a:p>
+        </p:txBody>
+      </p:sp>
+      <p:sp>
+        <p:nvSpPr>
+          <p:cNvPr id="9" name="Shape 6"/>
+          <p:cNvSpPr/>
+          <p:nvPr/>
+        </p:nvSpPr>
+        <p:spPr>
+          <a:xfrm>
+            <a:off x="6277356" y="1051560"/>
+            <a:ext cx="5088636" cy="2084832"/>
+          </a:xfrm>
+          <a:prstGeom prst="rect">
+            <a:avLst/>
+          </a:prstGeom>
+          <a:solidFill>
+            <a:srgbClr val="FAF8F1"/>
+          </a:solidFill>
+          <a:ln w="9525">
+            <a:solidFill>
+              <a:srgbClr val="D9D4C4"/>
+            </a:solidFill>
+            <a:prstDash val="solid"/>
+          </a:ln>
+        </p:spPr>
+      </p:sp>
+      <p:pic>
+        <p:nvPicPr>
+          <p:cNvPr id="10" name="Image 1" descr="/Users/dogan/Documents/Vaults/Courses/wiki/classes/media-studies/decks/_build/img/foley-room.jpg">    </p:cNvPr>
+          <p:cNvPicPr>
+            <a:picLocks noChangeAspect="1"/>
+          </p:cNvPicPr>
+          <p:nvPr/>
+        </p:nvPicPr>
+        <p:blipFill>
+          <a:blip r:embed="rId2"/>
+          <a:stretch>
+            <a:fillRect/>
+          </a:stretch>
+        </p:blipFill>
+        <p:spPr>
+          <a:xfrm>
+            <a:off x="8212455" y="1179576"/>
+            <a:ext cx="1218438" cy="1828800"/>
+          </a:xfrm>
+          <a:prstGeom prst="rect">
+            <a:avLst/>
+          </a:prstGeom>
+        </p:spPr>
+      </p:pic>
+      <p:sp>
+        <p:nvSpPr>
+          <p:cNvPr id="11" name="Text 7"/>
+          <p:cNvSpPr/>
+          <p:nvPr/>
+        </p:nvSpPr>
+        <p:spPr>
+          <a:xfrm>
+            <a:off x="6277356" y="3172968"/>
+            <a:ext cx="2377440" cy="292608"/>
+          </a:xfrm>
+          <a:prstGeom prst="rect">
+            <a:avLst/>
+          </a:prstGeom>
+          <a:noFill/>
+          <a:ln/>
+        </p:spPr>
+        <p:txBody>
+          <a:bodyPr wrap="square" lIns="0" tIns="0" rIns="0" bIns="0" rtlCol="0" anchor="ctr"/>
+          <a:lstStyle/>
+          <a:p>
+            <a:pPr indent="0" marL="0">
+              <a:buNone/>
+            </a:pPr>
+            <a:r>
+              <a:rPr lang="en-US" sz="1150" b="1" spc="100" kern="0" dirty="0">
+                <a:solidFill>
+                  <a:srgbClr val="4A6B5D"/>
                 </a:solidFill>
                 <a:latin typeface="Arial" pitchFamily="34" charset="0"/>
                 <a:ea typeface="Arial" pitchFamily="34" charset="-122"/>
                 <a:cs typeface="Arial" pitchFamily="34" charset="-120"/>
               </a:rPr>
-              <a:t>IN PLAIN WORDS   </a:t>
-            </a:r>
-            <a:pPr indent="0" marL="0">
-              <a:lnSpc>
-                <a:spcPts val="1900"/>
-              </a:lnSpc>
-              <a:buNone/>
-            </a:pPr>
-            <a:r>
-              <a:rPr lang="en-US" sz="1400" i="1" dirty="0">
+              <a:t>CS4 · Sound</a:t>
+            </a:r>
+            <a:endParaRPr lang="en-US" sz="1150" dirty="0"/>
+          </a:p>
+        </p:txBody>
+      </p:sp>
+      <p:sp>
+        <p:nvSpPr>
+          <p:cNvPr id="12" name="Text 8"/>
+          <p:cNvSpPr/>
+          <p:nvPr/>
+        </p:nvSpPr>
+        <p:spPr>
+          <a:xfrm>
+            <a:off x="8654796" y="3172968"/>
+            <a:ext cx="2711196" cy="292608"/>
+          </a:xfrm>
+          <a:prstGeom prst="rect">
+            <a:avLst/>
+          </a:prstGeom>
+          <a:noFill/>
+          <a:ln/>
+        </p:spPr>
+        <p:txBody>
+          <a:bodyPr wrap="square" lIns="0" tIns="0" rIns="0" bIns="0" rtlCol="0" anchor="ctr"/>
+          <a:lstStyle/>
+          <a:p>
+            <a:pPr indent="0" marL="0">
+              <a:buNone/>
+            </a:pPr>
+            <a:r>
+              <a:rPr lang="en-US" sz="1200" i="1" dirty="0">
+                <a:solidFill>
+                  <a:srgbClr val="7A7F72"/>
+                </a:solidFill>
+                <a:latin typeface="Georgia" pitchFamily="34" charset="0"/>
+                <a:ea typeface="Georgia" pitchFamily="34" charset="-122"/>
+                <a:cs typeface="Georgia" pitchFamily="34" charset="-120"/>
+              </a:rPr>
+              <a:t>a soundscape for this opening, already built</a:t>
+            </a:r>
+            <a:endParaRPr lang="en-US" sz="1200" dirty="0"/>
+          </a:p>
+        </p:txBody>
+      </p:sp>
+      <p:sp>
+        <p:nvSpPr>
+          <p:cNvPr id="13" name="Shape 9"/>
+          <p:cNvSpPr/>
+          <p:nvPr/>
+        </p:nvSpPr>
+        <p:spPr>
+          <a:xfrm>
+            <a:off x="822960" y="3703320"/>
+            <a:ext cx="5088636" cy="2084832"/>
+          </a:xfrm>
+          <a:prstGeom prst="rect">
+            <a:avLst/>
+          </a:prstGeom>
+          <a:solidFill>
+            <a:srgbClr val="FAF8F1"/>
+          </a:solidFill>
+          <a:ln w="9525">
+            <a:solidFill>
+              <a:srgbClr val="D9D4C4"/>
+            </a:solidFill>
+            <a:prstDash val="solid"/>
+          </a:ln>
+        </p:spPr>
+      </p:sp>
+      <p:pic>
+        <p:nvPicPr>
+          <p:cNvPr id="14" name="Image 2" descr="/Users/dogan/Documents/Vaults/Courses/wiki/classes/media-studies/decks/_build/img/gbh-concierge.jpg">    </p:cNvPr>
+          <p:cNvPicPr>
+            <a:picLocks noChangeAspect="1"/>
+          </p:cNvPicPr>
+          <p:nvPr/>
+        </p:nvPicPr>
+        <p:blipFill>
+          <a:blip r:embed="rId3"/>
+          <a:stretch>
+            <a:fillRect/>
+          </a:stretch>
+        </p:blipFill>
+        <p:spPr>
+          <a:xfrm>
+            <a:off x="1248061" y="3831336"/>
+            <a:ext cx="4238435" cy="1828800"/>
+          </a:xfrm>
+          <a:prstGeom prst="rect">
+            <a:avLst/>
+          </a:prstGeom>
+        </p:spPr>
+      </p:pic>
+      <p:sp>
+        <p:nvSpPr>
+          <p:cNvPr id="15" name="Text 10"/>
+          <p:cNvSpPr/>
+          <p:nvPr/>
+        </p:nvSpPr>
+        <p:spPr>
+          <a:xfrm>
+            <a:off x="822960" y="5824728"/>
+            <a:ext cx="2377440" cy="292608"/>
+          </a:xfrm>
+          <a:prstGeom prst="rect">
+            <a:avLst/>
+          </a:prstGeom>
+          <a:noFill/>
+          <a:ln/>
+        </p:spPr>
+        <p:txBody>
+          <a:bodyPr wrap="square" lIns="0" tIns="0" rIns="0" bIns="0" rtlCol="0" anchor="ctr"/>
+          <a:lstStyle/>
+          <a:p>
+            <a:pPr indent="0" marL="0">
+              <a:buNone/>
+            </a:pPr>
+            <a:r>
+              <a:rPr lang="en-US" sz="1150" b="1" spc="100" kern="0" dirty="0">
                 <a:solidFill>
                   <a:srgbClr val="4A6B5D"/>
                 </a:solidFill>
-                <a:latin typeface="Georgia" pitchFamily="34" charset="0"/>
-                <a:ea typeface="Georgia" pitchFamily="34" charset="-122"/>
-                <a:cs typeface="Georgia" pitchFamily="34" charset="-120"/>
-              </a:rPr>
-              <a:t>Take the extract apart into its four elements, then put it back together to see how it makes meaning.</a:t>
+                <a:latin typeface="Arial" pitchFamily="34" charset="0"/>
+                <a:ea typeface="Arial" pitchFamily="34" charset="-122"/>
+                <a:cs typeface="Arial" pitchFamily="34" charset="-120"/>
+              </a:rPr>
+              <a:t>CS5 · Design</a:t>
+            </a:r>
+            <a:endParaRPr lang="en-US" sz="1150" dirty="0"/>
+          </a:p>
+        </p:txBody>
+      </p:sp>
+      <p:sp>
+        <p:nvSpPr>
+          <p:cNvPr id="16" name="Text 11"/>
+          <p:cNvSpPr/>
+          <p:nvPr/>
+        </p:nvSpPr>
+        <p:spPr>
+          <a:xfrm>
+            <a:off x="3200400" y="5824728"/>
+            <a:ext cx="2711196" cy="292608"/>
+          </a:xfrm>
+          <a:prstGeom prst="rect">
+            <a:avLst/>
+          </a:prstGeom>
+          <a:noFill/>
+          <a:ln/>
+        </p:spPr>
+        <p:txBody>
+          <a:bodyPr wrap="square" lIns="0" tIns="0" rIns="0" bIns="0" rtlCol="0" anchor="ctr"/>
+          <a:lstStyle/>
+          <a:p>
+            <a:pPr indent="0" marL="0">
+              <a:buNone/>
+            </a:pPr>
+            <a:r>
+              <a:rPr lang="en-US" sz="1200" i="1" dirty="0">
+                <a:solidFill>
+                  <a:srgbClr val="7A7F72"/>
+                </a:solidFill>
+                <a:latin typeface="Georgia" pitchFamily="34" charset="0"/>
+                <a:ea typeface="Georgia" pitchFamily="34" charset="-122"/>
+                <a:cs typeface="Georgia" pitchFamily="34" charset="-120"/>
+              </a:rPr>
+              <a:t>a board the reviewer holds beside your plan</a:t>
             </a:r>
             <a:endParaRPr lang="en-US" sz="1200" dirty="0"/>
+          </a:p>
+        </p:txBody>
+      </p:sp>
+      <p:sp>
+        <p:nvSpPr>
+          <p:cNvPr id="17" name="Shape 12"/>
+          <p:cNvSpPr/>
+          <p:nvPr/>
+        </p:nvSpPr>
+        <p:spPr>
+          <a:xfrm>
+            <a:off x="6277356" y="3703320"/>
+            <a:ext cx="5088636" cy="2084832"/>
+          </a:xfrm>
+          <a:prstGeom prst="rect">
+            <a:avLst/>
+          </a:prstGeom>
+          <a:solidFill>
+            <a:srgbClr val="FAF8F1"/>
+          </a:solidFill>
+          <a:ln w="9525">
+            <a:solidFill>
+              <a:srgbClr val="D9D4C4"/>
+            </a:solidFill>
+            <a:prstDash val="solid"/>
+          </a:ln>
+        </p:spPr>
+      </p:sp>
+      <p:pic>
+        <p:nvPicPr>
+          <p:cNvPr id="18" name="Image 3" descr="/Users/dogan/Documents/Vaults/Courses/wiki/classes/media-studies/decks/_build/img/adolescence-bts.jpg">    </p:cNvPr>
+          <p:cNvPicPr>
+            <a:picLocks noChangeAspect="1"/>
+          </p:cNvPicPr>
+          <p:nvPr/>
+        </p:nvPicPr>
+        <p:blipFill>
+          <a:blip r:embed="rId4"/>
+          <a:stretch>
+            <a:fillRect/>
+          </a:stretch>
+        </p:blipFill>
+        <p:spPr>
+          <a:xfrm>
+            <a:off x="7199678" y="3831336"/>
+            <a:ext cx="3243991" cy="1828800"/>
+          </a:xfrm>
+          <a:prstGeom prst="rect">
+            <a:avLst/>
+          </a:prstGeom>
+        </p:spPr>
+      </p:pic>
+      <p:sp>
+        <p:nvSpPr>
+          <p:cNvPr id="19" name="Text 13"/>
+          <p:cNvSpPr/>
+          <p:nvPr/>
+        </p:nvSpPr>
+        <p:spPr>
+          <a:xfrm>
+            <a:off x="6277356" y="5824728"/>
+            <a:ext cx="2377440" cy="292608"/>
+          </a:xfrm>
+          <a:prstGeom prst="rect">
+            <a:avLst/>
+          </a:prstGeom>
+          <a:noFill/>
+          <a:ln/>
+        </p:spPr>
+        <p:txBody>
+          <a:bodyPr wrap="square" lIns="0" tIns="0" rIns="0" bIns="0" rtlCol="0" anchor="ctr"/>
+          <a:lstStyle/>
+          <a:p>
+            <a:pPr indent="0" marL="0">
+              <a:buNone/>
+            </a:pPr>
+            <a:r>
+              <a:rPr lang="en-US" sz="1150" b="1" spc="100" kern="0" dirty="0">
+                <a:solidFill>
+                  <a:srgbClr val="4A6B5D"/>
+                </a:solidFill>
+                <a:latin typeface="Arial" pitchFamily="34" charset="0"/>
+                <a:ea typeface="Arial" pitchFamily="34" charset="-122"/>
+                <a:cs typeface="Arial" pitchFamily="34" charset="-120"/>
+              </a:rPr>
+              <a:t>CS6 · Edit</a:t>
+            </a:r>
+            <a:endParaRPr lang="en-US" sz="1150" dirty="0"/>
+          </a:p>
+        </p:txBody>
+      </p:sp>
+      <p:sp>
+        <p:nvSpPr>
+          <p:cNvPr id="20" name="Text 14"/>
+          <p:cNvSpPr/>
+          <p:nvPr/>
+        </p:nvSpPr>
+        <p:spPr>
+          <a:xfrm>
+            <a:off x="8654796" y="5824728"/>
+            <a:ext cx="2711196" cy="292608"/>
+          </a:xfrm>
+          <a:prstGeom prst="rect">
+            <a:avLst/>
+          </a:prstGeom>
+          <a:noFill/>
+          <a:ln/>
+        </p:spPr>
+        <p:txBody>
+          <a:bodyPr wrap="square" lIns="0" tIns="0" rIns="0" bIns="0" rtlCol="0" anchor="ctr"/>
+          <a:lstStyle/>
+          <a:p>
+            <a:pPr indent="0" marL="0">
+              <a:buNone/>
+            </a:pPr>
+            <a:r>
+              <a:rPr lang="en-US" sz="1200" i="1" dirty="0">
+                <a:solidFill>
+                  <a:srgbClr val="7A7F72"/>
+                </a:solidFill>
+                <a:latin typeface="Georgia" pitchFamily="34" charset="0"/>
+                <a:ea typeface="Georgia" pitchFamily="34" charset="-122"/>
+                <a:cs typeface="Georgia" pitchFamily="34" charset="-120"/>
+              </a:rPr>
+              <a:t>a workflow tested, and a kit that works</a:t>
+            </a:r>
+            <a:endParaRPr lang="en-US" sz="1200" dirty="0"/>
+          </a:p>
+        </p:txBody>
+      </p:sp>
+      <p:sp>
+        <p:nvSpPr>
+          <p:cNvPr id="21" name="Shape 15"/>
+          <p:cNvSpPr/>
+          <p:nvPr/>
+        </p:nvSpPr>
+        <p:spPr>
+          <a:xfrm>
+            <a:off x="822960" y="6382512"/>
+            <a:ext cx="10543032" cy="0"/>
+          </a:xfrm>
+          <a:prstGeom prst="line">
+            <a:avLst/>
+          </a:prstGeom>
+          <a:noFill/>
+          <a:ln w="9525">
+            <a:solidFill>
+              <a:srgbClr val="D9D4C4"/>
+            </a:solidFill>
+            <a:prstDash val="solid"/>
+          </a:ln>
+        </p:spPr>
+      </p:sp>
+      <p:sp>
+        <p:nvSpPr>
+          <p:cNvPr id="22" name="Text 16"/>
+          <p:cNvSpPr/>
+          <p:nvPr/>
+        </p:nvSpPr>
+        <p:spPr>
+          <a:xfrm>
+            <a:off x="822960" y="6419088"/>
+            <a:ext cx="7315200" cy="274320"/>
+          </a:xfrm>
+          <a:prstGeom prst="rect">
+            <a:avLst/>
+          </a:prstGeom>
+          <a:noFill/>
+          <a:ln/>
+        </p:spPr>
+        <p:txBody>
+          <a:bodyPr wrap="square" lIns="0" tIns="0" rIns="0" bIns="0" rtlCol="0" anchor="ctr"/>
+          <a:lstStyle/>
+          <a:p>
+            <a:pPr indent="0" marL="0">
+              <a:buNone/>
+            </a:pPr>
+            <a:r>
+              <a:rPr lang="en-US" sz="900" spc="150" kern="0" dirty="0">
+                <a:solidFill>
+                  <a:srgbClr val="7A7F72"/>
+                </a:solidFill>
+                <a:latin typeface="Arial" pitchFamily="34" charset="0"/>
+                <a:ea typeface="Arial" pitchFamily="34" charset="-122"/>
+                <a:cs typeface="Arial" pitchFamily="34" charset="-120"/>
+              </a:rPr>
+              <a:t>MEDIA STUDIES 9607 · SEMESTER I</a:t>
+            </a:r>
+            <a:endParaRPr lang="en-US" sz="900" dirty="0"/>
+          </a:p>
+        </p:txBody>
+      </p:sp>
+      <p:sp>
+        <p:nvSpPr>
+          <p:cNvPr id="23" name="Text 17"/>
+          <p:cNvSpPr/>
+          <p:nvPr/>
+        </p:nvSpPr>
+        <p:spPr>
+          <a:xfrm>
+            <a:off x="10268712" y="6355080"/>
+            <a:ext cx="1097280" cy="365760"/>
+          </a:xfrm>
+          <a:prstGeom prst="rect">
+            <a:avLst/>
+          </a:prstGeom>
+          <a:noFill/>
+          <a:ln/>
+        </p:spPr>
+        <p:txBody>
+          <a:bodyPr wrap="square" lIns="0" tIns="0" rIns="0" bIns="0" rtlCol="0" anchor="ctr"/>
+          <a:lstStyle/>
+          <a:p>
+            <a:pPr algn="r" indent="0" marL="0">
+              <a:buNone/>
+            </a:pPr>
+            <a:r>
+              <a:rPr lang="en-US" sz="1600" dirty="0">
+                <a:solidFill>
+                  <a:srgbClr val="A3C1AD"/>
+                </a:solidFill>
+                <a:latin typeface="Georgia" pitchFamily="34" charset="0"/>
+                <a:ea typeface="Georgia" pitchFamily="34" charset="-122"/>
+                <a:cs typeface="Georgia" pitchFamily="34" charset="-120"/>
+              </a:rPr>
+              <a:t>02</a:t>
+            </a:r>
+            <a:endParaRPr lang="en-US" sz="1600" dirty="0"/>
           </a:p>
         </p:txBody>
       </p:sp>
@@ -6725,7 +6979,7 @@
                 <a:ea typeface="Arial" pitchFamily="34" charset="-122"/>
                 <a:cs typeface="Arial" pitchFamily="34" charset="-120"/>
               </a:rPr>
-              <a:t>DELIVERABLE · CS7</a:t>
+              <a:t>THE MODELLED READ</a:t>
             </a:r>
             <a:endParaRPr lang="en-US" sz="1100" dirty="0"/>
           </a:p>
@@ -6764,7 +7018,7 @@
                 <a:ea typeface="Arial" pitchFamily="34" charset="-122"/>
                 <a:cs typeface="Arial" pitchFamily="34" charset="-120"/>
               </a:rPr>
-              <a:t>TUESDAY, FIFTEEN MINUTES</a:t>
+              <a:t>ONE FRAME THE ROOM ALREADY KNOWS</a:t>
             </a:r>
             <a:endParaRPr lang="en-US" sz="1100" dirty="0"/>
           </a:p>
@@ -6801,24 +7055,24 @@
         </p:nvSpPr>
         <p:spPr>
           <a:xfrm>
-            <a:off x="822960" y="1143000"/>
-            <a:ext cx="10543032" cy="822960"/>
-          </a:xfrm>
-          <a:prstGeom prst="rect">
-            <a:avLst/>
-          </a:prstGeom>
-          <a:noFill/>
-          <a:ln/>
-        </p:spPr>
-        <p:txBody>
-          <a:bodyPr wrap="square" lIns="0" tIns="0" rIns="0" bIns="0" rtlCol="0" anchor="ctr"/>
-          <a:lstStyle/>
-          <a:p>
-            <a:pPr indent="0" marL="0">
-              <a:buNone/>
-            </a:pPr>
-            <a:r>
-              <a:rPr lang="en-US" sz="3400" dirty="0">
+            <a:off x="822960" y="932688"/>
+            <a:ext cx="10543032" cy="594360"/>
+          </a:xfrm>
+          <a:prstGeom prst="rect">
+            <a:avLst/>
+          </a:prstGeom>
+          <a:noFill/>
+          <a:ln/>
+        </p:spPr>
+        <p:txBody>
+          <a:bodyPr wrap="square" lIns="0" tIns="0" rIns="0" bIns="0" rtlCol="0" anchor="ctr"/>
+          <a:lstStyle/>
+          <a:p>
+            <a:pPr indent="0" marL="0">
+              <a:buNone/>
+            </a:pPr>
+            <a:r>
+              <a:rPr lang="en-US" sz="3000" dirty="0">
                 <a:solidFill>
                   <a:srgbClr val="24313F"/>
                 </a:solidFill>
@@ -6826,9 +7080,9 @@
                 <a:ea typeface="Georgia" pitchFamily="34" charset="-122"/>
                 <a:cs typeface="Georgia" pitchFamily="34" charset="-120"/>
               </a:rPr>
-              <a:t>One paragraph, at least three elements</a:t>
-            </a:r>
-            <a:endParaRPr lang="en-US" sz="3400" dirty="0"/>
+              <a:t>Everything at once, in order</a:t>
+            </a:r>
+            <a:endParaRPr lang="en-US" sz="3000" dirty="0"/>
           </a:p>
         </p:txBody>
       </p:sp>
@@ -6840,446 +7094,15 @@
         </p:nvSpPr>
         <p:spPr>
           <a:xfrm>
-            <a:off x="822960" y="2240280"/>
-            <a:ext cx="914400" cy="0"/>
-          </a:xfrm>
-          <a:prstGeom prst="line">
-            <a:avLst/>
-          </a:prstGeom>
-          <a:noFill/>
-          <a:ln w="31750">
-            <a:solidFill>
-              <a:srgbClr val="8C3A38"/>
-            </a:solidFill>
-            <a:prstDash val="solid"/>
-          </a:ln>
-        </p:spPr>
-      </p:sp>
-      <p:sp>
-        <p:nvSpPr>
-          <p:cNvPr id="7" name="Text 5"/>
-          <p:cNvSpPr/>
-          <p:nvPr/>
-        </p:nvSpPr>
-        <p:spPr>
-          <a:xfrm>
-            <a:off x="822960" y="2514600"/>
-            <a:ext cx="822960" cy="548640"/>
-          </a:xfrm>
-          <a:prstGeom prst="rect">
-            <a:avLst/>
-          </a:prstGeom>
-          <a:noFill/>
-          <a:ln/>
-        </p:spPr>
-        <p:txBody>
-          <a:bodyPr wrap="square" lIns="0" tIns="0" rIns="0" bIns="0" rtlCol="0" anchor="ctr"/>
-          <a:lstStyle/>
-          <a:p>
-            <a:pPr indent="0" marL="0">
-              <a:buNone/>
-            </a:pPr>
-            <a:r>
-              <a:rPr lang="en-US" sz="2600" dirty="0">
-                <a:solidFill>
-                  <a:srgbClr val="A3C1AD"/>
-                </a:solidFill>
-                <a:latin typeface="Georgia" pitchFamily="34" charset="0"/>
-                <a:ea typeface="Georgia" pitchFamily="34" charset="-122"/>
-                <a:cs typeface="Georgia" pitchFamily="34" charset="-120"/>
-              </a:rPr>
-              <a:t>01</a:t>
-            </a:r>
-            <a:endParaRPr lang="en-US" sz="2600" dirty="0"/>
-          </a:p>
-        </p:txBody>
-      </p:sp>
-      <p:sp>
-        <p:nvSpPr>
-          <p:cNvPr id="8" name="Text 6"/>
-          <p:cNvSpPr/>
-          <p:nvPr/>
-        </p:nvSpPr>
-        <p:spPr>
-          <a:xfrm>
-            <a:off x="1828800" y="2514600"/>
-            <a:ext cx="3291840" cy="548640"/>
-          </a:xfrm>
-          <a:prstGeom prst="rect">
-            <a:avLst/>
-          </a:prstGeom>
-          <a:noFill/>
-          <a:ln/>
-        </p:spPr>
-        <p:txBody>
-          <a:bodyPr wrap="square" lIns="0" tIns="0" rIns="0" bIns="0" rtlCol="0" anchor="ctr"/>
-          <a:lstStyle/>
-          <a:p>
-            <a:pPr indent="0" marL="0">
-              <a:buNone/>
-            </a:pPr>
-            <a:r>
-              <a:rPr lang="en-US" sz="2100" dirty="0">
-                <a:solidFill>
-                  <a:srgbClr val="4A6B5D"/>
-                </a:solidFill>
-                <a:latin typeface="Georgia" pitchFamily="34" charset="0"/>
-                <a:ea typeface="Georgia" pitchFamily="34" charset="-122"/>
-                <a:cs typeface="Georgia" pitchFamily="34" charset="-120"/>
-              </a:rPr>
-              <a:t>Technique named</a:t>
-            </a:r>
-            <a:endParaRPr lang="en-US" sz="2100" dirty="0"/>
-          </a:p>
-        </p:txBody>
-      </p:sp>
-      <p:sp>
-        <p:nvSpPr>
-          <p:cNvPr id="9" name="Text 7"/>
-          <p:cNvSpPr/>
-          <p:nvPr/>
-        </p:nvSpPr>
-        <p:spPr>
-          <a:xfrm>
-            <a:off x="5303520" y="2514600"/>
-            <a:ext cx="6675120" cy="548640"/>
-          </a:xfrm>
-          <a:prstGeom prst="rect">
-            <a:avLst/>
-          </a:prstGeom>
-          <a:noFill/>
-          <a:ln/>
-        </p:spPr>
-        <p:txBody>
-          <a:bodyPr wrap="square" lIns="0" tIns="0" rIns="0" bIns="0" rtlCol="0" anchor="ctr"/>
-          <a:lstStyle/>
-          <a:p>
-            <a:pPr indent="0" marL="0">
-              <a:buNone/>
-            </a:pPr>
-            <a:r>
-              <a:rPr lang="en-US" sz="1600" dirty="0">
-                <a:solidFill>
-                  <a:srgbClr val="24313F"/>
-                </a:solidFill>
-                <a:latin typeface="Georgia" pitchFamily="34" charset="0"/>
-                <a:ea typeface="Georgia" pitchFamily="34" charset="-122"/>
-                <a:cs typeface="Georgia" pitchFamily="34" charset="-120"/>
-              </a:rPr>
-              <a:t>in the syllabus's own term, not a description of it</a:t>
-            </a:r>
-            <a:endParaRPr lang="en-US" sz="1600" dirty="0"/>
-          </a:p>
-        </p:txBody>
-      </p:sp>
-      <p:sp>
-        <p:nvSpPr>
-          <p:cNvPr id="10" name="Text 8"/>
-          <p:cNvSpPr/>
-          <p:nvPr/>
-        </p:nvSpPr>
-        <p:spPr>
-          <a:xfrm>
-            <a:off x="822960" y="3429000"/>
-            <a:ext cx="822960" cy="548640"/>
-          </a:xfrm>
-          <a:prstGeom prst="rect">
-            <a:avLst/>
-          </a:prstGeom>
-          <a:noFill/>
-          <a:ln/>
-        </p:spPr>
-        <p:txBody>
-          <a:bodyPr wrap="square" lIns="0" tIns="0" rIns="0" bIns="0" rtlCol="0" anchor="ctr"/>
-          <a:lstStyle/>
-          <a:p>
-            <a:pPr indent="0" marL="0">
-              <a:buNone/>
-            </a:pPr>
-            <a:r>
-              <a:rPr lang="en-US" sz="2600" dirty="0">
-                <a:solidFill>
-                  <a:srgbClr val="A3C1AD"/>
-                </a:solidFill>
-                <a:latin typeface="Georgia" pitchFamily="34" charset="0"/>
-                <a:ea typeface="Georgia" pitchFamily="34" charset="-122"/>
-                <a:cs typeface="Georgia" pitchFamily="34" charset="-120"/>
-              </a:rPr>
-              <a:t>02</a:t>
-            </a:r>
-            <a:endParaRPr lang="en-US" sz="2600" dirty="0"/>
-          </a:p>
-        </p:txBody>
-      </p:sp>
-      <p:sp>
-        <p:nvSpPr>
-          <p:cNvPr id="11" name="Text 9"/>
-          <p:cNvSpPr/>
-          <p:nvPr/>
-        </p:nvSpPr>
-        <p:spPr>
-          <a:xfrm>
-            <a:off x="1828800" y="3429000"/>
-            <a:ext cx="3291840" cy="548640"/>
-          </a:xfrm>
-          <a:prstGeom prst="rect">
-            <a:avLst/>
-          </a:prstGeom>
-          <a:noFill/>
-          <a:ln/>
-        </p:spPr>
-        <p:txBody>
-          <a:bodyPr wrap="square" lIns="0" tIns="0" rIns="0" bIns="0" rtlCol="0" anchor="ctr"/>
-          <a:lstStyle/>
-          <a:p>
-            <a:pPr indent="0" marL="0">
-              <a:buNone/>
-            </a:pPr>
-            <a:r>
-              <a:rPr lang="en-US" sz="2100" dirty="0">
-                <a:solidFill>
-                  <a:srgbClr val="4A6B5D"/>
-                </a:solidFill>
-                <a:latin typeface="Georgia" pitchFamily="34" charset="0"/>
-                <a:ea typeface="Georgia" pitchFamily="34" charset="-122"/>
-                <a:cs typeface="Georgia" pitchFamily="34" charset="-120"/>
-              </a:rPr>
-              <a:t>Meaning created</a:t>
-            </a:r>
-            <a:endParaRPr lang="en-US" sz="2100" dirty="0"/>
-          </a:p>
-        </p:txBody>
-      </p:sp>
-      <p:sp>
-        <p:nvSpPr>
-          <p:cNvPr id="12" name="Text 10"/>
-          <p:cNvSpPr/>
-          <p:nvPr/>
-        </p:nvSpPr>
-        <p:spPr>
-          <a:xfrm>
-            <a:off x="5303520" y="3429000"/>
-            <a:ext cx="6675120" cy="548640"/>
-          </a:xfrm>
-          <a:prstGeom prst="rect">
-            <a:avLst/>
-          </a:prstGeom>
-          <a:noFill/>
-          <a:ln/>
-        </p:spPr>
-        <p:txBody>
-          <a:bodyPr wrap="square" lIns="0" tIns="0" rIns="0" bIns="0" rtlCol="0" anchor="ctr"/>
-          <a:lstStyle/>
-          <a:p>
-            <a:pPr indent="0" marL="0">
-              <a:buNone/>
-            </a:pPr>
-            <a:r>
-              <a:rPr lang="en-US" sz="1600" dirty="0">
-                <a:solidFill>
-                  <a:srgbClr val="24313F"/>
-                </a:solidFill>
-                <a:latin typeface="Georgia" pitchFamily="34" charset="0"/>
-                <a:ea typeface="Georgia" pitchFamily="34" charset="-122"/>
-                <a:cs typeface="Georgia" pitchFamily="34" charset="-120"/>
-              </a:rPr>
-              <a:t>what the choice does to the viewer, stated as an effect</a:t>
-            </a:r>
-            <a:endParaRPr lang="en-US" sz="1600" dirty="0"/>
-          </a:p>
-        </p:txBody>
-      </p:sp>
-      <p:sp>
-        <p:nvSpPr>
-          <p:cNvPr id="13" name="Text 11"/>
-          <p:cNvSpPr/>
-          <p:nvPr/>
-        </p:nvSpPr>
-        <p:spPr>
-          <a:xfrm>
-            <a:off x="822960" y="4343400"/>
-            <a:ext cx="822960" cy="548640"/>
-          </a:xfrm>
-          <a:prstGeom prst="rect">
-            <a:avLst/>
-          </a:prstGeom>
-          <a:noFill/>
-          <a:ln/>
-        </p:spPr>
-        <p:txBody>
-          <a:bodyPr wrap="square" lIns="0" tIns="0" rIns="0" bIns="0" rtlCol="0" anchor="ctr"/>
-          <a:lstStyle/>
-          <a:p>
-            <a:pPr indent="0" marL="0">
-              <a:buNone/>
-            </a:pPr>
-            <a:r>
-              <a:rPr lang="en-US" sz="2600" dirty="0">
-                <a:solidFill>
-                  <a:srgbClr val="A3C1AD"/>
-                </a:solidFill>
-                <a:latin typeface="Georgia" pitchFamily="34" charset="0"/>
-                <a:ea typeface="Georgia" pitchFamily="34" charset="-122"/>
-                <a:cs typeface="Georgia" pitchFamily="34" charset="-120"/>
-              </a:rPr>
-              <a:t>03</a:t>
-            </a:r>
-            <a:endParaRPr lang="en-US" sz="2600" dirty="0"/>
-          </a:p>
-        </p:txBody>
-      </p:sp>
-      <p:sp>
-        <p:nvSpPr>
-          <p:cNvPr id="14" name="Text 12"/>
-          <p:cNvSpPr/>
-          <p:nvPr/>
-        </p:nvSpPr>
-        <p:spPr>
-          <a:xfrm>
-            <a:off x="1828800" y="4343400"/>
-            <a:ext cx="3291840" cy="548640"/>
-          </a:xfrm>
-          <a:prstGeom prst="rect">
-            <a:avLst/>
-          </a:prstGeom>
-          <a:noFill/>
-          <a:ln/>
-        </p:spPr>
-        <p:txBody>
-          <a:bodyPr wrap="square" lIns="0" tIns="0" rIns="0" bIns="0" rtlCol="0" anchor="ctr"/>
-          <a:lstStyle/>
-          <a:p>
-            <a:pPr indent="0" marL="0">
-              <a:buNone/>
-            </a:pPr>
-            <a:r>
-              <a:rPr lang="en-US" sz="2100" dirty="0">
-                <a:solidFill>
-                  <a:srgbClr val="4A6B5D"/>
-                </a:solidFill>
-                <a:latin typeface="Georgia" pitchFamily="34" charset="0"/>
-                <a:ea typeface="Georgia" pitchFamily="34" charset="-122"/>
-                <a:cs typeface="Georgia" pitchFamily="34" charset="-120"/>
-              </a:rPr>
-              <a:t>Representation</a:t>
-            </a:r>
-            <a:endParaRPr lang="en-US" sz="2100" dirty="0"/>
-          </a:p>
-        </p:txBody>
-      </p:sp>
-      <p:sp>
-        <p:nvSpPr>
-          <p:cNvPr id="15" name="Text 13"/>
-          <p:cNvSpPr/>
-          <p:nvPr/>
-        </p:nvSpPr>
-        <p:spPr>
-          <a:xfrm>
-            <a:off x="5303520" y="4343400"/>
-            <a:ext cx="6675120" cy="548640"/>
-          </a:xfrm>
-          <a:prstGeom prst="rect">
-            <a:avLst/>
-          </a:prstGeom>
-          <a:noFill/>
-          <a:ln/>
-        </p:spPr>
-        <p:txBody>
-          <a:bodyPr wrap="square" lIns="0" tIns="0" rIns="0" bIns="0" rtlCol="0" anchor="ctr"/>
-          <a:lstStyle/>
-          <a:p>
-            <a:pPr indent="0" marL="0">
-              <a:buNone/>
-            </a:pPr>
-            <a:r>
-              <a:rPr lang="en-US" sz="1600" dirty="0">
-                <a:solidFill>
-                  <a:srgbClr val="24313F"/>
-                </a:solidFill>
-                <a:latin typeface="Georgia" pitchFamily="34" charset="0"/>
-                <a:ea typeface="Georgia" pitchFamily="34" charset="-122"/>
-                <a:cs typeface="Georgia" pitchFamily="34" charset="-120"/>
-              </a:rPr>
-              <a:t>what it therefore says about the person, place or event</a:t>
-            </a:r>
-            <a:endParaRPr lang="en-US" sz="1600" dirty="0"/>
-          </a:p>
-        </p:txBody>
-      </p:sp>
-      <p:sp>
-        <p:nvSpPr>
-          <p:cNvPr id="16" name="Text 14"/>
-          <p:cNvSpPr/>
-          <p:nvPr/>
-        </p:nvSpPr>
-        <p:spPr>
-          <a:xfrm>
-            <a:off x="822960" y="5486400"/>
-            <a:ext cx="10424160" cy="320040"/>
-          </a:xfrm>
-          <a:prstGeom prst="rect">
-            <a:avLst/>
-          </a:prstGeom>
-          <a:noFill/>
-          <a:ln/>
-        </p:spPr>
-        <p:txBody>
-          <a:bodyPr wrap="square" lIns="0" tIns="0" rIns="0" bIns="0" rtlCol="0" anchor="t"/>
-          <a:lstStyle/>
-          <a:p>
-            <a:pPr indent="0" marL="0">
-              <a:lnSpc>
-                <a:spcPts val="1700"/>
-              </a:lnSpc>
-              <a:buNone/>
-            </a:pPr>
-            <a:r>
-              <a:rPr lang="en-US" sz="1050" b="1" spc="100" kern="0" dirty="0">
-                <a:solidFill>
-                  <a:srgbClr val="7A7F72"/>
-                </a:solidFill>
-                <a:latin typeface="Arial" pitchFamily="34" charset="0"/>
-                <a:ea typeface="Arial" pitchFamily="34" charset="-122"/>
-                <a:cs typeface="Arial" pitchFamily="34" charset="-120"/>
-              </a:rPr>
-              <a:t>MARKED   </a:t>
-            </a:r>
-            <a:pPr indent="0" marL="0">
-              <a:lnSpc>
-                <a:spcPts val="1700"/>
-              </a:lnSpc>
-              <a:buNone/>
-            </a:pPr>
-            <a:r>
-              <a:rPr lang="en-US" sz="1250" dirty="0">
-                <a:solidFill>
-                  <a:srgbClr val="7A7F72"/>
-                </a:solidFill>
-                <a:latin typeface="Georgia" pitchFamily="34" charset="0"/>
-                <a:ea typeface="Georgia" pitchFamily="34" charset="-122"/>
-                <a:cs typeface="Georgia" pitchFamily="34" charset="-120"/>
-              </a:rPr>
-              <a:t>Written in exam style and collected. Marked in the official Paper 2 language, so the feedback transfers straight to A1.</a:t>
-            </a:r>
-            <a:endParaRPr lang="en-US" sz="1050" dirty="0"/>
-          </a:p>
-        </p:txBody>
-      </p:sp>
-      <p:sp>
-        <p:nvSpPr>
-          <p:cNvPr id="17" name="Shape 15"/>
-          <p:cNvSpPr/>
-          <p:nvPr/>
-        </p:nvSpPr>
-        <p:spPr>
-          <a:xfrm>
-            <a:off x="822960" y="6382512"/>
-            <a:ext cx="10543032" cy="0"/>
-          </a:xfrm>
-          <a:prstGeom prst="line">
-            <a:avLst/>
-          </a:prstGeom>
-          <a:noFill/>
+            <a:off x="822960" y="1645920"/>
+            <a:ext cx="6035040" cy="4160520"/>
+          </a:xfrm>
+          <a:prstGeom prst="rect">
+            <a:avLst/>
+          </a:prstGeom>
+          <a:solidFill>
+            <a:srgbClr val="FAF8F1"/>
+          </a:solidFill>
           <a:ln w="9525">
             <a:solidFill>
               <a:srgbClr val="D9D4C4"/>
@@ -7288,32 +7111,56 @@
           </a:ln>
         </p:spPr>
       </p:sp>
-      <p:sp>
-        <p:nvSpPr>
-          <p:cNvPr id="18" name="Text 16"/>
-          <p:cNvSpPr/>
-          <p:nvPr/>
-        </p:nvSpPr>
-        <p:spPr>
-          <a:xfrm>
-            <a:off x="822960" y="6419088"/>
-            <a:ext cx="7315200" cy="274320"/>
-          </a:xfrm>
-          <a:prstGeom prst="rect">
-            <a:avLst/>
-          </a:prstGeom>
-          <a:noFill/>
-          <a:ln/>
-        </p:spPr>
-        <p:txBody>
-          <a:bodyPr wrap="square" lIns="0" tIns="0" rIns="0" bIns="0" rtlCol="0" anchor="ctr"/>
-          <a:lstStyle/>
-          <a:p>
-            <a:pPr indent="0" marL="0">
-              <a:buNone/>
-            </a:pPr>
-            <a:r>
-              <a:rPr lang="en-US" sz="900" spc="150" kern="0" dirty="0">
+      <p:pic>
+        <p:nvPicPr>
+          <p:cNvPr id="7" name="Image 0" descr="/Users/dogan/Documents/Vaults/Courses/wiki/classes/media-studies/decks/_build/img/goodfellas-copa-2.jpg">    </p:cNvPr>
+          <p:cNvPicPr>
+            <a:picLocks noChangeAspect="1"/>
+          </p:cNvPicPr>
+          <p:nvPr/>
+        </p:nvPicPr>
+        <p:blipFill>
+          <a:blip r:embed="rId1"/>
+          <a:stretch>
+            <a:fillRect/>
+          </a:stretch>
+        </p:blipFill>
+        <p:spPr>
+          <a:xfrm>
+            <a:off x="950976" y="2104446"/>
+            <a:ext cx="5779008" cy="3243468"/>
+          </a:xfrm>
+          <a:prstGeom prst="rect">
+            <a:avLst/>
+          </a:prstGeom>
+        </p:spPr>
+      </p:pic>
+      <p:sp>
+        <p:nvSpPr>
+          <p:cNvPr id="8" name="Text 5"/>
+          <p:cNvSpPr/>
+          <p:nvPr/>
+        </p:nvSpPr>
+        <p:spPr>
+          <a:xfrm>
+            <a:off x="822960" y="5852160"/>
+            <a:ext cx="6035040" cy="320040"/>
+          </a:xfrm>
+          <a:prstGeom prst="rect">
+            <a:avLst/>
+          </a:prstGeom>
+          <a:noFill/>
+          <a:ln/>
+        </p:spPr>
+        <p:txBody>
+          <a:bodyPr wrap="square" lIns="0" tIns="0" rIns="0" bIns="0" rtlCol="0" anchor="ctr"/>
+          <a:lstStyle/>
+          <a:p>
+            <a:pPr algn="ctr" indent="0" marL="0">
+              <a:buNone/>
+            </a:pPr>
+            <a:r>
+              <a:rPr lang="en-US" sz="1050" dirty="0">
                 <a:solidFill>
                   <a:srgbClr val="7A7F72"/>
                 </a:solidFill>
@@ -7321,6 +7168,554 @@
                 <a:ea typeface="Arial" pitchFamily="34" charset="-122"/>
                 <a:cs typeface="Arial" pitchFamily="34" charset="-120"/>
               </a:rPr>
+              <a:t>Goodfellas (1990), dir. Martin Scorsese. The Copacabana take, mid-corridor.</a:t>
+            </a:r>
+            <a:endParaRPr lang="en-US" sz="1050" dirty="0"/>
+          </a:p>
+        </p:txBody>
+      </p:sp>
+      <p:sp>
+        <p:nvSpPr>
+          <p:cNvPr id="9" name="Text 6"/>
+          <p:cNvSpPr/>
+          <p:nvPr/>
+        </p:nvSpPr>
+        <p:spPr>
+          <a:xfrm>
+            <a:off x="6903720" y="1645920"/>
+            <a:ext cx="1691640" cy="658368"/>
+          </a:xfrm>
+          <a:prstGeom prst="rect">
+            <a:avLst/>
+          </a:prstGeom>
+          <a:noFill/>
+          <a:ln/>
+        </p:spPr>
+        <p:txBody>
+          <a:bodyPr wrap="square" lIns="0" tIns="0" rIns="0" bIns="0" rtlCol="0" anchor="t"/>
+          <a:lstStyle/>
+          <a:p>
+            <a:pPr indent="0" marL="0">
+              <a:buNone/>
+            </a:pPr>
+            <a:r>
+              <a:rPr lang="en-US" sz="1150" b="1" spc="50" kern="0" dirty="0">
+                <a:solidFill>
+                  <a:srgbClr val="4A6B5D"/>
+                </a:solidFill>
+                <a:latin typeface="Arial" pitchFamily="34" charset="0"/>
+                <a:ea typeface="Arial" pitchFamily="34" charset="-122"/>
+                <a:cs typeface="Arial" pitchFamily="34" charset="-120"/>
+              </a:rPr>
+              <a:t>1 · Framing</a:t>
+            </a:r>
+            <a:endParaRPr lang="en-US" sz="1150" dirty="0"/>
+          </a:p>
+        </p:txBody>
+      </p:sp>
+      <p:sp>
+        <p:nvSpPr>
+          <p:cNvPr id="10" name="Text 7"/>
+          <p:cNvSpPr/>
+          <p:nvPr/>
+        </p:nvSpPr>
+        <p:spPr>
+          <a:xfrm>
+            <a:off x="8641080" y="1645920"/>
+            <a:ext cx="2743200" cy="658368"/>
+          </a:xfrm>
+          <a:prstGeom prst="rect">
+            <a:avLst/>
+          </a:prstGeom>
+          <a:noFill/>
+          <a:ln/>
+        </p:spPr>
+        <p:txBody>
+          <a:bodyPr wrap="square" lIns="0" tIns="0" rIns="0" bIns="0" rtlCol="0" anchor="t"/>
+          <a:lstStyle/>
+          <a:p>
+            <a:pPr indent="0" marL="0">
+              <a:lnSpc>
+                <a:spcPts val="1500"/>
+              </a:lnSpc>
+              <a:buNone/>
+            </a:pPr>
+            <a:r>
+              <a:rPr lang="en-US" sz="1250" dirty="0">
+                <a:solidFill>
+                  <a:srgbClr val="24313F"/>
+                </a:solidFill>
+                <a:latin typeface="Georgia" pitchFamily="34" charset="0"/>
+                <a:ea typeface="Georgia" pitchFamily="34" charset="-122"/>
+                <a:cs typeface="Georgia" pitchFamily="34" charset="-120"/>
+              </a:rPr>
+              <a:t>A narrow service corridor. The club floor is kept out of frame.</a:t>
+            </a:r>
+            <a:endParaRPr lang="en-US" sz="1250" dirty="0"/>
+          </a:p>
+        </p:txBody>
+      </p:sp>
+      <p:sp>
+        <p:nvSpPr>
+          <p:cNvPr id="11" name="Text 8"/>
+          <p:cNvSpPr/>
+          <p:nvPr/>
+        </p:nvSpPr>
+        <p:spPr>
+          <a:xfrm>
+            <a:off x="6903720" y="2359152"/>
+            <a:ext cx="1691640" cy="658368"/>
+          </a:xfrm>
+          <a:prstGeom prst="rect">
+            <a:avLst/>
+          </a:prstGeom>
+          <a:noFill/>
+          <a:ln/>
+        </p:spPr>
+        <p:txBody>
+          <a:bodyPr wrap="square" lIns="0" tIns="0" rIns="0" bIns="0" rtlCol="0" anchor="t"/>
+          <a:lstStyle/>
+          <a:p>
+            <a:pPr indent="0" marL="0">
+              <a:buNone/>
+            </a:pPr>
+            <a:r>
+              <a:rPr lang="en-US" sz="1150" b="1" spc="50" kern="0" dirty="0">
+                <a:solidFill>
+                  <a:srgbClr val="4A6B5D"/>
+                </a:solidFill>
+                <a:latin typeface="Arial" pitchFamily="34" charset="0"/>
+                <a:ea typeface="Arial" pitchFamily="34" charset="-122"/>
+                <a:cs typeface="Arial" pitchFamily="34" charset="-120"/>
+              </a:rPr>
+              <a:t>2 · Camera</a:t>
+            </a:r>
+            <a:endParaRPr lang="en-US" sz="1150" dirty="0"/>
+          </a:p>
+        </p:txBody>
+      </p:sp>
+      <p:sp>
+        <p:nvSpPr>
+          <p:cNvPr id="12" name="Text 9"/>
+          <p:cNvSpPr/>
+          <p:nvPr/>
+        </p:nvSpPr>
+        <p:spPr>
+          <a:xfrm>
+            <a:off x="8641080" y="2359152"/>
+            <a:ext cx="2743200" cy="658368"/>
+          </a:xfrm>
+          <a:prstGeom prst="rect">
+            <a:avLst/>
+          </a:prstGeom>
+          <a:noFill/>
+          <a:ln/>
+        </p:spPr>
+        <p:txBody>
+          <a:bodyPr wrap="square" lIns="0" tIns="0" rIns="0" bIns="0" rtlCol="0" anchor="t"/>
+          <a:lstStyle/>
+          <a:p>
+            <a:pPr indent="0" marL="0">
+              <a:lnSpc>
+                <a:spcPts val="1500"/>
+              </a:lnSpc>
+              <a:buNone/>
+            </a:pPr>
+            <a:r>
+              <a:rPr lang="en-US" sz="1250" dirty="0">
+                <a:solidFill>
+                  <a:srgbClr val="24313F"/>
+                </a:solidFill>
+                <a:latin typeface="Georgia" pitchFamily="34" charset="0"/>
+                <a:ea typeface="Georgia" pitchFamily="34" charset="-122"/>
+                <a:cs typeface="Georgia" pitchFamily="34" charset="-120"/>
+              </a:rPr>
+              <a:t>Steadicam, eye level, gliding forward without a cut.</a:t>
+            </a:r>
+            <a:endParaRPr lang="en-US" sz="1250" dirty="0"/>
+          </a:p>
+        </p:txBody>
+      </p:sp>
+      <p:sp>
+        <p:nvSpPr>
+          <p:cNvPr id="13" name="Text 10"/>
+          <p:cNvSpPr/>
+          <p:nvPr/>
+        </p:nvSpPr>
+        <p:spPr>
+          <a:xfrm>
+            <a:off x="6903720" y="3072384"/>
+            <a:ext cx="1691640" cy="658368"/>
+          </a:xfrm>
+          <a:prstGeom prst="rect">
+            <a:avLst/>
+          </a:prstGeom>
+          <a:noFill/>
+          <a:ln/>
+        </p:spPr>
+        <p:txBody>
+          <a:bodyPr wrap="square" lIns="0" tIns="0" rIns="0" bIns="0" rtlCol="0" anchor="t"/>
+          <a:lstStyle/>
+          <a:p>
+            <a:pPr indent="0" marL="0">
+              <a:buNone/>
+            </a:pPr>
+            <a:r>
+              <a:rPr lang="en-US" sz="1150" b="1" spc="50" kern="0" dirty="0">
+                <a:solidFill>
+                  <a:srgbClr val="4A6B5D"/>
+                </a:solidFill>
+                <a:latin typeface="Arial" pitchFamily="34" charset="0"/>
+                <a:ea typeface="Arial" pitchFamily="34" charset="-122"/>
+                <a:cs typeface="Arial" pitchFamily="34" charset="-120"/>
+              </a:rPr>
+              <a:t>3 · Light</a:t>
+            </a:r>
+            <a:endParaRPr lang="en-US" sz="1150" dirty="0"/>
+          </a:p>
+        </p:txBody>
+      </p:sp>
+      <p:sp>
+        <p:nvSpPr>
+          <p:cNvPr id="14" name="Text 11"/>
+          <p:cNvSpPr/>
+          <p:nvPr/>
+        </p:nvSpPr>
+        <p:spPr>
+          <a:xfrm>
+            <a:off x="8641080" y="3072384"/>
+            <a:ext cx="2743200" cy="658368"/>
+          </a:xfrm>
+          <a:prstGeom prst="rect">
+            <a:avLst/>
+          </a:prstGeom>
+          <a:noFill/>
+          <a:ln/>
+        </p:spPr>
+        <p:txBody>
+          <a:bodyPr wrap="square" lIns="0" tIns="0" rIns="0" bIns="0" rtlCol="0" anchor="t"/>
+          <a:lstStyle/>
+          <a:p>
+            <a:pPr indent="0" marL="0">
+              <a:lnSpc>
+                <a:spcPts val="1500"/>
+              </a:lnSpc>
+              <a:buNone/>
+            </a:pPr>
+            <a:r>
+              <a:rPr lang="en-US" sz="1250" dirty="0">
+                <a:solidFill>
+                  <a:srgbClr val="24313F"/>
+                </a:solidFill>
+                <a:latin typeface="Georgia" pitchFamily="34" charset="0"/>
+                <a:ea typeface="Georgia" pitchFamily="34" charset="-122"/>
+                <a:cs typeface="Georgia" pitchFamily="34" charset="-120"/>
+              </a:rPr>
+              <a:t>Bare bulbs, warm and uneven: a working space, not a showroom.</a:t>
+            </a:r>
+            <a:endParaRPr lang="en-US" sz="1250" dirty="0"/>
+          </a:p>
+        </p:txBody>
+      </p:sp>
+      <p:sp>
+        <p:nvSpPr>
+          <p:cNvPr id="15" name="Text 12"/>
+          <p:cNvSpPr/>
+          <p:nvPr/>
+        </p:nvSpPr>
+        <p:spPr>
+          <a:xfrm>
+            <a:off x="6903720" y="3785616"/>
+            <a:ext cx="1691640" cy="658368"/>
+          </a:xfrm>
+          <a:prstGeom prst="rect">
+            <a:avLst/>
+          </a:prstGeom>
+          <a:noFill/>
+          <a:ln/>
+        </p:spPr>
+        <p:txBody>
+          <a:bodyPr wrap="square" lIns="0" tIns="0" rIns="0" bIns="0" rtlCol="0" anchor="t"/>
+          <a:lstStyle/>
+          <a:p>
+            <a:pPr indent="0" marL="0">
+              <a:buNone/>
+            </a:pPr>
+            <a:r>
+              <a:rPr lang="en-US" sz="1150" b="1" spc="50" kern="0" dirty="0">
+                <a:solidFill>
+                  <a:srgbClr val="4A6B5D"/>
+                </a:solidFill>
+                <a:latin typeface="Arial" pitchFamily="34" charset="0"/>
+                <a:ea typeface="Arial" pitchFamily="34" charset="-122"/>
+                <a:cs typeface="Arial" pitchFamily="34" charset="-120"/>
+              </a:rPr>
+              <a:t>4 · Mise-en-scène</a:t>
+            </a:r>
+            <a:endParaRPr lang="en-US" sz="1150" dirty="0"/>
+          </a:p>
+        </p:txBody>
+      </p:sp>
+      <p:sp>
+        <p:nvSpPr>
+          <p:cNvPr id="16" name="Text 13"/>
+          <p:cNvSpPr/>
+          <p:nvPr/>
+        </p:nvSpPr>
+        <p:spPr>
+          <a:xfrm>
+            <a:off x="8641080" y="3785616"/>
+            <a:ext cx="2743200" cy="658368"/>
+          </a:xfrm>
+          <a:prstGeom prst="rect">
+            <a:avLst/>
+          </a:prstGeom>
+          <a:noFill/>
+          <a:ln/>
+        </p:spPr>
+        <p:txBody>
+          <a:bodyPr wrap="square" lIns="0" tIns="0" rIns="0" bIns="0" rtlCol="0" anchor="t"/>
+          <a:lstStyle/>
+          <a:p>
+            <a:pPr indent="0" marL="0">
+              <a:lnSpc>
+                <a:spcPts val="1500"/>
+              </a:lnSpc>
+              <a:buNone/>
+            </a:pPr>
+            <a:r>
+              <a:rPr lang="en-US" sz="1250" dirty="0">
+                <a:solidFill>
+                  <a:srgbClr val="24313F"/>
+                </a:solidFill>
+                <a:latin typeface="Georgia" pitchFamily="34" charset="0"/>
+                <a:ea typeface="Georgia" pitchFamily="34" charset="-122"/>
+                <a:cs typeface="Georgia" pitchFamily="34" charset="-120"/>
+              </a:rPr>
+              <a:t>Crates, steel counters, kitchen uniforms: the back route in.</a:t>
+            </a:r>
+            <a:endParaRPr lang="en-US" sz="1250" dirty="0"/>
+          </a:p>
+        </p:txBody>
+      </p:sp>
+      <p:sp>
+        <p:nvSpPr>
+          <p:cNvPr id="17" name="Text 14"/>
+          <p:cNvSpPr/>
+          <p:nvPr/>
+        </p:nvSpPr>
+        <p:spPr>
+          <a:xfrm>
+            <a:off x="6903720" y="4498848"/>
+            <a:ext cx="1691640" cy="658368"/>
+          </a:xfrm>
+          <a:prstGeom prst="rect">
+            <a:avLst/>
+          </a:prstGeom>
+          <a:noFill/>
+          <a:ln/>
+        </p:spPr>
+        <p:txBody>
+          <a:bodyPr wrap="square" lIns="0" tIns="0" rIns="0" bIns="0" rtlCol="0" anchor="t"/>
+          <a:lstStyle/>
+          <a:p>
+            <a:pPr indent="0" marL="0">
+              <a:buNone/>
+            </a:pPr>
+            <a:r>
+              <a:rPr lang="en-US" sz="1150" b="1" spc="50" kern="0" dirty="0">
+                <a:solidFill>
+                  <a:srgbClr val="4A6B5D"/>
+                </a:solidFill>
+                <a:latin typeface="Arial" pitchFamily="34" charset="0"/>
+                <a:ea typeface="Arial" pitchFamily="34" charset="-122"/>
+                <a:cs typeface="Arial" pitchFamily="34" charset="-120"/>
+              </a:rPr>
+              <a:t>5 · Sound</a:t>
+            </a:r>
+            <a:endParaRPr lang="en-US" sz="1150" dirty="0"/>
+          </a:p>
+        </p:txBody>
+      </p:sp>
+      <p:sp>
+        <p:nvSpPr>
+          <p:cNvPr id="18" name="Text 15"/>
+          <p:cNvSpPr/>
+          <p:nvPr/>
+        </p:nvSpPr>
+        <p:spPr>
+          <a:xfrm>
+            <a:off x="8641080" y="4498848"/>
+            <a:ext cx="2743200" cy="658368"/>
+          </a:xfrm>
+          <a:prstGeom prst="rect">
+            <a:avLst/>
+          </a:prstGeom>
+          <a:noFill/>
+          <a:ln/>
+        </p:spPr>
+        <p:txBody>
+          <a:bodyPr wrap="square" lIns="0" tIns="0" rIns="0" bIns="0" rtlCol="0" anchor="t"/>
+          <a:lstStyle/>
+          <a:p>
+            <a:pPr indent="0" marL="0">
+              <a:lnSpc>
+                <a:spcPts val="1500"/>
+              </a:lnSpc>
+              <a:buNone/>
+            </a:pPr>
+            <a:r>
+              <a:rPr lang="en-US" sz="1250" dirty="0">
+                <a:solidFill>
+                  <a:srgbClr val="24313F"/>
+                </a:solidFill>
+                <a:latin typeface="Georgia" pitchFamily="34" charset="0"/>
+                <a:ea typeface="Georgia" pitchFamily="34" charset="-122"/>
+                <a:cs typeface="Georgia" pitchFamily="34" charset="-120"/>
+              </a:rPr>
+              <a:t>The still cannot show it: the song plays over, the kitchen clatters under.</a:t>
+            </a:r>
+            <a:endParaRPr lang="en-US" sz="1250" dirty="0"/>
+          </a:p>
+        </p:txBody>
+      </p:sp>
+      <p:sp>
+        <p:nvSpPr>
+          <p:cNvPr id="19" name="Text 16"/>
+          <p:cNvSpPr/>
+          <p:nvPr/>
+        </p:nvSpPr>
+        <p:spPr>
+          <a:xfrm>
+            <a:off x="6903720" y="5212080"/>
+            <a:ext cx="1691640" cy="658368"/>
+          </a:xfrm>
+          <a:prstGeom prst="rect">
+            <a:avLst/>
+          </a:prstGeom>
+          <a:noFill/>
+          <a:ln/>
+        </p:spPr>
+        <p:txBody>
+          <a:bodyPr wrap="square" lIns="0" tIns="0" rIns="0" bIns="0" rtlCol="0" anchor="t"/>
+          <a:lstStyle/>
+          <a:p>
+            <a:pPr indent="0" marL="0">
+              <a:buNone/>
+            </a:pPr>
+            <a:r>
+              <a:rPr lang="en-US" sz="1150" b="1" spc="50" kern="0" dirty="0">
+                <a:solidFill>
+                  <a:srgbClr val="4A6B5D"/>
+                </a:solidFill>
+                <a:latin typeface="Arial" pitchFamily="34" charset="0"/>
+                <a:ea typeface="Arial" pitchFamily="34" charset="-122"/>
+                <a:cs typeface="Arial" pitchFamily="34" charset="-120"/>
+              </a:rPr>
+              <a:t>6 · Edit</a:t>
+            </a:r>
+            <a:endParaRPr lang="en-US" sz="1150" dirty="0"/>
+          </a:p>
+        </p:txBody>
+      </p:sp>
+      <p:sp>
+        <p:nvSpPr>
+          <p:cNvPr id="20" name="Text 17"/>
+          <p:cNvSpPr/>
+          <p:nvPr/>
+        </p:nvSpPr>
+        <p:spPr>
+          <a:xfrm>
+            <a:off x="8641080" y="5212080"/>
+            <a:ext cx="2743200" cy="658368"/>
+          </a:xfrm>
+          <a:prstGeom prst="rect">
+            <a:avLst/>
+          </a:prstGeom>
+          <a:noFill/>
+          <a:ln/>
+        </p:spPr>
+        <p:txBody>
+          <a:bodyPr wrap="square" lIns="0" tIns="0" rIns="0" bIns="0" rtlCol="0" anchor="t"/>
+          <a:lstStyle/>
+          <a:p>
+            <a:pPr indent="0" marL="0">
+              <a:lnSpc>
+                <a:spcPts val="1500"/>
+              </a:lnSpc>
+              <a:buNone/>
+            </a:pPr>
+            <a:r>
+              <a:rPr lang="en-US" sz="1250" dirty="0">
+                <a:solidFill>
+                  <a:srgbClr val="24313F"/>
+                </a:solidFill>
+                <a:latin typeface="Georgia" pitchFamily="34" charset="0"/>
+                <a:ea typeface="Georgia" pitchFamily="34" charset="-122"/>
+                <a:cs typeface="Georgia" pitchFamily="34" charset="-120"/>
+              </a:rPr>
+              <a:t>No cut for three minutes. The unbroken take means privilege.</a:t>
+            </a:r>
+            <a:endParaRPr lang="en-US" sz="1250" dirty="0"/>
+          </a:p>
+        </p:txBody>
+      </p:sp>
+      <p:sp>
+        <p:nvSpPr>
+          <p:cNvPr id="21" name="Shape 18"/>
+          <p:cNvSpPr/>
+          <p:nvPr/>
+        </p:nvSpPr>
+        <p:spPr>
+          <a:xfrm>
+            <a:off x="822960" y="6382512"/>
+            <a:ext cx="10543032" cy="0"/>
+          </a:xfrm>
+          <a:prstGeom prst="line">
+            <a:avLst/>
+          </a:prstGeom>
+          <a:noFill/>
+          <a:ln w="9525">
+            <a:solidFill>
+              <a:srgbClr val="D9D4C4"/>
+            </a:solidFill>
+            <a:prstDash val="solid"/>
+          </a:ln>
+        </p:spPr>
+      </p:sp>
+      <p:sp>
+        <p:nvSpPr>
+          <p:cNvPr id="22" name="Text 19"/>
+          <p:cNvSpPr/>
+          <p:nvPr/>
+        </p:nvSpPr>
+        <p:spPr>
+          <a:xfrm>
+            <a:off x="822960" y="6419088"/>
+            <a:ext cx="7315200" cy="274320"/>
+          </a:xfrm>
+          <a:prstGeom prst="rect">
+            <a:avLst/>
+          </a:prstGeom>
+          <a:noFill/>
+          <a:ln/>
+        </p:spPr>
+        <p:txBody>
+          <a:bodyPr wrap="square" lIns="0" tIns="0" rIns="0" bIns="0" rtlCol="0" anchor="ctr"/>
+          <a:lstStyle/>
+          <a:p>
+            <a:pPr indent="0" marL="0">
+              <a:buNone/>
+            </a:pPr>
+            <a:r>
+              <a:rPr lang="en-US" sz="900" spc="150" kern="0" dirty="0">
+                <a:solidFill>
+                  <a:srgbClr val="7A7F72"/>
+                </a:solidFill>
+                <a:latin typeface="Arial" pitchFamily="34" charset="0"/>
+                <a:ea typeface="Arial" pitchFamily="34" charset="-122"/>
+                <a:cs typeface="Arial" pitchFamily="34" charset="-120"/>
+              </a:rPr>
               <a:t>MEDIA STUDIES 9607 · SEMESTER I</a:t>
             </a:r>
             <a:endParaRPr lang="en-US" sz="900" dirty="0"/>
@@ -7329,7 +7724,7 @@
       </p:sp>
       <p:sp>
         <p:nvSpPr>
-          <p:cNvPr id="19" name="Text 17"/>
+          <p:cNvPr id="23" name="Text 20"/>
           <p:cNvSpPr/>
           <p:nvPr/>
         </p:nvSpPr>
@@ -7398,80 +7793,54 @@
           <a:chExt cx="0" cy="0"/>
         </a:xfrm>
       </p:grpSpPr>
-      <p:pic>
-        <p:nvPicPr>
-          <p:cNvPr id="2" name="Image 0" descr="/Users/dogan/Documents/Vaults/Courses/wiki/classes/media-studies/decks/_build/img/crops/rubens-sketch_a664.jpg">    </p:cNvPr>
-          <p:cNvPicPr>
-            <a:picLocks noChangeAspect="1"/>
-          </p:cNvPicPr>
-          <p:nvPr/>
-        </p:nvPicPr>
-        <p:blipFill>
-          <a:blip r:embed="rId1"/>
-          <a:stretch>
-            <a:fillRect/>
-          </a:stretch>
-        </p:blipFill>
-        <p:spPr>
-          <a:xfrm>
-            <a:off x="7635240" y="0"/>
-            <a:ext cx="4553712" cy="6858000"/>
-          </a:xfrm>
-          <a:prstGeom prst="rect">
-            <a:avLst/>
-          </a:prstGeom>
-        </p:spPr>
-      </p:pic>
-      <p:sp>
-        <p:nvSpPr>
-          <p:cNvPr id="3" name="Text 0"/>
-          <p:cNvSpPr/>
-          <p:nvPr/>
-        </p:nvSpPr>
-        <p:spPr>
-          <a:xfrm>
-            <a:off x="7818120" y="6126480"/>
-            <a:ext cx="4187952" cy="365760"/>
-          </a:xfrm>
-          <a:prstGeom prst="rect">
-            <a:avLst/>
-          </a:prstGeom>
-          <a:solidFill>
-            <a:srgbClr val="FAF8F1"/>
-          </a:solidFill>
-          <a:ln/>
-        </p:spPr>
-        <p:txBody>
-          <a:bodyPr wrap="square" lIns="0" tIns="0" rIns="0" bIns="0" rtlCol="0" anchor="ctr"/>
-          <a:lstStyle/>
-          <a:p>
-            <a:pPr indent="0" marL="0">
-              <a:buNone/>
-            </a:pPr>
-            <a:r>
-              <a:rPr lang="en-US" sz="950" spc="50" kern="0" dirty="0">
-                <a:solidFill>
-                  <a:srgbClr val="7A7F72"/>
+      <p:sp>
+        <p:nvSpPr>
+          <p:cNvPr id="2" name="Text 0"/>
+          <p:cNvSpPr/>
+          <p:nvPr/>
+        </p:nvSpPr>
+        <p:spPr>
+          <a:xfrm>
+            <a:off x="822960" y="457200"/>
+            <a:ext cx="6400800" cy="274320"/>
+          </a:xfrm>
+          <a:prstGeom prst="rect">
+            <a:avLst/>
+          </a:prstGeom>
+          <a:noFill/>
+          <a:ln/>
+        </p:spPr>
+        <p:txBody>
+          <a:bodyPr wrap="square" lIns="0" tIns="0" rIns="0" bIns="0" rtlCol="0" anchor="ctr"/>
+          <a:lstStyle/>
+          <a:p>
+            <a:pPr algn="l" indent="0" marL="0">
+              <a:buNone/>
+            </a:pPr>
+            <a:r>
+              <a:rPr lang="en-US" sz="1100" b="1" spc="250" kern="0" dirty="0">
+                <a:solidFill>
+                  <a:srgbClr val="4A6B5D"/>
                 </a:solidFill>
                 <a:latin typeface="Arial" pitchFamily="34" charset="0"/>
                 <a:ea typeface="Arial" pitchFamily="34" charset="-122"/>
                 <a:cs typeface="Arial" pitchFamily="34" charset="-120"/>
               </a:rPr>
-              <a:t>Rubens, Multiple Sketch for the Banqueting House Ceiling, c. 1629</a:t>
-            </a:r>
-            <a:endParaRPr lang="en-US" sz="950" dirty="0"/>
-          </a:p>
-        </p:txBody>
-      </p:sp>
-      <p:sp>
-        <p:nvSpPr>
-          <p:cNvPr id="4" name="Text 1"/>
-          <p:cNvSpPr/>
-          <p:nvPr/>
-        </p:nvSpPr>
-        <p:spPr>
-          <a:xfrm>
-            <a:off x="822960" y="685800"/>
+              <a:t>THE VIEWING PROTOCOL</a:t>
+            </a:r>
+            <a:endParaRPr lang="en-US" sz="1100" dirty="0"/>
+          </a:p>
+        </p:txBody>
+      </p:sp>
+      <p:sp>
+        <p:nvSpPr>
+          <p:cNvPr id="3" name="Text 1"/>
+          <p:cNvSpPr/>
+          <p:nvPr/>
+        </p:nvSpPr>
+        <p:spPr>
+          <a:xfrm>
+            <a:off x="6793992" y="457200"/>
             <a:ext cx="4572000" cy="274320"/>
           </a:xfrm>
           <a:prstGeom prst="rect">
@@ -7484,19 +7853,19 @@
           <a:bodyPr wrap="square" lIns="0" tIns="0" rIns="0" bIns="0" rtlCol="0" anchor="ctr"/>
           <a:lstStyle/>
           <a:p>
-            <a:pPr algn="l" indent="0" marL="0">
+            <a:pPr algn="r" indent="0" marL="0">
               <a:buNone/>
             </a:pPr>
             <a:r>
               <a:rPr lang="en-US" sz="1100" b="1" spc="250" kern="0" dirty="0">
                 <a:solidFill>
-                  <a:srgbClr val="4A6B5D"/>
+                  <a:srgbClr val="7A7F72"/>
                 </a:solidFill>
                 <a:latin typeface="Arial" pitchFamily="34" charset="0"/>
                 <a:ea typeface="Arial" pitchFamily="34" charset="-122"/>
                 <a:cs typeface="Arial" pitchFamily="34" charset="-120"/>
               </a:rPr>
-              <a:t>THE BAR</a:t>
+              <a:t>SAME ORDER, EVERY EXTRACT, FOR TWO YEARS</a:t>
             </a:r>
             <a:endParaRPr lang="en-US" sz="1100" dirty="0"/>
           </a:p>
@@ -7504,14 +7873,14 @@
       </p:sp>
       <p:sp>
         <p:nvSpPr>
-          <p:cNvPr id="5" name="Shape 2"/>
-          <p:cNvSpPr/>
-          <p:nvPr/>
-        </p:nvSpPr>
-        <p:spPr>
-          <a:xfrm>
-            <a:off x="822960" y="1051560"/>
-            <a:ext cx="6492240" cy="0"/>
+          <p:cNvPr id="4" name="Shape 2"/>
+          <p:cNvSpPr/>
+          <p:nvPr/>
+        </p:nvSpPr>
+        <p:spPr>
+          <a:xfrm>
+            <a:off x="822960" y="786384"/>
+            <a:ext cx="10543032" cy="0"/>
           </a:xfrm>
           <a:prstGeom prst="line">
             <a:avLst/>
@@ -7527,14 +7896,898 @@
       </p:sp>
       <p:sp>
         <p:nvSpPr>
-          <p:cNvPr id="6" name="Text 3"/>
-          <p:cNvSpPr/>
-          <p:nvPr/>
-        </p:nvSpPr>
-        <p:spPr>
-          <a:xfrm>
-            <a:off x="822960" y="1234440"/>
-            <a:ext cx="6492240" cy="1737360"/>
+          <p:cNvPr id="5" name="Text 3"/>
+          <p:cNvSpPr/>
+          <p:nvPr/>
+        </p:nvSpPr>
+        <p:spPr>
+          <a:xfrm>
+            <a:off x="822960" y="932688"/>
+            <a:ext cx="10543032" cy="640080"/>
+          </a:xfrm>
+          <a:prstGeom prst="rect">
+            <a:avLst/>
+          </a:prstGeom>
+          <a:noFill/>
+          <a:ln/>
+        </p:spPr>
+        <p:txBody>
+          <a:bodyPr wrap="square" lIns="0" tIns="0" rIns="0" bIns="0" rtlCol="0" anchor="ctr"/>
+          <a:lstStyle/>
+          <a:p>
+            <a:pPr indent="0" marL="0">
+              <a:buNone/>
+            </a:pPr>
+            <a:r>
+              <a:rPr lang="en-US" sz="3200" dirty="0">
+                <a:solidFill>
+                  <a:srgbClr val="24313F"/>
+                </a:solidFill>
+                <a:latin typeface="Georgia" pitchFamily="34" charset="0"/>
+                <a:ea typeface="Georgia" pitchFamily="34" charset="-122"/>
+                <a:cs typeface="Georgia" pitchFamily="34" charset="-120"/>
+              </a:rPr>
+              <a:t>Six passes, always in this order</a:t>
+            </a:r>
+            <a:endParaRPr lang="en-US" sz="3200" dirty="0"/>
+          </a:p>
+        </p:txBody>
+      </p:sp>
+      <p:sp>
+        <p:nvSpPr>
+          <p:cNvPr id="6" name="Shape 4"/>
+          <p:cNvSpPr/>
+          <p:nvPr/>
+        </p:nvSpPr>
+        <p:spPr>
+          <a:xfrm>
+            <a:off x="822960" y="1783080"/>
+            <a:ext cx="566928" cy="566928"/>
+          </a:xfrm>
+          <a:prstGeom prst="rect">
+            <a:avLst/>
+          </a:prstGeom>
+          <a:solidFill>
+            <a:srgbClr val="A3C1AD"/>
+          </a:solidFill>
+          <a:ln/>
+        </p:spPr>
+      </p:sp>
+      <p:sp>
+        <p:nvSpPr>
+          <p:cNvPr id="7" name="Text 5"/>
+          <p:cNvSpPr/>
+          <p:nvPr/>
+        </p:nvSpPr>
+        <p:spPr>
+          <a:xfrm>
+            <a:off x="822960" y="1783080"/>
+            <a:ext cx="566928" cy="566928"/>
+          </a:xfrm>
+          <a:prstGeom prst="rect">
+            <a:avLst/>
+          </a:prstGeom>
+          <a:noFill/>
+          <a:ln/>
+        </p:spPr>
+        <p:txBody>
+          <a:bodyPr wrap="square" lIns="0" tIns="0" rIns="0" bIns="0" rtlCol="0" anchor="ctr"/>
+          <a:lstStyle/>
+          <a:p>
+            <a:pPr algn="ctr" indent="0" marL="0">
+              <a:buNone/>
+            </a:pPr>
+            <a:r>
+              <a:rPr lang="en-US" sz="2000" dirty="0">
+                <a:solidFill>
+                  <a:srgbClr val="24313F"/>
+                </a:solidFill>
+                <a:latin typeface="Georgia" pitchFamily="34" charset="0"/>
+                <a:ea typeface="Georgia" pitchFamily="34" charset="-122"/>
+                <a:cs typeface="Georgia" pitchFamily="34" charset="-120"/>
+              </a:rPr>
+              <a:t>1</a:t>
+            </a:r>
+            <a:endParaRPr lang="en-US" sz="2000" dirty="0"/>
+          </a:p>
+        </p:txBody>
+      </p:sp>
+      <p:sp>
+        <p:nvSpPr>
+          <p:cNvPr id="8" name="Text 6"/>
+          <p:cNvSpPr/>
+          <p:nvPr/>
+        </p:nvSpPr>
+        <p:spPr>
+          <a:xfrm>
+            <a:off x="1645920" y="1783080"/>
+            <a:ext cx="2743200" cy="566928"/>
+          </a:xfrm>
+          <a:prstGeom prst="rect">
+            <a:avLst/>
+          </a:prstGeom>
+          <a:noFill/>
+          <a:ln/>
+        </p:spPr>
+        <p:txBody>
+          <a:bodyPr wrap="square" lIns="0" tIns="0" rIns="0" bIns="0" rtlCol="0" anchor="ctr"/>
+          <a:lstStyle/>
+          <a:p>
+            <a:pPr indent="0" marL="0">
+              <a:buNone/>
+            </a:pPr>
+            <a:r>
+              <a:rPr lang="en-US" sz="2100" dirty="0">
+                <a:solidFill>
+                  <a:srgbClr val="4A6B5D"/>
+                </a:solidFill>
+                <a:latin typeface="Georgia" pitchFamily="34" charset="0"/>
+                <a:ea typeface="Georgia" pitchFamily="34" charset="-122"/>
+                <a:cs typeface="Georgia" pitchFamily="34" charset="-120"/>
+              </a:rPr>
+              <a:t>Framing</a:t>
+            </a:r>
+            <a:endParaRPr lang="en-US" sz="2100" dirty="0"/>
+          </a:p>
+        </p:txBody>
+      </p:sp>
+      <p:sp>
+        <p:nvSpPr>
+          <p:cNvPr id="9" name="Text 7"/>
+          <p:cNvSpPr/>
+          <p:nvPr/>
+        </p:nvSpPr>
+        <p:spPr>
+          <a:xfrm>
+            <a:off x="4480560" y="1783080"/>
+            <a:ext cx="7498080" cy="566928"/>
+          </a:xfrm>
+          <a:prstGeom prst="rect">
+            <a:avLst/>
+          </a:prstGeom>
+          <a:noFill/>
+          <a:ln/>
+        </p:spPr>
+        <p:txBody>
+          <a:bodyPr wrap="square" lIns="0" tIns="0" rIns="0" bIns="0" rtlCol="0" anchor="ctr"/>
+          <a:lstStyle/>
+          <a:p>
+            <a:pPr indent="0" marL="0">
+              <a:buNone/>
+            </a:pPr>
+            <a:r>
+              <a:rPr lang="en-US" sz="1550" dirty="0">
+                <a:solidFill>
+                  <a:srgbClr val="24313F"/>
+                </a:solidFill>
+                <a:latin typeface="Georgia" pitchFamily="34" charset="0"/>
+                <a:ea typeface="Georgia" pitchFamily="34" charset="-122"/>
+                <a:cs typeface="Georgia" pitchFamily="34" charset="-120"/>
+              </a:rPr>
+              <a:t>What is in the frame, and what has been kept out of it.</a:t>
+            </a:r>
+            <a:endParaRPr lang="en-US" sz="1550" dirty="0"/>
+          </a:p>
+        </p:txBody>
+      </p:sp>
+      <p:sp>
+        <p:nvSpPr>
+          <p:cNvPr id="10" name="Shape 8"/>
+          <p:cNvSpPr/>
+          <p:nvPr/>
+        </p:nvSpPr>
+        <p:spPr>
+          <a:xfrm>
+            <a:off x="822960" y="2441448"/>
+            <a:ext cx="566928" cy="566928"/>
+          </a:xfrm>
+          <a:prstGeom prst="rect">
+            <a:avLst/>
+          </a:prstGeom>
+          <a:solidFill>
+            <a:srgbClr val="A3C1AD"/>
+          </a:solidFill>
+          <a:ln/>
+        </p:spPr>
+      </p:sp>
+      <p:sp>
+        <p:nvSpPr>
+          <p:cNvPr id="11" name="Text 9"/>
+          <p:cNvSpPr/>
+          <p:nvPr/>
+        </p:nvSpPr>
+        <p:spPr>
+          <a:xfrm>
+            <a:off x="822960" y="2441448"/>
+            <a:ext cx="566928" cy="566928"/>
+          </a:xfrm>
+          <a:prstGeom prst="rect">
+            <a:avLst/>
+          </a:prstGeom>
+          <a:noFill/>
+          <a:ln/>
+        </p:spPr>
+        <p:txBody>
+          <a:bodyPr wrap="square" lIns="0" tIns="0" rIns="0" bIns="0" rtlCol="0" anchor="ctr"/>
+          <a:lstStyle/>
+          <a:p>
+            <a:pPr algn="ctr" indent="0" marL="0">
+              <a:buNone/>
+            </a:pPr>
+            <a:r>
+              <a:rPr lang="en-US" sz="2000" dirty="0">
+                <a:solidFill>
+                  <a:srgbClr val="24313F"/>
+                </a:solidFill>
+                <a:latin typeface="Georgia" pitchFamily="34" charset="0"/>
+                <a:ea typeface="Georgia" pitchFamily="34" charset="-122"/>
+                <a:cs typeface="Georgia" pitchFamily="34" charset="-120"/>
+              </a:rPr>
+              <a:t>2</a:t>
+            </a:r>
+            <a:endParaRPr lang="en-US" sz="2000" dirty="0"/>
+          </a:p>
+        </p:txBody>
+      </p:sp>
+      <p:sp>
+        <p:nvSpPr>
+          <p:cNvPr id="12" name="Text 10"/>
+          <p:cNvSpPr/>
+          <p:nvPr/>
+        </p:nvSpPr>
+        <p:spPr>
+          <a:xfrm>
+            <a:off x="1645920" y="2441448"/>
+            <a:ext cx="2743200" cy="566928"/>
+          </a:xfrm>
+          <a:prstGeom prst="rect">
+            <a:avLst/>
+          </a:prstGeom>
+          <a:noFill/>
+          <a:ln/>
+        </p:spPr>
+        <p:txBody>
+          <a:bodyPr wrap="square" lIns="0" tIns="0" rIns="0" bIns="0" rtlCol="0" anchor="ctr"/>
+          <a:lstStyle/>
+          <a:p>
+            <a:pPr indent="0" marL="0">
+              <a:buNone/>
+            </a:pPr>
+            <a:r>
+              <a:rPr lang="en-US" sz="2100" dirty="0">
+                <a:solidFill>
+                  <a:srgbClr val="4A6B5D"/>
+                </a:solidFill>
+                <a:latin typeface="Georgia" pitchFamily="34" charset="0"/>
+                <a:ea typeface="Georgia" pitchFamily="34" charset="-122"/>
+                <a:cs typeface="Georgia" pitchFamily="34" charset="-120"/>
+              </a:rPr>
+              <a:t>Camera</a:t>
+            </a:r>
+            <a:endParaRPr lang="en-US" sz="2100" dirty="0"/>
+          </a:p>
+        </p:txBody>
+      </p:sp>
+      <p:sp>
+        <p:nvSpPr>
+          <p:cNvPr id="13" name="Text 11"/>
+          <p:cNvSpPr/>
+          <p:nvPr/>
+        </p:nvSpPr>
+        <p:spPr>
+          <a:xfrm>
+            <a:off x="4480560" y="2441448"/>
+            <a:ext cx="7498080" cy="566928"/>
+          </a:xfrm>
+          <a:prstGeom prst="rect">
+            <a:avLst/>
+          </a:prstGeom>
+          <a:noFill/>
+          <a:ln/>
+        </p:spPr>
+        <p:txBody>
+          <a:bodyPr wrap="square" lIns="0" tIns="0" rIns="0" bIns="0" rtlCol="0" anchor="ctr"/>
+          <a:lstStyle/>
+          <a:p>
+            <a:pPr indent="0" marL="0">
+              <a:buNone/>
+            </a:pPr>
+            <a:r>
+              <a:rPr lang="en-US" sz="1550" dirty="0">
+                <a:solidFill>
+                  <a:srgbClr val="24313F"/>
+                </a:solidFill>
+                <a:latin typeface="Georgia" pitchFamily="34" charset="0"/>
+                <a:ea typeface="Georgia" pitchFamily="34" charset="-122"/>
+                <a:cs typeface="Georgia" pitchFamily="34" charset="-120"/>
+              </a:rPr>
+              <a:t>Shot, angle, movement, composition. Lesson 03.</a:t>
+            </a:r>
+            <a:endParaRPr lang="en-US" sz="1550" dirty="0"/>
+          </a:p>
+        </p:txBody>
+      </p:sp>
+      <p:sp>
+        <p:nvSpPr>
+          <p:cNvPr id="14" name="Shape 12"/>
+          <p:cNvSpPr/>
+          <p:nvPr/>
+        </p:nvSpPr>
+        <p:spPr>
+          <a:xfrm>
+            <a:off x="822960" y="3099816"/>
+            <a:ext cx="566928" cy="566928"/>
+          </a:xfrm>
+          <a:prstGeom prst="rect">
+            <a:avLst/>
+          </a:prstGeom>
+          <a:solidFill>
+            <a:srgbClr val="A3C1AD"/>
+          </a:solidFill>
+          <a:ln/>
+        </p:spPr>
+      </p:sp>
+      <p:sp>
+        <p:nvSpPr>
+          <p:cNvPr id="15" name="Text 13"/>
+          <p:cNvSpPr/>
+          <p:nvPr/>
+        </p:nvSpPr>
+        <p:spPr>
+          <a:xfrm>
+            <a:off x="822960" y="3099816"/>
+            <a:ext cx="566928" cy="566928"/>
+          </a:xfrm>
+          <a:prstGeom prst="rect">
+            <a:avLst/>
+          </a:prstGeom>
+          <a:noFill/>
+          <a:ln/>
+        </p:spPr>
+        <p:txBody>
+          <a:bodyPr wrap="square" lIns="0" tIns="0" rIns="0" bIns="0" rtlCol="0" anchor="ctr"/>
+          <a:lstStyle/>
+          <a:p>
+            <a:pPr algn="ctr" indent="0" marL="0">
+              <a:buNone/>
+            </a:pPr>
+            <a:r>
+              <a:rPr lang="en-US" sz="2000" dirty="0">
+                <a:solidFill>
+                  <a:srgbClr val="24313F"/>
+                </a:solidFill>
+                <a:latin typeface="Georgia" pitchFamily="34" charset="0"/>
+                <a:ea typeface="Georgia" pitchFamily="34" charset="-122"/>
+                <a:cs typeface="Georgia" pitchFamily="34" charset="-120"/>
+              </a:rPr>
+              <a:t>3</a:t>
+            </a:r>
+            <a:endParaRPr lang="en-US" sz="2000" dirty="0"/>
+          </a:p>
+        </p:txBody>
+      </p:sp>
+      <p:sp>
+        <p:nvSpPr>
+          <p:cNvPr id="16" name="Text 14"/>
+          <p:cNvSpPr/>
+          <p:nvPr/>
+        </p:nvSpPr>
+        <p:spPr>
+          <a:xfrm>
+            <a:off x="1645920" y="3099816"/>
+            <a:ext cx="2743200" cy="566928"/>
+          </a:xfrm>
+          <a:prstGeom prst="rect">
+            <a:avLst/>
+          </a:prstGeom>
+          <a:noFill/>
+          <a:ln/>
+        </p:spPr>
+        <p:txBody>
+          <a:bodyPr wrap="square" lIns="0" tIns="0" rIns="0" bIns="0" rtlCol="0" anchor="ctr"/>
+          <a:lstStyle/>
+          <a:p>
+            <a:pPr indent="0" marL="0">
+              <a:buNone/>
+            </a:pPr>
+            <a:r>
+              <a:rPr lang="en-US" sz="2100" dirty="0">
+                <a:solidFill>
+                  <a:srgbClr val="4A6B5D"/>
+                </a:solidFill>
+                <a:latin typeface="Georgia" pitchFamily="34" charset="0"/>
+                <a:ea typeface="Georgia" pitchFamily="34" charset="-122"/>
+                <a:cs typeface="Georgia" pitchFamily="34" charset="-120"/>
+              </a:rPr>
+              <a:t>Light</a:t>
+            </a:r>
+            <a:endParaRPr lang="en-US" sz="2100" dirty="0"/>
+          </a:p>
+        </p:txBody>
+      </p:sp>
+      <p:sp>
+        <p:nvSpPr>
+          <p:cNvPr id="17" name="Text 15"/>
+          <p:cNvSpPr/>
+          <p:nvPr/>
+        </p:nvSpPr>
+        <p:spPr>
+          <a:xfrm>
+            <a:off x="4480560" y="3099816"/>
+            <a:ext cx="7498080" cy="566928"/>
+          </a:xfrm>
+          <a:prstGeom prst="rect">
+            <a:avLst/>
+          </a:prstGeom>
+          <a:noFill/>
+          <a:ln/>
+        </p:spPr>
+        <p:txBody>
+          <a:bodyPr wrap="square" lIns="0" tIns="0" rIns="0" bIns="0" rtlCol="0" anchor="ctr"/>
+          <a:lstStyle/>
+          <a:p>
+            <a:pPr indent="0" marL="0">
+              <a:buNone/>
+            </a:pPr>
+            <a:r>
+              <a:rPr lang="en-US" sz="1550" dirty="0">
+                <a:solidFill>
+                  <a:srgbClr val="24313F"/>
+                </a:solidFill>
+                <a:latin typeface="Georgia" pitchFamily="34" charset="0"/>
+                <a:ea typeface="Georgia" pitchFamily="34" charset="-122"/>
+                <a:cs typeface="Georgia" pitchFamily="34" charset="-120"/>
+              </a:rPr>
+              <a:t>Direction, quality, contrast, and what it makes important. Lesson 05.</a:t>
+            </a:r>
+            <a:endParaRPr lang="en-US" sz="1550" dirty="0"/>
+          </a:p>
+        </p:txBody>
+      </p:sp>
+      <p:sp>
+        <p:nvSpPr>
+          <p:cNvPr id="18" name="Shape 16"/>
+          <p:cNvSpPr/>
+          <p:nvPr/>
+        </p:nvSpPr>
+        <p:spPr>
+          <a:xfrm>
+            <a:off x="822960" y="3758184"/>
+            <a:ext cx="566928" cy="566928"/>
+          </a:xfrm>
+          <a:prstGeom prst="rect">
+            <a:avLst/>
+          </a:prstGeom>
+          <a:solidFill>
+            <a:srgbClr val="A3C1AD"/>
+          </a:solidFill>
+          <a:ln/>
+        </p:spPr>
+      </p:sp>
+      <p:sp>
+        <p:nvSpPr>
+          <p:cNvPr id="19" name="Text 17"/>
+          <p:cNvSpPr/>
+          <p:nvPr/>
+        </p:nvSpPr>
+        <p:spPr>
+          <a:xfrm>
+            <a:off x="822960" y="3758184"/>
+            <a:ext cx="566928" cy="566928"/>
+          </a:xfrm>
+          <a:prstGeom prst="rect">
+            <a:avLst/>
+          </a:prstGeom>
+          <a:noFill/>
+          <a:ln/>
+        </p:spPr>
+        <p:txBody>
+          <a:bodyPr wrap="square" lIns="0" tIns="0" rIns="0" bIns="0" rtlCol="0" anchor="ctr"/>
+          <a:lstStyle/>
+          <a:p>
+            <a:pPr algn="ctr" indent="0" marL="0">
+              <a:buNone/>
+            </a:pPr>
+            <a:r>
+              <a:rPr lang="en-US" sz="2000" dirty="0">
+                <a:solidFill>
+                  <a:srgbClr val="24313F"/>
+                </a:solidFill>
+                <a:latin typeface="Georgia" pitchFamily="34" charset="0"/>
+                <a:ea typeface="Georgia" pitchFamily="34" charset="-122"/>
+                <a:cs typeface="Georgia" pitchFamily="34" charset="-120"/>
+              </a:rPr>
+              <a:t>4</a:t>
+            </a:r>
+            <a:endParaRPr lang="en-US" sz="2000" dirty="0"/>
+          </a:p>
+        </p:txBody>
+      </p:sp>
+      <p:sp>
+        <p:nvSpPr>
+          <p:cNvPr id="20" name="Text 18"/>
+          <p:cNvSpPr/>
+          <p:nvPr/>
+        </p:nvSpPr>
+        <p:spPr>
+          <a:xfrm>
+            <a:off x="1645920" y="3758184"/>
+            <a:ext cx="2743200" cy="566928"/>
+          </a:xfrm>
+          <a:prstGeom prst="rect">
+            <a:avLst/>
+          </a:prstGeom>
+          <a:noFill/>
+          <a:ln/>
+        </p:spPr>
+        <p:txBody>
+          <a:bodyPr wrap="square" lIns="0" tIns="0" rIns="0" bIns="0" rtlCol="0" anchor="ctr"/>
+          <a:lstStyle/>
+          <a:p>
+            <a:pPr indent="0" marL="0">
+              <a:buNone/>
+            </a:pPr>
+            <a:r>
+              <a:rPr lang="en-US" sz="2100" dirty="0">
+                <a:solidFill>
+                  <a:srgbClr val="4A6B5D"/>
+                </a:solidFill>
+                <a:latin typeface="Georgia" pitchFamily="34" charset="0"/>
+                <a:ea typeface="Georgia" pitchFamily="34" charset="-122"/>
+                <a:cs typeface="Georgia" pitchFamily="34" charset="-120"/>
+              </a:rPr>
+              <a:t>Mise-en-scène</a:t>
+            </a:r>
+            <a:endParaRPr lang="en-US" sz="2100" dirty="0"/>
+          </a:p>
+        </p:txBody>
+      </p:sp>
+      <p:sp>
+        <p:nvSpPr>
+          <p:cNvPr id="21" name="Text 19"/>
+          <p:cNvSpPr/>
+          <p:nvPr/>
+        </p:nvSpPr>
+        <p:spPr>
+          <a:xfrm>
+            <a:off x="4480560" y="3758184"/>
+            <a:ext cx="7498080" cy="566928"/>
+          </a:xfrm>
+          <a:prstGeom prst="rect">
+            <a:avLst/>
+          </a:prstGeom>
+          <a:noFill/>
+          <a:ln/>
+        </p:spPr>
+        <p:txBody>
+          <a:bodyPr wrap="square" lIns="0" tIns="0" rIns="0" bIns="0" rtlCol="0" anchor="ctr"/>
+          <a:lstStyle/>
+          <a:p>
+            <a:pPr indent="0" marL="0">
+              <a:buNone/>
+            </a:pPr>
+            <a:r>
+              <a:rPr lang="en-US" sz="1550" dirty="0">
+                <a:solidFill>
+                  <a:srgbClr val="24313F"/>
+                </a:solidFill>
+                <a:latin typeface="Georgia" pitchFamily="34" charset="0"/>
+                <a:ea typeface="Georgia" pitchFamily="34" charset="-122"/>
+                <a:cs typeface="Georgia" pitchFamily="34" charset="-120"/>
+              </a:rPr>
+              <a:t>Location, costume, properties, colour. Lesson 05.</a:t>
+            </a:r>
+            <a:endParaRPr lang="en-US" sz="1550" dirty="0"/>
+          </a:p>
+        </p:txBody>
+      </p:sp>
+      <p:sp>
+        <p:nvSpPr>
+          <p:cNvPr id="22" name="Shape 20"/>
+          <p:cNvSpPr/>
+          <p:nvPr/>
+        </p:nvSpPr>
+        <p:spPr>
+          <a:xfrm>
+            <a:off x="822960" y="4416552"/>
+            <a:ext cx="566928" cy="566928"/>
+          </a:xfrm>
+          <a:prstGeom prst="rect">
+            <a:avLst/>
+          </a:prstGeom>
+          <a:solidFill>
+            <a:srgbClr val="A3C1AD"/>
+          </a:solidFill>
+          <a:ln/>
+        </p:spPr>
+      </p:sp>
+      <p:sp>
+        <p:nvSpPr>
+          <p:cNvPr id="23" name="Text 21"/>
+          <p:cNvSpPr/>
+          <p:nvPr/>
+        </p:nvSpPr>
+        <p:spPr>
+          <a:xfrm>
+            <a:off x="822960" y="4416552"/>
+            <a:ext cx="566928" cy="566928"/>
+          </a:xfrm>
+          <a:prstGeom prst="rect">
+            <a:avLst/>
+          </a:prstGeom>
+          <a:noFill/>
+          <a:ln/>
+        </p:spPr>
+        <p:txBody>
+          <a:bodyPr wrap="square" lIns="0" tIns="0" rIns="0" bIns="0" rtlCol="0" anchor="ctr"/>
+          <a:lstStyle/>
+          <a:p>
+            <a:pPr algn="ctr" indent="0" marL="0">
+              <a:buNone/>
+            </a:pPr>
+            <a:r>
+              <a:rPr lang="en-US" sz="2000" dirty="0">
+                <a:solidFill>
+                  <a:srgbClr val="24313F"/>
+                </a:solidFill>
+                <a:latin typeface="Georgia" pitchFamily="34" charset="0"/>
+                <a:ea typeface="Georgia" pitchFamily="34" charset="-122"/>
+                <a:cs typeface="Georgia" pitchFamily="34" charset="-120"/>
+              </a:rPr>
+              <a:t>5</a:t>
+            </a:r>
+            <a:endParaRPr lang="en-US" sz="2000" dirty="0"/>
+          </a:p>
+        </p:txBody>
+      </p:sp>
+      <p:sp>
+        <p:nvSpPr>
+          <p:cNvPr id="24" name="Text 22"/>
+          <p:cNvSpPr/>
+          <p:nvPr/>
+        </p:nvSpPr>
+        <p:spPr>
+          <a:xfrm>
+            <a:off x="1645920" y="4416552"/>
+            <a:ext cx="2743200" cy="566928"/>
+          </a:xfrm>
+          <a:prstGeom prst="rect">
+            <a:avLst/>
+          </a:prstGeom>
+          <a:noFill/>
+          <a:ln/>
+        </p:spPr>
+        <p:txBody>
+          <a:bodyPr wrap="square" lIns="0" tIns="0" rIns="0" bIns="0" rtlCol="0" anchor="ctr"/>
+          <a:lstStyle/>
+          <a:p>
+            <a:pPr indent="0" marL="0">
+              <a:buNone/>
+            </a:pPr>
+            <a:r>
+              <a:rPr lang="en-US" sz="2100" dirty="0">
+                <a:solidFill>
+                  <a:srgbClr val="4A6B5D"/>
+                </a:solidFill>
+                <a:latin typeface="Georgia" pitchFamily="34" charset="0"/>
+                <a:ea typeface="Georgia" pitchFamily="34" charset="-122"/>
+                <a:cs typeface="Georgia" pitchFamily="34" charset="-120"/>
+              </a:rPr>
+              <a:t>Sound</a:t>
+            </a:r>
+            <a:endParaRPr lang="en-US" sz="2100" dirty="0"/>
+          </a:p>
+        </p:txBody>
+      </p:sp>
+      <p:sp>
+        <p:nvSpPr>
+          <p:cNvPr id="25" name="Text 23"/>
+          <p:cNvSpPr/>
+          <p:nvPr/>
+        </p:nvSpPr>
+        <p:spPr>
+          <a:xfrm>
+            <a:off x="4480560" y="4416552"/>
+            <a:ext cx="7498080" cy="566928"/>
+          </a:xfrm>
+          <a:prstGeom prst="rect">
+            <a:avLst/>
+          </a:prstGeom>
+          <a:noFill/>
+          <a:ln/>
+        </p:spPr>
+        <p:txBody>
+          <a:bodyPr wrap="square" lIns="0" tIns="0" rIns="0" bIns="0" rtlCol="0" anchor="ctr"/>
+          <a:lstStyle/>
+          <a:p>
+            <a:pPr indent="0" marL="0">
+              <a:buNone/>
+            </a:pPr>
+            <a:r>
+              <a:rPr lang="en-US" sz="1550" dirty="0">
+                <a:solidFill>
+                  <a:srgbClr val="24313F"/>
+                </a:solidFill>
+                <a:latin typeface="Georgia" pitchFamily="34" charset="0"/>
+                <a:ea typeface="Georgia" pitchFamily="34" charset="-122"/>
+                <a:cs typeface="Georgia" pitchFamily="34" charset="-120"/>
+              </a:rPr>
+              <a:t>Diegetic and non-diegetic, perspective, the bridge. Lesson 04.</a:t>
+            </a:r>
+            <a:endParaRPr lang="en-US" sz="1550" dirty="0"/>
+          </a:p>
+        </p:txBody>
+      </p:sp>
+      <p:sp>
+        <p:nvSpPr>
+          <p:cNvPr id="26" name="Shape 24"/>
+          <p:cNvSpPr/>
+          <p:nvPr/>
+        </p:nvSpPr>
+        <p:spPr>
+          <a:xfrm>
+            <a:off x="822960" y="5074920"/>
+            <a:ext cx="566928" cy="566928"/>
+          </a:xfrm>
+          <a:prstGeom prst="rect">
+            <a:avLst/>
+          </a:prstGeom>
+          <a:solidFill>
+            <a:srgbClr val="A3C1AD"/>
+          </a:solidFill>
+          <a:ln/>
+        </p:spPr>
+      </p:sp>
+      <p:sp>
+        <p:nvSpPr>
+          <p:cNvPr id="27" name="Text 25"/>
+          <p:cNvSpPr/>
+          <p:nvPr/>
+        </p:nvSpPr>
+        <p:spPr>
+          <a:xfrm>
+            <a:off x="822960" y="5074920"/>
+            <a:ext cx="566928" cy="566928"/>
+          </a:xfrm>
+          <a:prstGeom prst="rect">
+            <a:avLst/>
+          </a:prstGeom>
+          <a:noFill/>
+          <a:ln/>
+        </p:spPr>
+        <p:txBody>
+          <a:bodyPr wrap="square" lIns="0" tIns="0" rIns="0" bIns="0" rtlCol="0" anchor="ctr"/>
+          <a:lstStyle/>
+          <a:p>
+            <a:pPr algn="ctr" indent="0" marL="0">
+              <a:buNone/>
+            </a:pPr>
+            <a:r>
+              <a:rPr lang="en-US" sz="2000" dirty="0">
+                <a:solidFill>
+                  <a:srgbClr val="24313F"/>
+                </a:solidFill>
+                <a:latin typeface="Georgia" pitchFamily="34" charset="0"/>
+                <a:ea typeface="Georgia" pitchFamily="34" charset="-122"/>
+                <a:cs typeface="Georgia" pitchFamily="34" charset="-120"/>
+              </a:rPr>
+              <a:t>6</a:t>
+            </a:r>
+            <a:endParaRPr lang="en-US" sz="2000" dirty="0"/>
+          </a:p>
+        </p:txBody>
+      </p:sp>
+      <p:sp>
+        <p:nvSpPr>
+          <p:cNvPr id="28" name="Text 26"/>
+          <p:cNvSpPr/>
+          <p:nvPr/>
+        </p:nvSpPr>
+        <p:spPr>
+          <a:xfrm>
+            <a:off x="1645920" y="5074920"/>
+            <a:ext cx="2743200" cy="566928"/>
+          </a:xfrm>
+          <a:prstGeom prst="rect">
+            <a:avLst/>
+          </a:prstGeom>
+          <a:noFill/>
+          <a:ln/>
+        </p:spPr>
+        <p:txBody>
+          <a:bodyPr wrap="square" lIns="0" tIns="0" rIns="0" bIns="0" rtlCol="0" anchor="ctr"/>
+          <a:lstStyle/>
+          <a:p>
+            <a:pPr indent="0" marL="0">
+              <a:buNone/>
+            </a:pPr>
+            <a:r>
+              <a:rPr lang="en-US" sz="2100" dirty="0">
+                <a:solidFill>
+                  <a:srgbClr val="4A6B5D"/>
+                </a:solidFill>
+                <a:latin typeface="Georgia" pitchFamily="34" charset="0"/>
+                <a:ea typeface="Georgia" pitchFamily="34" charset="-122"/>
+                <a:cs typeface="Georgia" pitchFamily="34" charset="-120"/>
+              </a:rPr>
+              <a:t>Edit</a:t>
+            </a:r>
+            <a:endParaRPr lang="en-US" sz="2100" dirty="0"/>
+          </a:p>
+        </p:txBody>
+      </p:sp>
+      <p:sp>
+        <p:nvSpPr>
+          <p:cNvPr id="29" name="Text 27"/>
+          <p:cNvSpPr/>
+          <p:nvPr/>
+        </p:nvSpPr>
+        <p:spPr>
+          <a:xfrm>
+            <a:off x="4480560" y="5074920"/>
+            <a:ext cx="7498080" cy="566928"/>
+          </a:xfrm>
+          <a:prstGeom prst="rect">
+            <a:avLst/>
+          </a:prstGeom>
+          <a:noFill/>
+          <a:ln/>
+        </p:spPr>
+        <p:txBody>
+          <a:bodyPr wrap="square" lIns="0" tIns="0" rIns="0" bIns="0" rtlCol="0" anchor="ctr"/>
+          <a:lstStyle/>
+          <a:p>
+            <a:pPr indent="0" marL="0">
+              <a:buNone/>
+            </a:pPr>
+            <a:r>
+              <a:rPr lang="en-US" sz="1550" dirty="0">
+                <a:solidFill>
+                  <a:srgbClr val="24313F"/>
+                </a:solidFill>
+                <a:latin typeface="Georgia" pitchFamily="34" charset="0"/>
+                <a:ea typeface="Georgia" pitchFamily="34" charset="-122"/>
+                <a:cs typeface="Georgia" pitchFamily="34" charset="-120"/>
+              </a:rPr>
+              <a:t>The cut rate, the system, what the order does. Lesson 06.</a:t>
+            </a:r>
+            <a:endParaRPr lang="en-US" sz="1550" dirty="0"/>
+          </a:p>
+        </p:txBody>
+      </p:sp>
+      <p:sp>
+        <p:nvSpPr>
+          <p:cNvPr id="30" name="Shape 28"/>
+          <p:cNvSpPr/>
+          <p:nvPr/>
+        </p:nvSpPr>
+        <p:spPr>
+          <a:xfrm>
+            <a:off x="822960" y="5806440"/>
+            <a:ext cx="914400" cy="0"/>
+          </a:xfrm>
+          <a:prstGeom prst="line">
+            <a:avLst/>
+          </a:prstGeom>
+          <a:noFill/>
+          <a:ln w="31750">
+            <a:solidFill>
+              <a:srgbClr val="8C3A38"/>
+            </a:solidFill>
+            <a:prstDash val="solid"/>
+          </a:ln>
+        </p:spPr>
+      </p:sp>
+      <p:sp>
+        <p:nvSpPr>
+          <p:cNvPr id="31" name="Text 29"/>
+          <p:cNvSpPr/>
+          <p:nvPr/>
+        </p:nvSpPr>
+        <p:spPr>
+          <a:xfrm>
+            <a:off x="822960" y="5943600"/>
+            <a:ext cx="10424160" cy="320040"/>
           </a:xfrm>
           <a:prstGeom prst="rect">
             <a:avLst/>
@@ -7548,121 +8801,140 @@
           <a:p>
             <a:pPr indent="0" marL="0">
               <a:lnSpc>
-                <a:spcPts val="4600"/>
+                <a:spcPts val="1700"/>
               </a:lnSpc>
               <a:buNone/>
             </a:pPr>
             <a:r>
-              <a:rPr lang="en-US" sz="4400" dirty="0">
-                <a:solidFill>
-                  <a:srgbClr val="24313F"/>
-                </a:solidFill>
-                <a:latin typeface="Georgia" pitchFamily="34" charset="0"/>
-                <a:ea typeface="Georgia" pitchFamily="34" charset="-122"/>
-                <a:cs typeface="Georgia" pitchFamily="34" charset="-120"/>
-              </a:rPr>
-              <a:t>Painted from</a:t>
-            </a:r>
-            <a:endParaRPr lang="en-US" sz="4400" dirty="0"/>
-          </a:p>
-          <a:p>
-            <a:pPr indent="0" marL="0">
-              <a:lnSpc>
-                <a:spcPts val="4600"/>
-              </a:lnSpc>
-              <a:buNone/>
-            </a:pPr>
-            <a:r>
-              <a:rPr lang="en-US" sz="4400" dirty="0">
-                <a:solidFill>
-                  <a:srgbClr val="24313F"/>
-                </a:solidFill>
-                <a:latin typeface="Georgia" pitchFamily="34" charset="0"/>
-                <a:ea typeface="Georgia" pitchFamily="34" charset="-122"/>
-                <a:cs typeface="Georgia" pitchFamily="34" charset="-120"/>
-              </a:rPr>
-              <a:t>the sketch</a:t>
-            </a:r>
-            <a:endParaRPr lang="en-US" sz="4400" dirty="0"/>
-          </a:p>
-        </p:txBody>
-      </p:sp>
-      <p:sp>
-        <p:nvSpPr>
-          <p:cNvPr id="7" name="Text 4"/>
-          <p:cNvSpPr/>
-          <p:nvPr/>
-        </p:nvSpPr>
-        <p:spPr>
-          <a:xfrm>
-            <a:off x="822960" y="3246120"/>
-            <a:ext cx="6583680" cy="2560320"/>
-          </a:xfrm>
-          <a:prstGeom prst="rect">
-            <a:avLst/>
-          </a:prstGeom>
-          <a:noFill/>
-          <a:ln/>
-        </p:spPr>
-        <p:txBody>
-          <a:bodyPr wrap="square" lIns="0" tIns="0" rIns="0" bIns="0" rtlCol="0" anchor="t"/>
-          <a:lstStyle/>
-          <a:p>
-            <a:pPr indent="0" marL="0">
-              <a:lnSpc>
-                <a:spcPts val="2500"/>
-              </a:lnSpc>
-              <a:buNone/>
-            </a:pPr>
-            <a:r>
-              <a:rPr lang="en-US" sz="1700" dirty="0">
-                <a:solidFill>
-                  <a:srgbClr val="24313F"/>
-                </a:solidFill>
-                <a:latin typeface="Georgia" pitchFamily="34" charset="0"/>
-                <a:ea typeface="Georgia" pitchFamily="34" charset="-122"/>
-                <a:cs typeface="Georgia" pitchFamily="34" charset="-120"/>
-              </a:rPr>
-              <a:t>Rubens' assistants painted a whole ceiling from a sketch this size. The plan answered every question in advance.</a:t>
-            </a:r>
-            <a:endParaRPr lang="en-US" sz="1700" dirty="0"/>
-          </a:p>
-          <a:p>
-            <a:pPr indent="0" marL="0">
-              <a:lnSpc>
-                <a:spcPts val="2500"/>
-              </a:lnSpc>
-              <a:buNone/>
-            </a:pPr>
-            <a:r>
-              <a:rPr lang="en-US" sz="1500" b="1" spc="100" kern="0" dirty="0">
-                <a:solidFill>
-                  <a:srgbClr val="4A6B5D"/>
+              <a:rPr lang="en-US" sz="1050" b="1" spc="100" kern="0" dirty="0">
+                <a:solidFill>
+                  <a:srgbClr val="7A7F72"/>
                 </a:solidFill>
                 <a:latin typeface="Arial" pitchFamily="34" charset="0"/>
                 <a:ea typeface="Arial" pitchFamily="34" charset="-122"/>
                 <a:cs typeface="Arial" pitchFamily="34" charset="-120"/>
               </a:rPr>
-              <a:t>THE STANDARD   </a:t>
+              <a:t>WHY THIS ORDER   </a:t>
             </a:r>
             <a:pPr indent="0" marL="0">
               <a:lnSpc>
-                <a:spcPts val="2500"/>
+                <a:spcPts val="1700"/>
               </a:lnSpc>
               <a:buNone/>
             </a:pPr>
             <a:r>
-              <a:rPr lang="en-US" sz="1700" dirty="0">
-                <a:solidFill>
-                  <a:srgbClr val="24313F"/>
-                </a:solidFill>
-                <a:latin typeface="Georgia" pitchFamily="34" charset="0"/>
-                <a:ea typeface="Georgia" pitchFamily="34" charset="-122"/>
-                <a:cs typeface="Georgia" pitchFamily="34" charset="-120"/>
-              </a:rPr>
-              <a:t>Your Component 1 plan is ready when a person who was not in the room could shoot it.</a:t>
-            </a:r>
-            <a:endParaRPr lang="en-US" sz="1700" dirty="0"/>
+              <a:rPr lang="en-US" sz="1250" dirty="0">
+                <a:solidFill>
+                  <a:srgbClr val="7A7F72"/>
+                </a:solidFill>
+                <a:latin typeface="Georgia" pitchFamily="34" charset="0"/>
+                <a:ea typeface="Georgia" pitchFamily="34" charset="-122"/>
+                <a:cs typeface="Georgia" pitchFamily="34" charset="-120"/>
+              </a:rPr>
+              <a:t>The most common failure is not ignorance. It is forgetting a whole code family. The order prevents that.</a:t>
+            </a:r>
+            <a:endParaRPr lang="en-US" sz="1050" dirty="0"/>
+          </a:p>
+        </p:txBody>
+      </p:sp>
+      <p:sp>
+        <p:nvSpPr>
+          <p:cNvPr id="32" name="Shape 30"/>
+          <p:cNvSpPr/>
+          <p:nvPr/>
+        </p:nvSpPr>
+        <p:spPr>
+          <a:xfrm>
+            <a:off x="822960" y="6382512"/>
+            <a:ext cx="10543032" cy="0"/>
+          </a:xfrm>
+          <a:prstGeom prst="line">
+            <a:avLst/>
+          </a:prstGeom>
+          <a:noFill/>
+          <a:ln w="9525">
+            <a:solidFill>
+              <a:srgbClr val="D9D4C4"/>
+            </a:solidFill>
+            <a:prstDash val="solid"/>
+          </a:ln>
+        </p:spPr>
+      </p:sp>
+      <p:sp>
+        <p:nvSpPr>
+          <p:cNvPr id="33" name="Text 31"/>
+          <p:cNvSpPr/>
+          <p:nvPr/>
+        </p:nvSpPr>
+        <p:spPr>
+          <a:xfrm>
+            <a:off x="822960" y="6419088"/>
+            <a:ext cx="7315200" cy="274320"/>
+          </a:xfrm>
+          <a:prstGeom prst="rect">
+            <a:avLst/>
+          </a:prstGeom>
+          <a:noFill/>
+          <a:ln/>
+        </p:spPr>
+        <p:txBody>
+          <a:bodyPr wrap="square" lIns="0" tIns="0" rIns="0" bIns="0" rtlCol="0" anchor="ctr"/>
+          <a:lstStyle/>
+          <a:p>
+            <a:pPr indent="0" marL="0">
+              <a:buNone/>
+            </a:pPr>
+            <a:r>
+              <a:rPr lang="en-US" sz="900" spc="150" kern="0" dirty="0">
+                <a:solidFill>
+                  <a:srgbClr val="7A7F72"/>
+                </a:solidFill>
+                <a:latin typeface="Arial" pitchFamily="34" charset="0"/>
+                <a:ea typeface="Arial" pitchFamily="34" charset="-122"/>
+                <a:cs typeface="Arial" pitchFamily="34" charset="-120"/>
+              </a:rPr>
+              <a:t>MEDIA STUDIES 9607 · SEMESTER I</a:t>
+            </a:r>
+            <a:endParaRPr lang="en-US" sz="900" dirty="0"/>
+          </a:p>
+        </p:txBody>
+      </p:sp>
+      <p:sp>
+        <p:nvSpPr>
+          <p:cNvPr id="34" name="Text 32"/>
+          <p:cNvSpPr/>
+          <p:nvPr/>
+        </p:nvSpPr>
+        <p:spPr>
+          <a:xfrm>
+            <a:off x="10268712" y="6355080"/>
+            <a:ext cx="1097280" cy="365760"/>
+          </a:xfrm>
+          <a:prstGeom prst="rect">
+            <a:avLst/>
+          </a:prstGeom>
+          <a:noFill/>
+          <a:ln/>
+        </p:spPr>
+        <p:txBody>
+          <a:bodyPr wrap="square" lIns="0" tIns="0" rIns="0" bIns="0" rtlCol="0" anchor="ctr"/>
+          <a:lstStyle/>
+          <a:p>
+            <a:pPr algn="r" indent="0" marL="0">
+              <a:buNone/>
+            </a:pPr>
+            <a:r>
+              <a:rPr lang="en-US" sz="1600" dirty="0">
+                <a:solidFill>
+                  <a:srgbClr val="A3C1AD"/>
+                </a:solidFill>
+                <a:latin typeface="Georgia" pitchFamily="34" charset="0"/>
+                <a:ea typeface="Georgia" pitchFamily="34" charset="-122"/>
+                <a:cs typeface="Georgia" pitchFamily="34" charset="-120"/>
+              </a:rPr>
+              <a:t>04</a:t>
+            </a:r>
+            <a:endParaRPr lang="en-US" sz="1600" dirty="0"/>
           </a:p>
         </p:txBody>
       </p:sp>
@@ -7680,7 +8952,7 @@
     <p:bg>
       <p:bgPr>
         <a:solidFill>
-          <a:srgbClr val="FAF8F1"/>
+          <a:srgbClr val="E8EFE7"/>
         </a:solidFill>
       </p:bgPr>
     </p:bg>
@@ -7706,24 +8978,128 @@
         </p:nvSpPr>
         <p:spPr>
           <a:xfrm>
-            <a:off x="822960" y="457200"/>
-            <a:ext cx="6400800" cy="274320"/>
-          </a:xfrm>
-          <a:prstGeom prst="rect">
-            <a:avLst/>
-          </a:prstGeom>
-          <a:noFill/>
-          <a:ln/>
-        </p:spPr>
-        <p:txBody>
-          <a:bodyPr wrap="square" lIns="0" tIns="0" rIns="0" bIns="0" rtlCol="0" anchor="ctr"/>
-          <a:lstStyle/>
-          <a:p>
-            <a:pPr algn="l" indent="0" marL="0">
-              <a:buNone/>
-            </a:pPr>
-            <a:r>
-              <a:rPr lang="en-US" sz="1100" b="1" spc="250" kern="0" dirty="0">
+            <a:off x="502920" y="548640"/>
+            <a:ext cx="1828800" cy="1828800"/>
+          </a:xfrm>
+          <a:prstGeom prst="rect">
+            <a:avLst/>
+          </a:prstGeom>
+          <a:noFill/>
+          <a:ln/>
+        </p:spPr>
+        <p:txBody>
+          <a:bodyPr wrap="square" lIns="0" tIns="0" rIns="0" bIns="0" rtlCol="0" anchor="t"/>
+          <a:lstStyle/>
+          <a:p>
+            <a:pPr indent="0" marL="0">
+              <a:buNone/>
+            </a:pPr>
+            <a:r>
+              <a:rPr lang="en-US" sz="20000" dirty="0">
+                <a:solidFill>
+                  <a:srgbClr val="A3C1AD"/>
+                </a:solidFill>
+                <a:latin typeface="Georgia" pitchFamily="34" charset="0"/>
+                <a:ea typeface="Georgia" pitchFamily="34" charset="-122"/>
+                <a:cs typeface="Georgia" pitchFamily="34" charset="-120"/>
+              </a:rPr>
+              <a:t>“</a:t>
+            </a:r>
+            <a:endParaRPr lang="en-US" sz="20000" dirty="0"/>
+          </a:p>
+        </p:txBody>
+      </p:sp>
+      <p:sp>
+        <p:nvSpPr>
+          <p:cNvPr id="3" name="Text 1"/>
+          <p:cNvSpPr/>
+          <p:nvPr/>
+        </p:nvSpPr>
+        <p:spPr>
+          <a:xfrm>
+            <a:off x="822960" y="1783080"/>
+            <a:ext cx="10424160" cy="3291840"/>
+          </a:xfrm>
+          <a:prstGeom prst="rect">
+            <a:avLst/>
+          </a:prstGeom>
+          <a:noFill/>
+          <a:ln/>
+        </p:spPr>
+        <p:txBody>
+          <a:bodyPr wrap="square" lIns="0" tIns="0" rIns="0" bIns="0" rtlCol="0" anchor="ctr"/>
+          <a:lstStyle/>
+          <a:p>
+            <a:pPr indent="0" marL="0">
+              <a:lnSpc>
+                <a:spcPts val="3800"/>
+              </a:lnSpc>
+              <a:buNone/>
+            </a:pPr>
+            <a:r>
+              <a:rPr lang="en-US" sz="2800" dirty="0">
+                <a:solidFill>
+                  <a:srgbClr val="24313F"/>
+                </a:solidFill>
+                <a:latin typeface="Georgia" pitchFamily="34" charset="0"/>
+                <a:ea typeface="Georgia" pitchFamily="34" charset="-122"/>
+                <a:cs typeface="Georgia" pitchFamily="34" charset="-120"/>
+              </a:rPr>
+              <a:t>The principle here is to break down an extract from a TV drama into its component parts and then reassemble them in order to reach some insights into how it produces particular meanings.</a:t>
+            </a:r>
+            <a:endParaRPr lang="en-US" sz="2800" dirty="0"/>
+          </a:p>
+        </p:txBody>
+      </p:sp>
+      <p:sp>
+        <p:nvSpPr>
+          <p:cNvPr id="4" name="Shape 2"/>
+          <p:cNvSpPr/>
+          <p:nvPr/>
+        </p:nvSpPr>
+        <p:spPr>
+          <a:xfrm>
+            <a:off x="822960" y="5029200"/>
+            <a:ext cx="914400" cy="0"/>
+          </a:xfrm>
+          <a:prstGeom prst="line">
+            <a:avLst/>
+          </a:prstGeom>
+          <a:noFill/>
+          <a:ln w="31750">
+            <a:solidFill>
+              <a:srgbClr val="8C3A38"/>
+            </a:solidFill>
+            <a:prstDash val="solid"/>
+          </a:ln>
+        </p:spPr>
+      </p:sp>
+      <p:sp>
+        <p:nvSpPr>
+          <p:cNvPr id="5" name="Text 3"/>
+          <p:cNvSpPr/>
+          <p:nvPr/>
+        </p:nvSpPr>
+        <p:spPr>
+          <a:xfrm>
+            <a:off x="822960" y="5212080"/>
+            <a:ext cx="10058400" cy="457200"/>
+          </a:xfrm>
+          <a:prstGeom prst="rect">
+            <a:avLst/>
+          </a:prstGeom>
+          <a:noFill/>
+          <a:ln/>
+        </p:spPr>
+        <p:txBody>
+          <a:bodyPr wrap="square" lIns="0" tIns="0" rIns="0" bIns="0" rtlCol="0" anchor="ctr"/>
+          <a:lstStyle/>
+          <a:p>
+            <a:pPr indent="0" marL="0">
+              <a:buNone/>
+            </a:pPr>
+            <a:r>
+              <a:rPr lang="en-US" sz="1400" spc="100" kern="0" dirty="0">
                 <a:solidFill>
                   <a:srgbClr val="4A6B5D"/>
                 </a:solidFill>
@@ -7731,38 +9107,41 @@
                 <a:ea typeface="Arial" pitchFamily="34" charset="-122"/>
                 <a:cs typeface="Arial" pitchFamily="34" charset="-120"/>
               </a:rPr>
-              <a:t>THE LOCK · TEN ITEMS</a:t>
-            </a:r>
-            <a:endParaRPr lang="en-US" sz="1100" dirty="0"/>
-          </a:p>
-        </p:txBody>
-      </p:sp>
-      <p:sp>
-        <p:nvSpPr>
-          <p:cNvPr id="3" name="Text 1"/>
-          <p:cNvSpPr/>
-          <p:nvPr/>
-        </p:nvSpPr>
-        <p:spPr>
-          <a:xfrm>
-            <a:off x="6793992" y="457200"/>
-            <a:ext cx="4572000" cy="274320"/>
-          </a:xfrm>
-          <a:prstGeom prst="rect">
-            <a:avLst/>
-          </a:prstGeom>
-          <a:noFill/>
-          <a:ln/>
-        </p:spPr>
-        <p:txBody>
-          <a:bodyPr wrap="square" lIns="0" tIns="0" rIns="0" bIns="0" rtlCol="0" anchor="ctr"/>
-          <a:lstStyle/>
-          <a:p>
-            <a:pPr algn="r" indent="0" marL="0">
-              <a:buNone/>
-            </a:pPr>
-            <a:r>
-              <a:rPr lang="en-US" sz="1100" b="1" spc="250" kern="0" dirty="0">
+              <a:t>Cambridge Scheme of Work, Component 2 Section A</a:t>
+            </a:r>
+            <a:endParaRPr lang="en-US" sz="1400" dirty="0"/>
+          </a:p>
+        </p:txBody>
+      </p:sp>
+      <p:sp>
+        <p:nvSpPr>
+          <p:cNvPr id="6" name="Text 4"/>
+          <p:cNvSpPr/>
+          <p:nvPr/>
+        </p:nvSpPr>
+        <p:spPr>
+          <a:xfrm>
+            <a:off x="822960" y="5806440"/>
+            <a:ext cx="10424160" cy="640080"/>
+          </a:xfrm>
+          <a:prstGeom prst="rect">
+            <a:avLst/>
+          </a:prstGeom>
+          <a:noFill/>
+          <a:ln/>
+        </p:spPr>
+        <p:txBody>
+          <a:bodyPr wrap="square" lIns="0" tIns="0" rIns="0" bIns="0" rtlCol="0" anchor="t"/>
+          <a:lstStyle/>
+          <a:p>
+            <a:pPr indent="0" marL="0">
+              <a:lnSpc>
+                <a:spcPts val="1900"/>
+              </a:lnSpc>
+              <a:buNone/>
+            </a:pPr>
+            <a:r>
+              <a:rPr lang="en-US" sz="1200" b="1" spc="100" kern="0" dirty="0">
                 <a:solidFill>
                   <a:srgbClr val="7A7F72"/>
                 </a:solidFill>
@@ -7770,1369 +9149,26 @@
                 <a:ea typeface="Arial" pitchFamily="34" charset="-122"/>
                 <a:cs typeface="Arial" pitchFamily="34" charset="-120"/>
               </a:rPr>
-              <a:t>DESCRIBE, QUESTION, SUGGEST</a:t>
-            </a:r>
-            <a:endParaRPr lang="en-US" sz="1100" dirty="0"/>
-          </a:p>
-        </p:txBody>
-      </p:sp>
-      <p:sp>
-        <p:nvSpPr>
-          <p:cNvPr id="4" name="Shape 2"/>
-          <p:cNvSpPr/>
-          <p:nvPr/>
-        </p:nvSpPr>
-        <p:spPr>
-          <a:xfrm>
-            <a:off x="822960" y="786384"/>
-            <a:ext cx="10543032" cy="0"/>
-          </a:xfrm>
-          <a:prstGeom prst="line">
-            <a:avLst/>
-          </a:prstGeom>
-          <a:noFill/>
-          <a:ln w="9525">
-            <a:solidFill>
-              <a:srgbClr val="D9D4C4"/>
-            </a:solidFill>
-            <a:prstDash val="solid"/>
-          </a:ln>
-        </p:spPr>
-      </p:sp>
-      <p:sp>
-        <p:nvSpPr>
-          <p:cNvPr id="5" name="Text 3"/>
-          <p:cNvSpPr/>
-          <p:nvPr/>
-        </p:nvSpPr>
-        <p:spPr>
-          <a:xfrm>
-            <a:off x="822960" y="932688"/>
-            <a:ext cx="10543032" cy="640080"/>
-          </a:xfrm>
-          <a:prstGeom prst="rect">
-            <a:avLst/>
-          </a:prstGeom>
-          <a:noFill/>
-          <a:ln/>
-        </p:spPr>
-        <p:txBody>
-          <a:bodyPr wrap="square" lIns="0" tIns="0" rIns="0" bIns="0" rtlCol="0" anchor="ctr"/>
-          <a:lstStyle/>
-          <a:p>
-            <a:pPr indent="0" marL="0">
-              <a:buNone/>
-            </a:pPr>
-            <a:r>
-              <a:rPr lang="en-US" sz="3200" dirty="0">
-                <a:solidFill>
-                  <a:srgbClr val="24313F"/>
-                </a:solidFill>
-                <a:latin typeface="Georgia" pitchFamily="34" charset="0"/>
-                <a:ea typeface="Georgia" pitchFamily="34" charset="-122"/>
-                <a:cs typeface="Georgia" pitchFamily="34" charset="-120"/>
-              </a:rPr>
-              <a:t>The shootability checklist</a:t>
-            </a:r>
-            <a:endParaRPr lang="en-US" sz="3200" dirty="0"/>
-          </a:p>
-        </p:txBody>
-      </p:sp>
-      <p:sp>
-        <p:nvSpPr>
-          <p:cNvPr id="6" name="Text 4"/>
-          <p:cNvSpPr/>
-          <p:nvPr/>
-        </p:nvSpPr>
-        <p:spPr>
-          <a:xfrm>
-            <a:off x="822960" y="1828800"/>
-            <a:ext cx="548640" cy="502920"/>
-          </a:xfrm>
-          <a:prstGeom prst="rect">
-            <a:avLst/>
-          </a:prstGeom>
-          <a:noFill/>
-          <a:ln/>
-        </p:spPr>
-        <p:txBody>
-          <a:bodyPr wrap="square" lIns="0" tIns="0" rIns="0" bIns="0" rtlCol="0" anchor="ctr"/>
-          <a:lstStyle/>
-          <a:p>
-            <a:pPr indent="0" marL="0">
-              <a:buNone/>
-            </a:pPr>
-            <a:r>
-              <a:rPr lang="en-US" sz="1700" dirty="0">
-                <a:solidFill>
-                  <a:srgbClr val="A3C1AD"/>
-                </a:solidFill>
-                <a:latin typeface="Georgia" pitchFamily="34" charset="0"/>
-                <a:ea typeface="Georgia" pitchFamily="34" charset="-122"/>
-                <a:cs typeface="Georgia" pitchFamily="34" charset="-120"/>
-              </a:rPr>
-              <a:t>01</a:t>
-            </a:r>
-            <a:endParaRPr lang="en-US" sz="1700" dirty="0"/>
-          </a:p>
-        </p:txBody>
-      </p:sp>
-      <p:sp>
-        <p:nvSpPr>
-          <p:cNvPr id="7" name="Text 5"/>
-          <p:cNvSpPr/>
-          <p:nvPr/>
-        </p:nvSpPr>
-        <p:spPr>
-          <a:xfrm>
-            <a:off x="1371600" y="1828800"/>
-            <a:ext cx="3154680" cy="502920"/>
-          </a:xfrm>
-          <a:prstGeom prst="rect">
-            <a:avLst/>
-          </a:prstGeom>
-          <a:noFill/>
-          <a:ln/>
-        </p:spPr>
-        <p:txBody>
-          <a:bodyPr wrap="square" lIns="0" tIns="0" rIns="0" bIns="0" rtlCol="0" anchor="ctr"/>
-          <a:lstStyle/>
-          <a:p>
-            <a:pPr indent="0" marL="0">
-              <a:buNone/>
-            </a:pPr>
-            <a:r>
-              <a:rPr lang="en-US" sz="1450" dirty="0">
-                <a:solidFill>
-                  <a:srgbClr val="24313F"/>
-                </a:solidFill>
-                <a:latin typeface="Georgia" pitchFamily="34" charset="0"/>
-                <a:ea typeface="Georgia" pitchFamily="34" charset="-122"/>
-                <a:cs typeface="Georgia" pitchFamily="34" charset="-120"/>
-              </a:rPr>
-              <a:t>Numbered shots</a:t>
-            </a:r>
-            <a:endParaRPr lang="en-US" sz="1450" dirty="0"/>
-          </a:p>
-        </p:txBody>
-      </p:sp>
-      <p:sp>
-        <p:nvSpPr>
-          <p:cNvPr id="8" name="Shape 6"/>
-          <p:cNvSpPr/>
-          <p:nvPr/>
-        </p:nvSpPr>
-        <p:spPr>
-          <a:xfrm>
-            <a:off x="822960" y="2377440"/>
-            <a:ext cx="3611880" cy="0"/>
-          </a:xfrm>
-          <a:prstGeom prst="line">
-            <a:avLst/>
-          </a:prstGeom>
-          <a:noFill/>
-          <a:ln w="9525">
-            <a:solidFill>
-              <a:srgbClr val="D9D4C4"/>
-            </a:solidFill>
-            <a:prstDash val="solid"/>
-          </a:ln>
-        </p:spPr>
-      </p:sp>
-      <p:sp>
-        <p:nvSpPr>
-          <p:cNvPr id="9" name="Text 7"/>
-          <p:cNvSpPr/>
-          <p:nvPr/>
-        </p:nvSpPr>
-        <p:spPr>
-          <a:xfrm>
-            <a:off x="822960" y="2487168"/>
-            <a:ext cx="548640" cy="502920"/>
-          </a:xfrm>
-          <a:prstGeom prst="rect">
-            <a:avLst/>
-          </a:prstGeom>
-          <a:noFill/>
-          <a:ln/>
-        </p:spPr>
-        <p:txBody>
-          <a:bodyPr wrap="square" lIns="0" tIns="0" rIns="0" bIns="0" rtlCol="0" anchor="ctr"/>
-          <a:lstStyle/>
-          <a:p>
-            <a:pPr indent="0" marL="0">
-              <a:buNone/>
-            </a:pPr>
-            <a:r>
-              <a:rPr lang="en-US" sz="1700" dirty="0">
-                <a:solidFill>
-                  <a:srgbClr val="A3C1AD"/>
-                </a:solidFill>
-                <a:latin typeface="Georgia" pitchFamily="34" charset="0"/>
-                <a:ea typeface="Georgia" pitchFamily="34" charset="-122"/>
-                <a:cs typeface="Georgia" pitchFamily="34" charset="-120"/>
-              </a:rPr>
-              <a:t>02</a:t>
-            </a:r>
-            <a:endParaRPr lang="en-US" sz="1700" dirty="0"/>
-          </a:p>
-        </p:txBody>
-      </p:sp>
-      <p:sp>
-        <p:nvSpPr>
-          <p:cNvPr id="10" name="Text 8"/>
-          <p:cNvSpPr/>
-          <p:nvPr/>
-        </p:nvSpPr>
-        <p:spPr>
-          <a:xfrm>
-            <a:off x="1371600" y="2487168"/>
-            <a:ext cx="3154680" cy="502920"/>
-          </a:xfrm>
-          <a:prstGeom prst="rect">
-            <a:avLst/>
-          </a:prstGeom>
-          <a:noFill/>
-          <a:ln/>
-        </p:spPr>
-        <p:txBody>
-          <a:bodyPr wrap="square" lIns="0" tIns="0" rIns="0" bIns="0" rtlCol="0" anchor="ctr"/>
-          <a:lstStyle/>
-          <a:p>
-            <a:pPr indent="0" marL="0">
-              <a:buNone/>
-            </a:pPr>
-            <a:r>
-              <a:rPr lang="en-US" sz="1450" dirty="0">
-                <a:solidFill>
-                  <a:srgbClr val="24313F"/>
-                </a:solidFill>
-                <a:latin typeface="Georgia" pitchFamily="34" charset="0"/>
-                <a:ea typeface="Georgia" pitchFamily="34" charset="-122"/>
-                <a:cs typeface="Georgia" pitchFamily="34" charset="-120"/>
-              </a:rPr>
-              <a:t>Confirmed locations</a:t>
-            </a:r>
-            <a:endParaRPr lang="en-US" sz="1450" dirty="0"/>
-          </a:p>
-        </p:txBody>
-      </p:sp>
-      <p:sp>
-        <p:nvSpPr>
-          <p:cNvPr id="11" name="Shape 9"/>
-          <p:cNvSpPr/>
-          <p:nvPr/>
-        </p:nvSpPr>
-        <p:spPr>
-          <a:xfrm>
-            <a:off x="822960" y="3035808"/>
-            <a:ext cx="3611880" cy="0"/>
-          </a:xfrm>
-          <a:prstGeom prst="line">
-            <a:avLst/>
-          </a:prstGeom>
-          <a:noFill/>
-          <a:ln w="9525">
-            <a:solidFill>
-              <a:srgbClr val="D9D4C4"/>
-            </a:solidFill>
-            <a:prstDash val="solid"/>
-          </a:ln>
-        </p:spPr>
-      </p:sp>
-      <p:sp>
-        <p:nvSpPr>
-          <p:cNvPr id="12" name="Text 10"/>
-          <p:cNvSpPr/>
-          <p:nvPr/>
-        </p:nvSpPr>
-        <p:spPr>
-          <a:xfrm>
-            <a:off x="822960" y="3145536"/>
-            <a:ext cx="548640" cy="502920"/>
-          </a:xfrm>
-          <a:prstGeom prst="rect">
-            <a:avLst/>
-          </a:prstGeom>
-          <a:noFill/>
-          <a:ln/>
-        </p:spPr>
-        <p:txBody>
-          <a:bodyPr wrap="square" lIns="0" tIns="0" rIns="0" bIns="0" rtlCol="0" anchor="ctr"/>
-          <a:lstStyle/>
-          <a:p>
-            <a:pPr indent="0" marL="0">
-              <a:buNone/>
-            </a:pPr>
-            <a:r>
-              <a:rPr lang="en-US" sz="1700" dirty="0">
-                <a:solidFill>
-                  <a:srgbClr val="A3C1AD"/>
-                </a:solidFill>
-                <a:latin typeface="Georgia" pitchFamily="34" charset="0"/>
-                <a:ea typeface="Georgia" pitchFamily="34" charset="-122"/>
-                <a:cs typeface="Georgia" pitchFamily="34" charset="-120"/>
-              </a:rPr>
-              <a:t>03</a:t>
-            </a:r>
-            <a:endParaRPr lang="en-US" sz="1700" dirty="0"/>
-          </a:p>
-        </p:txBody>
-      </p:sp>
-      <p:sp>
-        <p:nvSpPr>
-          <p:cNvPr id="13" name="Text 11"/>
-          <p:cNvSpPr/>
-          <p:nvPr/>
-        </p:nvSpPr>
-        <p:spPr>
-          <a:xfrm>
-            <a:off x="1371600" y="3145536"/>
-            <a:ext cx="3154680" cy="502920"/>
-          </a:xfrm>
-          <a:prstGeom prst="rect">
-            <a:avLst/>
-          </a:prstGeom>
-          <a:noFill/>
-          <a:ln/>
-        </p:spPr>
-        <p:txBody>
-          <a:bodyPr wrap="square" lIns="0" tIns="0" rIns="0" bIns="0" rtlCol="0" anchor="ctr"/>
-          <a:lstStyle/>
-          <a:p>
-            <a:pPr indent="0" marL="0">
-              <a:buNone/>
-            </a:pPr>
-            <a:r>
-              <a:rPr lang="en-US" sz="1450" dirty="0">
-                <a:solidFill>
-                  <a:srgbClr val="24313F"/>
-                </a:solidFill>
-                <a:latin typeface="Georgia" pitchFamily="34" charset="0"/>
-                <a:ea typeface="Georgia" pitchFamily="34" charset="-122"/>
-                <a:cs typeface="Georgia" pitchFamily="34" charset="-120"/>
-              </a:rPr>
-              <a:t>Cast attached to dates</a:t>
-            </a:r>
-            <a:endParaRPr lang="en-US" sz="1450" dirty="0"/>
-          </a:p>
-        </p:txBody>
-      </p:sp>
-      <p:sp>
-        <p:nvSpPr>
-          <p:cNvPr id="14" name="Shape 12"/>
-          <p:cNvSpPr/>
-          <p:nvPr/>
-        </p:nvSpPr>
-        <p:spPr>
-          <a:xfrm>
-            <a:off x="822960" y="3694176"/>
-            <a:ext cx="3611880" cy="0"/>
-          </a:xfrm>
-          <a:prstGeom prst="line">
-            <a:avLst/>
-          </a:prstGeom>
-          <a:noFill/>
-          <a:ln w="9525">
-            <a:solidFill>
-              <a:srgbClr val="D9D4C4"/>
-            </a:solidFill>
-            <a:prstDash val="solid"/>
-          </a:ln>
-        </p:spPr>
-      </p:sp>
-      <p:sp>
-        <p:nvSpPr>
-          <p:cNvPr id="15" name="Text 13"/>
-          <p:cNvSpPr/>
-          <p:nvPr/>
-        </p:nvSpPr>
-        <p:spPr>
-          <a:xfrm>
-            <a:off x="822960" y="3803904"/>
-            <a:ext cx="548640" cy="502920"/>
-          </a:xfrm>
-          <a:prstGeom prst="rect">
-            <a:avLst/>
-          </a:prstGeom>
-          <a:noFill/>
-          <a:ln/>
-        </p:spPr>
-        <p:txBody>
-          <a:bodyPr wrap="square" lIns="0" tIns="0" rIns="0" bIns="0" rtlCol="0" anchor="ctr"/>
-          <a:lstStyle/>
-          <a:p>
-            <a:pPr indent="0" marL="0">
-              <a:buNone/>
-            </a:pPr>
-            <a:r>
-              <a:rPr lang="en-US" sz="1700" dirty="0">
-                <a:solidFill>
-                  <a:srgbClr val="A3C1AD"/>
-                </a:solidFill>
-                <a:latin typeface="Georgia" pitchFamily="34" charset="0"/>
-                <a:ea typeface="Georgia" pitchFamily="34" charset="-122"/>
-                <a:cs typeface="Georgia" pitchFamily="34" charset="-120"/>
-              </a:rPr>
-              <a:t>04</a:t>
-            </a:r>
-            <a:endParaRPr lang="en-US" sz="1700" dirty="0"/>
-          </a:p>
-        </p:txBody>
-      </p:sp>
-      <p:sp>
-        <p:nvSpPr>
-          <p:cNvPr id="16" name="Text 14"/>
-          <p:cNvSpPr/>
-          <p:nvPr/>
-        </p:nvSpPr>
-        <p:spPr>
-          <a:xfrm>
-            <a:off x="1371600" y="3803904"/>
-            <a:ext cx="3154680" cy="502920"/>
-          </a:xfrm>
-          <a:prstGeom prst="rect">
-            <a:avLst/>
-          </a:prstGeom>
-          <a:noFill/>
-          <a:ln/>
-        </p:spPr>
-        <p:txBody>
-          <a:bodyPr wrap="square" lIns="0" tIns="0" rIns="0" bIns="0" rtlCol="0" anchor="ctr"/>
-          <a:lstStyle/>
-          <a:p>
-            <a:pPr indent="0" marL="0">
-              <a:buNone/>
-            </a:pPr>
-            <a:r>
-              <a:rPr lang="en-US" sz="1450" dirty="0">
-                <a:solidFill>
-                  <a:srgbClr val="24313F"/>
-                </a:solidFill>
-                <a:latin typeface="Georgia" pitchFamily="34" charset="0"/>
-                <a:ea typeface="Georgia" pitchFamily="34" charset="-122"/>
-                <a:cs typeface="Georgia" pitchFamily="34" charset="-120"/>
-              </a:rPr>
-              <a:t>Equipment per session</a:t>
-            </a:r>
-            <a:endParaRPr lang="en-US" sz="1450" dirty="0"/>
-          </a:p>
-        </p:txBody>
-      </p:sp>
-      <p:sp>
-        <p:nvSpPr>
-          <p:cNvPr id="17" name="Shape 15"/>
-          <p:cNvSpPr/>
-          <p:nvPr/>
-        </p:nvSpPr>
-        <p:spPr>
-          <a:xfrm>
-            <a:off x="822960" y="4352544"/>
-            <a:ext cx="3611880" cy="0"/>
-          </a:xfrm>
-          <a:prstGeom prst="line">
-            <a:avLst/>
-          </a:prstGeom>
-          <a:noFill/>
-          <a:ln w="9525">
-            <a:solidFill>
-              <a:srgbClr val="D9D4C4"/>
-            </a:solidFill>
-            <a:prstDash val="solid"/>
-          </a:ln>
-        </p:spPr>
-      </p:sp>
-      <p:sp>
-        <p:nvSpPr>
-          <p:cNvPr id="18" name="Text 16"/>
-          <p:cNvSpPr/>
-          <p:nvPr/>
-        </p:nvSpPr>
-        <p:spPr>
-          <a:xfrm>
-            <a:off x="822960" y="4462272"/>
-            <a:ext cx="548640" cy="502920"/>
-          </a:xfrm>
-          <a:prstGeom prst="rect">
-            <a:avLst/>
-          </a:prstGeom>
-          <a:noFill/>
-          <a:ln/>
-        </p:spPr>
-        <p:txBody>
-          <a:bodyPr wrap="square" lIns="0" tIns="0" rIns="0" bIns="0" rtlCol="0" anchor="ctr"/>
-          <a:lstStyle/>
-          <a:p>
-            <a:pPr indent="0" marL="0">
-              <a:buNone/>
-            </a:pPr>
-            <a:r>
-              <a:rPr lang="en-US" sz="1700" dirty="0">
-                <a:solidFill>
-                  <a:srgbClr val="A3C1AD"/>
-                </a:solidFill>
-                <a:latin typeface="Georgia" pitchFamily="34" charset="0"/>
-                <a:ea typeface="Georgia" pitchFamily="34" charset="-122"/>
-                <a:cs typeface="Georgia" pitchFamily="34" charset="-120"/>
-              </a:rPr>
-              <a:t>05</a:t>
-            </a:r>
-            <a:endParaRPr lang="en-US" sz="1700" dirty="0"/>
-          </a:p>
-        </p:txBody>
-      </p:sp>
-      <p:sp>
-        <p:nvSpPr>
-          <p:cNvPr id="19" name="Text 17"/>
-          <p:cNvSpPr/>
-          <p:nvPr/>
-        </p:nvSpPr>
-        <p:spPr>
-          <a:xfrm>
-            <a:off x="1371600" y="4462272"/>
-            <a:ext cx="3154680" cy="502920"/>
-          </a:xfrm>
-          <a:prstGeom prst="rect">
-            <a:avLst/>
-          </a:prstGeom>
-          <a:noFill/>
-          <a:ln/>
-        </p:spPr>
-        <p:txBody>
-          <a:bodyPr wrap="square" lIns="0" tIns="0" rIns="0" bIns="0" rtlCol="0" anchor="ctr"/>
-          <a:lstStyle/>
-          <a:p>
-            <a:pPr indent="0" marL="0">
-              <a:buNone/>
-            </a:pPr>
-            <a:r>
-              <a:rPr lang="en-US" sz="1450" dirty="0">
-                <a:solidFill>
-                  <a:srgbClr val="24313F"/>
-                </a:solidFill>
-                <a:latin typeface="Georgia" pitchFamily="34" charset="0"/>
-                <a:ea typeface="Georgia" pitchFamily="34" charset="-122"/>
-                <a:cs typeface="Georgia" pitchFamily="34" charset="-120"/>
-              </a:rPr>
-              <a:t>A contingency day</a:t>
-            </a:r>
-            <a:endParaRPr lang="en-US" sz="1450" dirty="0"/>
-          </a:p>
-        </p:txBody>
-      </p:sp>
-      <p:sp>
-        <p:nvSpPr>
-          <p:cNvPr id="20" name="Shape 18"/>
-          <p:cNvSpPr/>
-          <p:nvPr/>
-        </p:nvSpPr>
-        <p:spPr>
-          <a:xfrm>
-            <a:off x="822960" y="5010912"/>
-            <a:ext cx="3611880" cy="0"/>
-          </a:xfrm>
-          <a:prstGeom prst="line">
-            <a:avLst/>
-          </a:prstGeom>
-          <a:noFill/>
-          <a:ln w="9525">
-            <a:solidFill>
-              <a:srgbClr val="D9D4C4"/>
-            </a:solidFill>
-            <a:prstDash val="solid"/>
-          </a:ln>
-        </p:spPr>
-      </p:sp>
-      <p:sp>
-        <p:nvSpPr>
-          <p:cNvPr id="21" name="Text 19"/>
-          <p:cNvSpPr/>
-          <p:nvPr/>
-        </p:nvSpPr>
-        <p:spPr>
-          <a:xfrm>
-            <a:off x="4754880" y="1828800"/>
-            <a:ext cx="548640" cy="502920"/>
-          </a:xfrm>
-          <a:prstGeom prst="rect">
-            <a:avLst/>
-          </a:prstGeom>
-          <a:noFill/>
-          <a:ln/>
-        </p:spPr>
-        <p:txBody>
-          <a:bodyPr wrap="square" lIns="0" tIns="0" rIns="0" bIns="0" rtlCol="0" anchor="ctr"/>
-          <a:lstStyle/>
-          <a:p>
-            <a:pPr indent="0" marL="0">
-              <a:buNone/>
-            </a:pPr>
-            <a:r>
-              <a:rPr lang="en-US" sz="1700" dirty="0">
-                <a:solidFill>
-                  <a:srgbClr val="A3C1AD"/>
-                </a:solidFill>
-                <a:latin typeface="Georgia" pitchFamily="34" charset="0"/>
-                <a:ea typeface="Georgia" pitchFamily="34" charset="-122"/>
-                <a:cs typeface="Georgia" pitchFamily="34" charset="-120"/>
-              </a:rPr>
-              <a:t>06</a:t>
-            </a:r>
-            <a:endParaRPr lang="en-US" sz="1700" dirty="0"/>
-          </a:p>
-        </p:txBody>
-      </p:sp>
-      <p:sp>
-        <p:nvSpPr>
-          <p:cNvPr id="22" name="Text 20"/>
-          <p:cNvSpPr/>
-          <p:nvPr/>
-        </p:nvSpPr>
-        <p:spPr>
-          <a:xfrm>
-            <a:off x="5303520" y="1828800"/>
-            <a:ext cx="3154680" cy="502920"/>
-          </a:xfrm>
-          <a:prstGeom prst="rect">
-            <a:avLst/>
-          </a:prstGeom>
-          <a:noFill/>
-          <a:ln/>
-        </p:spPr>
-        <p:txBody>
-          <a:bodyPr wrap="square" lIns="0" tIns="0" rIns="0" bIns="0" rtlCol="0" anchor="ctr"/>
-          <a:lstStyle/>
-          <a:p>
-            <a:pPr indent="0" marL="0">
-              <a:buNone/>
-            </a:pPr>
-            <a:r>
-              <a:rPr lang="en-US" sz="1450" dirty="0">
-                <a:solidFill>
-                  <a:srgbClr val="24313F"/>
-                </a:solidFill>
-                <a:latin typeface="Georgia" pitchFamily="34" charset="0"/>
-                <a:ea typeface="Georgia" pitchFamily="34" charset="-122"/>
-                <a:cs typeface="Georgia" pitchFamily="34" charset="-120"/>
-              </a:rPr>
-              <a:t>Assigned roles</a:t>
-            </a:r>
-            <a:endParaRPr lang="en-US" sz="1450" dirty="0"/>
-          </a:p>
-        </p:txBody>
-      </p:sp>
-      <p:sp>
-        <p:nvSpPr>
-          <p:cNvPr id="23" name="Shape 21"/>
-          <p:cNvSpPr/>
-          <p:nvPr/>
-        </p:nvSpPr>
-        <p:spPr>
-          <a:xfrm>
-            <a:off x="4754880" y="2377440"/>
-            <a:ext cx="3611880" cy="0"/>
-          </a:xfrm>
-          <a:prstGeom prst="line">
-            <a:avLst/>
-          </a:prstGeom>
-          <a:noFill/>
-          <a:ln w="9525">
-            <a:solidFill>
-              <a:srgbClr val="D9D4C4"/>
-            </a:solidFill>
-            <a:prstDash val="solid"/>
-          </a:ln>
-        </p:spPr>
-      </p:sp>
-      <p:sp>
-        <p:nvSpPr>
-          <p:cNvPr id="24" name="Text 22"/>
-          <p:cNvSpPr/>
-          <p:nvPr/>
-        </p:nvSpPr>
-        <p:spPr>
-          <a:xfrm>
-            <a:off x="4754880" y="2487168"/>
-            <a:ext cx="548640" cy="502920"/>
-          </a:xfrm>
-          <a:prstGeom prst="rect">
-            <a:avLst/>
-          </a:prstGeom>
-          <a:noFill/>
-          <a:ln/>
-        </p:spPr>
-        <p:txBody>
-          <a:bodyPr wrap="square" lIns="0" tIns="0" rIns="0" bIns="0" rtlCol="0" anchor="ctr"/>
-          <a:lstStyle/>
-          <a:p>
-            <a:pPr indent="0" marL="0">
-              <a:buNone/>
-            </a:pPr>
-            <a:r>
-              <a:rPr lang="en-US" sz="1700" dirty="0">
-                <a:solidFill>
-                  <a:srgbClr val="A3C1AD"/>
-                </a:solidFill>
-                <a:latin typeface="Georgia" pitchFamily="34" charset="0"/>
-                <a:ea typeface="Georgia" pitchFamily="34" charset="-122"/>
-                <a:cs typeface="Georgia" pitchFamily="34" charset="-120"/>
-              </a:rPr>
-              <a:t>07</a:t>
-            </a:r>
-            <a:endParaRPr lang="en-US" sz="1700" dirty="0"/>
-          </a:p>
-        </p:txBody>
-      </p:sp>
-      <p:sp>
-        <p:nvSpPr>
-          <p:cNvPr id="25" name="Text 23"/>
-          <p:cNvSpPr/>
-          <p:nvPr/>
-        </p:nvSpPr>
-        <p:spPr>
-          <a:xfrm>
-            <a:off x="5303520" y="2487168"/>
-            <a:ext cx="3154680" cy="502920"/>
-          </a:xfrm>
-          <a:prstGeom prst="rect">
-            <a:avLst/>
-          </a:prstGeom>
-          <a:noFill/>
-          <a:ln/>
-        </p:spPr>
-        <p:txBody>
-          <a:bodyPr wrap="square" lIns="0" tIns="0" rIns="0" bIns="0" rtlCol="0" anchor="ctr"/>
-          <a:lstStyle/>
-          <a:p>
-            <a:pPr indent="0" marL="0">
-              <a:buNone/>
-            </a:pPr>
-            <a:r>
-              <a:rPr lang="en-US" sz="1450" dirty="0">
-                <a:solidFill>
-                  <a:srgbClr val="24313F"/>
-                </a:solidFill>
-                <a:latin typeface="Georgia" pitchFamily="34" charset="0"/>
-                <a:ea typeface="Georgia" pitchFamily="34" charset="-122"/>
-                <a:cs typeface="Georgia" pitchFamily="34" charset="-120"/>
-              </a:rPr>
-              <a:t>Costume and props</a:t>
-            </a:r>
-            <a:endParaRPr lang="en-US" sz="1450" dirty="0"/>
-          </a:p>
-        </p:txBody>
-      </p:sp>
-      <p:sp>
-        <p:nvSpPr>
-          <p:cNvPr id="26" name="Shape 24"/>
-          <p:cNvSpPr/>
-          <p:nvPr/>
-        </p:nvSpPr>
-        <p:spPr>
-          <a:xfrm>
-            <a:off x="4754880" y="3035808"/>
-            <a:ext cx="3611880" cy="0"/>
-          </a:xfrm>
-          <a:prstGeom prst="line">
-            <a:avLst/>
-          </a:prstGeom>
-          <a:noFill/>
-          <a:ln w="9525">
-            <a:solidFill>
-              <a:srgbClr val="D9D4C4"/>
-            </a:solidFill>
-            <a:prstDash val="solid"/>
-          </a:ln>
-        </p:spPr>
-      </p:sp>
-      <p:sp>
-        <p:nvSpPr>
-          <p:cNvPr id="27" name="Text 25"/>
-          <p:cNvSpPr/>
-          <p:nvPr/>
-        </p:nvSpPr>
-        <p:spPr>
-          <a:xfrm>
-            <a:off x="4754880" y="3145536"/>
-            <a:ext cx="548640" cy="502920"/>
-          </a:xfrm>
-          <a:prstGeom prst="rect">
-            <a:avLst/>
-          </a:prstGeom>
-          <a:noFill/>
-          <a:ln/>
-        </p:spPr>
-        <p:txBody>
-          <a:bodyPr wrap="square" lIns="0" tIns="0" rIns="0" bIns="0" rtlCol="0" anchor="ctr"/>
-          <a:lstStyle/>
-          <a:p>
-            <a:pPr indent="0" marL="0">
-              <a:buNone/>
-            </a:pPr>
-            <a:r>
-              <a:rPr lang="en-US" sz="1700" dirty="0">
-                <a:solidFill>
-                  <a:srgbClr val="A3C1AD"/>
-                </a:solidFill>
-                <a:latin typeface="Georgia" pitchFamily="34" charset="0"/>
-                <a:ea typeface="Georgia" pitchFamily="34" charset="-122"/>
-                <a:cs typeface="Georgia" pitchFamily="34" charset="-120"/>
-              </a:rPr>
-              <a:t>08</a:t>
-            </a:r>
-            <a:endParaRPr lang="en-US" sz="1700" dirty="0"/>
-          </a:p>
-        </p:txBody>
-      </p:sp>
-      <p:sp>
-        <p:nvSpPr>
-          <p:cNvPr id="28" name="Text 26"/>
-          <p:cNvSpPr/>
-          <p:nvPr/>
-        </p:nvSpPr>
-        <p:spPr>
-          <a:xfrm>
-            <a:off x="5303520" y="3145536"/>
-            <a:ext cx="3154680" cy="502920"/>
-          </a:xfrm>
-          <a:prstGeom prst="rect">
-            <a:avLst/>
-          </a:prstGeom>
-          <a:noFill/>
-          <a:ln/>
-        </p:spPr>
-        <p:txBody>
-          <a:bodyPr wrap="square" lIns="0" tIns="0" rIns="0" bIns="0" rtlCol="0" anchor="ctr"/>
-          <a:lstStyle/>
-          <a:p>
-            <a:pPr indent="0" marL="0">
-              <a:buNone/>
-            </a:pPr>
-            <a:r>
-              <a:rPr lang="en-US" sz="1450" dirty="0">
-                <a:solidFill>
-                  <a:srgbClr val="24313F"/>
-                </a:solidFill>
-                <a:latin typeface="Georgia" pitchFamily="34" charset="0"/>
-                <a:ea typeface="Georgia" pitchFamily="34" charset="-122"/>
-                <a:cs typeface="Georgia" pitchFamily="34" charset="-120"/>
-              </a:rPr>
-              <a:t>Storyboard matches shot list</a:t>
-            </a:r>
-            <a:endParaRPr lang="en-US" sz="1450" dirty="0"/>
-          </a:p>
-        </p:txBody>
-      </p:sp>
-      <p:sp>
-        <p:nvSpPr>
-          <p:cNvPr id="29" name="Shape 27"/>
-          <p:cNvSpPr/>
-          <p:nvPr/>
-        </p:nvSpPr>
-        <p:spPr>
-          <a:xfrm>
-            <a:off x="4754880" y="3694176"/>
-            <a:ext cx="3611880" cy="0"/>
-          </a:xfrm>
-          <a:prstGeom prst="line">
-            <a:avLst/>
-          </a:prstGeom>
-          <a:noFill/>
-          <a:ln w="9525">
-            <a:solidFill>
-              <a:srgbClr val="D9D4C4"/>
-            </a:solidFill>
-            <a:prstDash val="solid"/>
-          </a:ln>
-        </p:spPr>
-      </p:sp>
-      <p:sp>
-        <p:nvSpPr>
-          <p:cNvPr id="30" name="Text 28"/>
-          <p:cNvSpPr/>
-          <p:nvPr/>
-        </p:nvSpPr>
-        <p:spPr>
-          <a:xfrm>
-            <a:off x="4754880" y="3803904"/>
-            <a:ext cx="548640" cy="502920"/>
-          </a:xfrm>
-          <a:prstGeom prst="rect">
-            <a:avLst/>
-          </a:prstGeom>
-          <a:noFill/>
-          <a:ln/>
-        </p:spPr>
-        <p:txBody>
-          <a:bodyPr wrap="square" lIns="0" tIns="0" rIns="0" bIns="0" rtlCol="0" anchor="ctr"/>
-          <a:lstStyle/>
-          <a:p>
-            <a:pPr indent="0" marL="0">
-              <a:buNone/>
-            </a:pPr>
-            <a:r>
-              <a:rPr lang="en-US" sz="1700" dirty="0">
-                <a:solidFill>
-                  <a:srgbClr val="A3C1AD"/>
-                </a:solidFill>
-                <a:latin typeface="Georgia" pitchFamily="34" charset="0"/>
-                <a:ea typeface="Georgia" pitchFamily="34" charset="-122"/>
-                <a:cs typeface="Georgia" pitchFamily="34" charset="-120"/>
-              </a:rPr>
-              <a:t>09</a:t>
-            </a:r>
-            <a:endParaRPr lang="en-US" sz="1700" dirty="0"/>
-          </a:p>
-        </p:txBody>
-      </p:sp>
-      <p:sp>
-        <p:nvSpPr>
-          <p:cNvPr id="31" name="Text 29"/>
-          <p:cNvSpPr/>
-          <p:nvPr/>
-        </p:nvSpPr>
-        <p:spPr>
-          <a:xfrm>
-            <a:off x="5303520" y="3803904"/>
-            <a:ext cx="3154680" cy="502920"/>
-          </a:xfrm>
-          <a:prstGeom prst="rect">
-            <a:avLst/>
-          </a:prstGeom>
-          <a:noFill/>
-          <a:ln/>
-        </p:spPr>
-        <p:txBody>
-          <a:bodyPr wrap="square" lIns="0" tIns="0" rIns="0" bIns="0" rtlCol="0" anchor="ctr"/>
-          <a:lstStyle/>
-          <a:p>
-            <a:pPr indent="0" marL="0">
-              <a:buNone/>
-            </a:pPr>
-            <a:r>
-              <a:rPr lang="en-US" sz="1450" dirty="0">
-                <a:solidFill>
-                  <a:srgbClr val="24313F"/>
-                </a:solidFill>
-                <a:latin typeface="Georgia" pitchFamily="34" charset="0"/>
-                <a:ea typeface="Georgia" pitchFamily="34" charset="-122"/>
-                <a:cs typeface="Georgia" pitchFamily="34" charset="-120"/>
-              </a:rPr>
-              <a:t>Schedule fits the break</a:t>
-            </a:r>
-            <a:endParaRPr lang="en-US" sz="1450" dirty="0"/>
-          </a:p>
-        </p:txBody>
-      </p:sp>
-      <p:sp>
-        <p:nvSpPr>
-          <p:cNvPr id="32" name="Shape 30"/>
-          <p:cNvSpPr/>
-          <p:nvPr/>
-        </p:nvSpPr>
-        <p:spPr>
-          <a:xfrm>
-            <a:off x="4754880" y="4352544"/>
-            <a:ext cx="3611880" cy="0"/>
-          </a:xfrm>
-          <a:prstGeom prst="line">
-            <a:avLst/>
-          </a:prstGeom>
-          <a:noFill/>
-          <a:ln w="9525">
-            <a:solidFill>
-              <a:srgbClr val="D9D4C4"/>
-            </a:solidFill>
-            <a:prstDash val="solid"/>
-          </a:ln>
-        </p:spPr>
-      </p:sp>
-      <p:sp>
-        <p:nvSpPr>
-          <p:cNvPr id="33" name="Text 31"/>
-          <p:cNvSpPr/>
-          <p:nvPr/>
-        </p:nvSpPr>
-        <p:spPr>
-          <a:xfrm>
-            <a:off x="4754880" y="4462272"/>
-            <a:ext cx="548640" cy="502920"/>
-          </a:xfrm>
-          <a:prstGeom prst="rect">
-            <a:avLst/>
-          </a:prstGeom>
-          <a:noFill/>
-          <a:ln/>
-        </p:spPr>
-        <p:txBody>
-          <a:bodyPr wrap="square" lIns="0" tIns="0" rIns="0" bIns="0" rtlCol="0" anchor="ctr"/>
-          <a:lstStyle/>
-          <a:p>
-            <a:pPr indent="0" marL="0">
-              <a:buNone/>
-            </a:pPr>
-            <a:r>
-              <a:rPr lang="en-US" sz="1700" dirty="0">
-                <a:solidFill>
-                  <a:srgbClr val="A3C1AD"/>
-                </a:solidFill>
-                <a:latin typeface="Georgia" pitchFamily="34" charset="0"/>
-                <a:ea typeface="Georgia" pitchFamily="34" charset="-122"/>
-                <a:cs typeface="Georgia" pitchFamily="34" charset="-120"/>
-              </a:rPr>
-              <a:t>10</a:t>
-            </a:r>
-            <a:endParaRPr lang="en-US" sz="1700" dirty="0"/>
-          </a:p>
-        </p:txBody>
-      </p:sp>
-      <p:sp>
-        <p:nvSpPr>
-          <p:cNvPr id="34" name="Text 32"/>
-          <p:cNvSpPr/>
-          <p:nvPr/>
-        </p:nvSpPr>
-        <p:spPr>
-          <a:xfrm>
-            <a:off x="5303520" y="4462272"/>
-            <a:ext cx="3154680" cy="502920"/>
-          </a:xfrm>
-          <a:prstGeom prst="rect">
-            <a:avLst/>
-          </a:prstGeom>
-          <a:noFill/>
-          <a:ln/>
-        </p:spPr>
-        <p:txBody>
-          <a:bodyPr wrap="square" lIns="0" tIns="0" rIns="0" bIns="0" rtlCol="0" anchor="ctr"/>
-          <a:lstStyle/>
-          <a:p>
-            <a:pPr indent="0" marL="0">
-              <a:buNone/>
-            </a:pPr>
-            <a:r>
-              <a:rPr lang="en-US" sz="1450" dirty="0">
-                <a:solidFill>
-                  <a:srgbClr val="24313F"/>
-                </a:solidFill>
-                <a:latin typeface="Georgia" pitchFamily="34" charset="0"/>
-                <a:ea typeface="Georgia" pitchFamily="34" charset="-122"/>
-                <a:cs typeface="Georgia" pitchFamily="34" charset="-120"/>
-              </a:rPr>
-              <a:t>No outside dependencies</a:t>
-            </a:r>
-            <a:endParaRPr lang="en-US" sz="1450" dirty="0"/>
-          </a:p>
-        </p:txBody>
-      </p:sp>
-      <p:sp>
-        <p:nvSpPr>
-          <p:cNvPr id="35" name="Shape 33"/>
-          <p:cNvSpPr/>
-          <p:nvPr/>
-        </p:nvSpPr>
-        <p:spPr>
-          <a:xfrm>
-            <a:off x="4754880" y="5010912"/>
-            <a:ext cx="3611880" cy="0"/>
-          </a:xfrm>
-          <a:prstGeom prst="line">
-            <a:avLst/>
-          </a:prstGeom>
-          <a:noFill/>
-          <a:ln w="9525">
-            <a:solidFill>
-              <a:srgbClr val="D9D4C4"/>
-            </a:solidFill>
-            <a:prstDash val="solid"/>
-          </a:ln>
-        </p:spPr>
-      </p:sp>
-      <p:sp>
-        <p:nvSpPr>
-          <p:cNvPr id="36" name="Shape 34"/>
-          <p:cNvSpPr/>
-          <p:nvPr/>
-        </p:nvSpPr>
-        <p:spPr>
-          <a:xfrm>
-            <a:off x="8549640" y="1417320"/>
-            <a:ext cx="2926080" cy="3977640"/>
-          </a:xfrm>
-          <a:prstGeom prst="rect">
-            <a:avLst/>
-          </a:prstGeom>
-          <a:solidFill>
-            <a:srgbClr val="FAF8F1"/>
-          </a:solidFill>
-          <a:ln w="9525">
-            <a:solidFill>
-              <a:srgbClr val="D9D4C4"/>
-            </a:solidFill>
-            <a:prstDash val="solid"/>
-          </a:ln>
-        </p:spPr>
-      </p:sp>
-      <p:pic>
-        <p:nvPicPr>
-          <p:cNvPr id="37" name="Image 0" descr="/Users/dogan/Documents/Vaults/Courses/wiki/classes/media-studies/decks/_build/img/ws68.jpg">    </p:cNvPr>
-          <p:cNvPicPr>
-            <a:picLocks noChangeAspect="1"/>
-          </p:cNvPicPr>
-          <p:nvPr/>
-        </p:nvPicPr>
-        <p:blipFill>
-          <a:blip r:embed="rId1"/>
-          <a:stretch>
-            <a:fillRect/>
-          </a:stretch>
-        </p:blipFill>
-        <p:spPr>
-          <a:xfrm>
-            <a:off x="8697627" y="1545336"/>
-            <a:ext cx="2630106" cy="3721608"/>
-          </a:xfrm>
-          <a:prstGeom prst="rect">
-            <a:avLst/>
-          </a:prstGeom>
-        </p:spPr>
-      </p:pic>
-      <p:sp>
-        <p:nvSpPr>
-          <p:cNvPr id="38" name="Text 35"/>
-          <p:cNvSpPr/>
-          <p:nvPr/>
-        </p:nvSpPr>
-        <p:spPr>
-          <a:xfrm>
-            <a:off x="8366760" y="5440680"/>
-            <a:ext cx="3291840" cy="457200"/>
-          </a:xfrm>
-          <a:prstGeom prst="rect">
-            <a:avLst/>
-          </a:prstGeom>
-          <a:noFill/>
-          <a:ln/>
-        </p:spPr>
-        <p:txBody>
-          <a:bodyPr wrap="square" lIns="0" tIns="0" rIns="0" bIns="0" rtlCol="0" anchor="t"/>
-          <a:lstStyle/>
-          <a:p>
-            <a:pPr algn="ctr" indent="0" marL="0">
+              <a:t>IN PLAIN WORDS   </a:t>
+            </a:r>
+            <a:pPr indent="0" marL="0">
               <a:lnSpc>
-                <a:spcPts val="1300"/>
+                <a:spcPts val="1900"/>
               </a:lnSpc>
               <a:buNone/>
             </a:pPr>
             <a:r>
-              <a:rPr lang="en-US" sz="1000" dirty="0">
-                <a:solidFill>
-                  <a:srgbClr val="7A7F72"/>
-                </a:solidFill>
-                <a:latin typeface="Arial" pitchFamily="34" charset="0"/>
-                <a:ea typeface="Arial" pitchFamily="34" charset="-122"/>
-                <a:cs typeface="Arial" pitchFamily="34" charset="-120"/>
-              </a:rPr>
-              <a:t>WS 6.8, the storyboard sheet the plan is drawn on</a:t>
-            </a:r>
-            <a:endParaRPr lang="en-US" sz="1000" dirty="0"/>
-          </a:p>
-        </p:txBody>
-      </p:sp>
-      <p:sp>
-        <p:nvSpPr>
-          <p:cNvPr id="39" name="Text 36"/>
-          <p:cNvSpPr/>
-          <p:nvPr/>
-        </p:nvSpPr>
-        <p:spPr>
-          <a:xfrm>
-            <a:off x="822960" y="5349240"/>
-            <a:ext cx="7498080" cy="685800"/>
-          </a:xfrm>
-          <a:prstGeom prst="rect">
-            <a:avLst/>
-          </a:prstGeom>
-          <a:noFill/>
-          <a:ln/>
-        </p:spPr>
-        <p:txBody>
-          <a:bodyPr wrap="square" lIns="0" tIns="0" rIns="0" bIns="0" rtlCol="0" anchor="t"/>
-          <a:lstStyle/>
-          <a:p>
-            <a:pPr indent="0" marL="0">
-              <a:lnSpc>
-                <a:spcPts val="1600"/>
-              </a:lnSpc>
-              <a:buNone/>
-            </a:pPr>
-            <a:r>
-              <a:rPr lang="en-US" sz="1050" b="1" spc="100" kern="0" dirty="0">
+              <a:rPr lang="en-US" sz="1400" i="1" dirty="0">
                 <a:solidFill>
                   <a:srgbClr val="4A6B5D"/>
                 </a:solidFill>
-                <a:latin typeface="Arial" pitchFamily="34" charset="0"/>
-                <a:ea typeface="Arial" pitchFamily="34" charset="-122"/>
-                <a:cs typeface="Arial" pitchFamily="34" charset="-120"/>
-              </a:rPr>
-              <a:t>THE RULE   </a:t>
-            </a:r>
-            <a:pPr indent="0" marL="0">
-              <a:lnSpc>
-                <a:spcPts val="1600"/>
-              </a:lnSpc>
-              <a:buNone/>
-            </a:pPr>
-            <a:r>
-              <a:rPr lang="en-US" sz="1250" dirty="0">
-                <a:solidFill>
-                  <a:srgbClr val="7A7F72"/>
-                </a:solidFill>
-                <a:latin typeface="Georgia" pitchFamily="34" charset="0"/>
-                <a:ea typeface="Georgia" pitchFamily="34" charset="-122"/>
-                <a:cs typeface="Georgia" pitchFamily="34" charset="-120"/>
-              </a:rPr>
-              <a:t>Ten green lights, or the plan does not pass. Locked means locked.</a:t>
-            </a:r>
-            <a:endParaRPr lang="en-US" sz="1050" dirty="0"/>
-          </a:p>
-          <a:p>
-            <a:pPr indent="0" marL="0">
-              <a:lnSpc>
-                <a:spcPts val="1600"/>
-              </a:lnSpc>
-              <a:buNone/>
-            </a:pPr>
-            <a:r>
-              <a:rPr lang="en-US" sz="1050" b="1" spc="100" kern="0" dirty="0">
-                <a:solidFill>
-                  <a:srgbClr val="4A6B5D"/>
-                </a:solidFill>
-                <a:latin typeface="Arial" pitchFamily="34" charset="0"/>
-                <a:ea typeface="Arial" pitchFamily="34" charset="-122"/>
-                <a:cs typeface="Arial" pitchFamily="34" charset="-120"/>
-              </a:rPr>
-              <a:t>CHANGES   </a:t>
-            </a:r>
-            <a:pPr indent="0" marL="0">
-              <a:lnSpc>
-                <a:spcPts val="1600"/>
-              </a:lnSpc>
-              <a:buNone/>
-            </a:pPr>
-            <a:r>
-              <a:rPr lang="en-US" sz="1250" dirty="0">
-                <a:solidFill>
-                  <a:srgbClr val="7A7F72"/>
-                </a:solidFill>
-                <a:latin typeface="Georgia" pitchFamily="34" charset="0"/>
-                <a:ea typeface="Georgia" pitchFamily="34" charset="-122"/>
-                <a:cs typeface="Georgia" pitchFamily="34" charset="-120"/>
-              </a:rPr>
-              <a:t>Later changes must be written into the WS 6.4 production diary. No silent swaps. Equipment sign-out opens today.</a:t>
-            </a:r>
-            <a:endParaRPr lang="en-US" sz="1050" dirty="0"/>
-          </a:p>
-        </p:txBody>
-      </p:sp>
-      <p:sp>
-        <p:nvSpPr>
-          <p:cNvPr id="40" name="Shape 37"/>
-          <p:cNvSpPr/>
-          <p:nvPr/>
-        </p:nvSpPr>
-        <p:spPr>
-          <a:xfrm>
-            <a:off x="822960" y="6382512"/>
-            <a:ext cx="10543032" cy="0"/>
-          </a:xfrm>
-          <a:prstGeom prst="line">
-            <a:avLst/>
-          </a:prstGeom>
-          <a:noFill/>
-          <a:ln w="9525">
-            <a:solidFill>
-              <a:srgbClr val="D9D4C4"/>
-            </a:solidFill>
-            <a:prstDash val="solid"/>
-          </a:ln>
-        </p:spPr>
-      </p:sp>
-      <p:sp>
-        <p:nvSpPr>
-          <p:cNvPr id="41" name="Text 38"/>
-          <p:cNvSpPr/>
-          <p:nvPr/>
-        </p:nvSpPr>
-        <p:spPr>
-          <a:xfrm>
-            <a:off x="822960" y="6419088"/>
-            <a:ext cx="7315200" cy="274320"/>
-          </a:xfrm>
-          <a:prstGeom prst="rect">
-            <a:avLst/>
-          </a:prstGeom>
-          <a:noFill/>
-          <a:ln/>
-        </p:spPr>
-        <p:txBody>
-          <a:bodyPr wrap="square" lIns="0" tIns="0" rIns="0" bIns="0" rtlCol="0" anchor="ctr"/>
-          <a:lstStyle/>
-          <a:p>
-            <a:pPr indent="0" marL="0">
-              <a:buNone/>
-            </a:pPr>
-            <a:r>
-              <a:rPr lang="en-US" sz="900" spc="150" kern="0" dirty="0">
-                <a:solidFill>
-                  <a:srgbClr val="7A7F72"/>
-                </a:solidFill>
-                <a:latin typeface="Arial" pitchFamily="34" charset="0"/>
-                <a:ea typeface="Arial" pitchFamily="34" charset="-122"/>
-                <a:cs typeface="Arial" pitchFamily="34" charset="-120"/>
-              </a:rPr>
-              <a:t>MEDIA STUDIES 9607 · SEMESTER I</a:t>
-            </a:r>
-            <a:endParaRPr lang="en-US" sz="900" dirty="0"/>
-          </a:p>
-        </p:txBody>
-      </p:sp>
-      <p:sp>
-        <p:nvSpPr>
-          <p:cNvPr id="42" name="Text 39"/>
-          <p:cNvSpPr/>
-          <p:nvPr/>
-        </p:nvSpPr>
-        <p:spPr>
-          <a:xfrm>
-            <a:off x="10268712" y="6355080"/>
-            <a:ext cx="1097280" cy="365760"/>
-          </a:xfrm>
-          <a:prstGeom prst="rect">
-            <a:avLst/>
-          </a:prstGeom>
-          <a:noFill/>
-          <a:ln/>
-        </p:spPr>
-        <p:txBody>
-          <a:bodyPr wrap="square" lIns="0" tIns="0" rIns="0" bIns="0" rtlCol="0" anchor="ctr"/>
-          <a:lstStyle/>
-          <a:p>
-            <a:pPr algn="r" indent="0" marL="0">
-              <a:buNone/>
-            </a:pPr>
-            <a:r>
-              <a:rPr lang="en-US" sz="1600" dirty="0">
-                <a:solidFill>
-                  <a:srgbClr val="A3C1AD"/>
-                </a:solidFill>
-                <a:latin typeface="Georgia" pitchFamily="34" charset="0"/>
-                <a:ea typeface="Georgia" pitchFamily="34" charset="-122"/>
-                <a:cs typeface="Georgia" pitchFamily="34" charset="-120"/>
-              </a:rPr>
-              <a:t>04</a:t>
-            </a:r>
-            <a:endParaRPr lang="en-US" sz="1600" dirty="0"/>
+                <a:latin typeface="Georgia" pitchFamily="34" charset="0"/>
+                <a:ea typeface="Georgia" pitchFamily="34" charset="-122"/>
+                <a:cs typeface="Georgia" pitchFamily="34" charset="-120"/>
+              </a:rPr>
+              <a:t>Take the extract apart into its four elements, then put it back together to see how it makes meaning.</a:t>
+            </a:r>
+            <a:endParaRPr lang="en-US" sz="1200" dirty="0"/>
           </a:p>
         </p:txBody>
       </p:sp>
@@ -9201,7 +9237,7 @@
                 <a:ea typeface="Arial" pitchFamily="34" charset="-122"/>
                 <a:cs typeface="Arial" pitchFamily="34" charset="-120"/>
               </a:rPr>
-              <a:t>WHAT ARRIVES AT THE LOCK</a:t>
+              <a:t>DELIVERABLE · CS7</a:t>
             </a:r>
             <a:endParaRPr lang="en-US" sz="1100" dirty="0"/>
           </a:p>
@@ -9240,7 +9276,7 @@
                 <a:ea typeface="Arial" pitchFamily="34" charset="-122"/>
                 <a:cs typeface="Arial" pitchFamily="34" charset="-120"/>
               </a:rPr>
-              <a:t>FOUR BUILDS, ALREADY DATED ON THE BLOG</a:t>
+              <a:t>THURSDAY, FIFTEEN MINUTES</a:t>
             </a:r>
             <a:endParaRPr lang="en-US" sz="1100" dirty="0"/>
           </a:p>
@@ -9271,21 +9307,491 @@
       </p:sp>
       <p:sp>
         <p:nvSpPr>
-          <p:cNvPr id="5" name="Shape 3"/>
-          <p:cNvSpPr/>
-          <p:nvPr/>
-        </p:nvSpPr>
-        <p:spPr>
-          <a:xfrm>
-            <a:off x="822960" y="1051560"/>
-            <a:ext cx="5088636" cy="2084832"/>
-          </a:xfrm>
-          <a:prstGeom prst="rect">
-            <a:avLst/>
-          </a:prstGeom>
-          <a:solidFill>
-            <a:srgbClr val="FAF8F1"/>
-          </a:solidFill>
+          <p:cNvPr id="5" name="Text 3"/>
+          <p:cNvSpPr/>
+          <p:nvPr/>
+        </p:nvSpPr>
+        <p:spPr>
+          <a:xfrm>
+            <a:off x="822960" y="1143000"/>
+            <a:ext cx="10543032" cy="822960"/>
+          </a:xfrm>
+          <a:prstGeom prst="rect">
+            <a:avLst/>
+          </a:prstGeom>
+          <a:noFill/>
+          <a:ln/>
+        </p:spPr>
+        <p:txBody>
+          <a:bodyPr wrap="square" lIns="0" tIns="0" rIns="0" bIns="0" rtlCol="0" anchor="ctr"/>
+          <a:lstStyle/>
+          <a:p>
+            <a:pPr indent="0" marL="0">
+              <a:buNone/>
+            </a:pPr>
+            <a:r>
+              <a:rPr lang="en-US" sz="3400" dirty="0">
+                <a:solidFill>
+                  <a:srgbClr val="24313F"/>
+                </a:solidFill>
+                <a:latin typeface="Georgia" pitchFamily="34" charset="0"/>
+                <a:ea typeface="Georgia" pitchFamily="34" charset="-122"/>
+                <a:cs typeface="Georgia" pitchFamily="34" charset="-120"/>
+              </a:rPr>
+              <a:t>One paragraph, at least three elements</a:t>
+            </a:r>
+            <a:endParaRPr lang="en-US" sz="3400" dirty="0"/>
+          </a:p>
+        </p:txBody>
+      </p:sp>
+      <p:sp>
+        <p:nvSpPr>
+          <p:cNvPr id="6" name="Shape 4"/>
+          <p:cNvSpPr/>
+          <p:nvPr/>
+        </p:nvSpPr>
+        <p:spPr>
+          <a:xfrm>
+            <a:off x="822960" y="2240280"/>
+            <a:ext cx="914400" cy="0"/>
+          </a:xfrm>
+          <a:prstGeom prst="line">
+            <a:avLst/>
+          </a:prstGeom>
+          <a:noFill/>
+          <a:ln w="31750">
+            <a:solidFill>
+              <a:srgbClr val="8C3A38"/>
+            </a:solidFill>
+            <a:prstDash val="solid"/>
+          </a:ln>
+        </p:spPr>
+      </p:sp>
+      <p:sp>
+        <p:nvSpPr>
+          <p:cNvPr id="7" name="Text 5"/>
+          <p:cNvSpPr/>
+          <p:nvPr/>
+        </p:nvSpPr>
+        <p:spPr>
+          <a:xfrm>
+            <a:off x="822960" y="2514600"/>
+            <a:ext cx="822960" cy="548640"/>
+          </a:xfrm>
+          <a:prstGeom prst="rect">
+            <a:avLst/>
+          </a:prstGeom>
+          <a:noFill/>
+          <a:ln/>
+        </p:spPr>
+        <p:txBody>
+          <a:bodyPr wrap="square" lIns="0" tIns="0" rIns="0" bIns="0" rtlCol="0" anchor="ctr"/>
+          <a:lstStyle/>
+          <a:p>
+            <a:pPr indent="0" marL="0">
+              <a:buNone/>
+            </a:pPr>
+            <a:r>
+              <a:rPr lang="en-US" sz="2600" dirty="0">
+                <a:solidFill>
+                  <a:srgbClr val="A3C1AD"/>
+                </a:solidFill>
+                <a:latin typeface="Georgia" pitchFamily="34" charset="0"/>
+                <a:ea typeface="Georgia" pitchFamily="34" charset="-122"/>
+                <a:cs typeface="Georgia" pitchFamily="34" charset="-120"/>
+              </a:rPr>
+              <a:t>01</a:t>
+            </a:r>
+            <a:endParaRPr lang="en-US" sz="2600" dirty="0"/>
+          </a:p>
+        </p:txBody>
+      </p:sp>
+      <p:sp>
+        <p:nvSpPr>
+          <p:cNvPr id="8" name="Text 6"/>
+          <p:cNvSpPr/>
+          <p:nvPr/>
+        </p:nvSpPr>
+        <p:spPr>
+          <a:xfrm>
+            <a:off x="1828800" y="2514600"/>
+            <a:ext cx="3291840" cy="548640"/>
+          </a:xfrm>
+          <a:prstGeom prst="rect">
+            <a:avLst/>
+          </a:prstGeom>
+          <a:noFill/>
+          <a:ln/>
+        </p:spPr>
+        <p:txBody>
+          <a:bodyPr wrap="square" lIns="0" tIns="0" rIns="0" bIns="0" rtlCol="0" anchor="ctr"/>
+          <a:lstStyle/>
+          <a:p>
+            <a:pPr indent="0" marL="0">
+              <a:buNone/>
+            </a:pPr>
+            <a:r>
+              <a:rPr lang="en-US" sz="2100" dirty="0">
+                <a:solidFill>
+                  <a:srgbClr val="4A6B5D"/>
+                </a:solidFill>
+                <a:latin typeface="Georgia" pitchFamily="34" charset="0"/>
+                <a:ea typeface="Georgia" pitchFamily="34" charset="-122"/>
+                <a:cs typeface="Georgia" pitchFamily="34" charset="-120"/>
+              </a:rPr>
+              <a:t>Technique named</a:t>
+            </a:r>
+            <a:endParaRPr lang="en-US" sz="2100" dirty="0"/>
+          </a:p>
+        </p:txBody>
+      </p:sp>
+      <p:sp>
+        <p:nvSpPr>
+          <p:cNvPr id="9" name="Text 7"/>
+          <p:cNvSpPr/>
+          <p:nvPr/>
+        </p:nvSpPr>
+        <p:spPr>
+          <a:xfrm>
+            <a:off x="5303520" y="2514600"/>
+            <a:ext cx="6675120" cy="548640"/>
+          </a:xfrm>
+          <a:prstGeom prst="rect">
+            <a:avLst/>
+          </a:prstGeom>
+          <a:noFill/>
+          <a:ln/>
+        </p:spPr>
+        <p:txBody>
+          <a:bodyPr wrap="square" lIns="0" tIns="0" rIns="0" bIns="0" rtlCol="0" anchor="ctr"/>
+          <a:lstStyle/>
+          <a:p>
+            <a:pPr indent="0" marL="0">
+              <a:buNone/>
+            </a:pPr>
+            <a:r>
+              <a:rPr lang="en-US" sz="1600" dirty="0">
+                <a:solidFill>
+                  <a:srgbClr val="24313F"/>
+                </a:solidFill>
+                <a:latin typeface="Georgia" pitchFamily="34" charset="0"/>
+                <a:ea typeface="Georgia" pitchFamily="34" charset="-122"/>
+                <a:cs typeface="Georgia" pitchFamily="34" charset="-120"/>
+              </a:rPr>
+              <a:t>in the syllabus's own term, not a description of it</a:t>
+            </a:r>
+            <a:endParaRPr lang="en-US" sz="1600" dirty="0"/>
+          </a:p>
+        </p:txBody>
+      </p:sp>
+      <p:sp>
+        <p:nvSpPr>
+          <p:cNvPr id="10" name="Text 8"/>
+          <p:cNvSpPr/>
+          <p:nvPr/>
+        </p:nvSpPr>
+        <p:spPr>
+          <a:xfrm>
+            <a:off x="822960" y="3429000"/>
+            <a:ext cx="822960" cy="548640"/>
+          </a:xfrm>
+          <a:prstGeom prst="rect">
+            <a:avLst/>
+          </a:prstGeom>
+          <a:noFill/>
+          <a:ln/>
+        </p:spPr>
+        <p:txBody>
+          <a:bodyPr wrap="square" lIns="0" tIns="0" rIns="0" bIns="0" rtlCol="0" anchor="ctr"/>
+          <a:lstStyle/>
+          <a:p>
+            <a:pPr indent="0" marL="0">
+              <a:buNone/>
+            </a:pPr>
+            <a:r>
+              <a:rPr lang="en-US" sz="2600" dirty="0">
+                <a:solidFill>
+                  <a:srgbClr val="A3C1AD"/>
+                </a:solidFill>
+                <a:latin typeface="Georgia" pitchFamily="34" charset="0"/>
+                <a:ea typeface="Georgia" pitchFamily="34" charset="-122"/>
+                <a:cs typeface="Georgia" pitchFamily="34" charset="-120"/>
+              </a:rPr>
+              <a:t>02</a:t>
+            </a:r>
+            <a:endParaRPr lang="en-US" sz="2600" dirty="0"/>
+          </a:p>
+        </p:txBody>
+      </p:sp>
+      <p:sp>
+        <p:nvSpPr>
+          <p:cNvPr id="11" name="Text 9"/>
+          <p:cNvSpPr/>
+          <p:nvPr/>
+        </p:nvSpPr>
+        <p:spPr>
+          <a:xfrm>
+            <a:off x="1828800" y="3429000"/>
+            <a:ext cx="3291840" cy="548640"/>
+          </a:xfrm>
+          <a:prstGeom prst="rect">
+            <a:avLst/>
+          </a:prstGeom>
+          <a:noFill/>
+          <a:ln/>
+        </p:spPr>
+        <p:txBody>
+          <a:bodyPr wrap="square" lIns="0" tIns="0" rIns="0" bIns="0" rtlCol="0" anchor="ctr"/>
+          <a:lstStyle/>
+          <a:p>
+            <a:pPr indent="0" marL="0">
+              <a:buNone/>
+            </a:pPr>
+            <a:r>
+              <a:rPr lang="en-US" sz="2100" dirty="0">
+                <a:solidFill>
+                  <a:srgbClr val="4A6B5D"/>
+                </a:solidFill>
+                <a:latin typeface="Georgia" pitchFamily="34" charset="0"/>
+                <a:ea typeface="Georgia" pitchFamily="34" charset="-122"/>
+                <a:cs typeface="Georgia" pitchFamily="34" charset="-120"/>
+              </a:rPr>
+              <a:t>Meaning created</a:t>
+            </a:r>
+            <a:endParaRPr lang="en-US" sz="2100" dirty="0"/>
+          </a:p>
+        </p:txBody>
+      </p:sp>
+      <p:sp>
+        <p:nvSpPr>
+          <p:cNvPr id="12" name="Text 10"/>
+          <p:cNvSpPr/>
+          <p:nvPr/>
+        </p:nvSpPr>
+        <p:spPr>
+          <a:xfrm>
+            <a:off x="5303520" y="3429000"/>
+            <a:ext cx="6675120" cy="548640"/>
+          </a:xfrm>
+          <a:prstGeom prst="rect">
+            <a:avLst/>
+          </a:prstGeom>
+          <a:noFill/>
+          <a:ln/>
+        </p:spPr>
+        <p:txBody>
+          <a:bodyPr wrap="square" lIns="0" tIns="0" rIns="0" bIns="0" rtlCol="0" anchor="ctr"/>
+          <a:lstStyle/>
+          <a:p>
+            <a:pPr indent="0" marL="0">
+              <a:buNone/>
+            </a:pPr>
+            <a:r>
+              <a:rPr lang="en-US" sz="1600" dirty="0">
+                <a:solidFill>
+                  <a:srgbClr val="24313F"/>
+                </a:solidFill>
+                <a:latin typeface="Georgia" pitchFamily="34" charset="0"/>
+                <a:ea typeface="Georgia" pitchFamily="34" charset="-122"/>
+                <a:cs typeface="Georgia" pitchFamily="34" charset="-120"/>
+              </a:rPr>
+              <a:t>what the choice does to the viewer, stated as an effect</a:t>
+            </a:r>
+            <a:endParaRPr lang="en-US" sz="1600" dirty="0"/>
+          </a:p>
+        </p:txBody>
+      </p:sp>
+      <p:sp>
+        <p:nvSpPr>
+          <p:cNvPr id="13" name="Text 11"/>
+          <p:cNvSpPr/>
+          <p:nvPr/>
+        </p:nvSpPr>
+        <p:spPr>
+          <a:xfrm>
+            <a:off x="822960" y="4343400"/>
+            <a:ext cx="822960" cy="548640"/>
+          </a:xfrm>
+          <a:prstGeom prst="rect">
+            <a:avLst/>
+          </a:prstGeom>
+          <a:noFill/>
+          <a:ln/>
+        </p:spPr>
+        <p:txBody>
+          <a:bodyPr wrap="square" lIns="0" tIns="0" rIns="0" bIns="0" rtlCol="0" anchor="ctr"/>
+          <a:lstStyle/>
+          <a:p>
+            <a:pPr indent="0" marL="0">
+              <a:buNone/>
+            </a:pPr>
+            <a:r>
+              <a:rPr lang="en-US" sz="2600" dirty="0">
+                <a:solidFill>
+                  <a:srgbClr val="A3C1AD"/>
+                </a:solidFill>
+                <a:latin typeface="Georgia" pitchFamily="34" charset="0"/>
+                <a:ea typeface="Georgia" pitchFamily="34" charset="-122"/>
+                <a:cs typeface="Georgia" pitchFamily="34" charset="-120"/>
+              </a:rPr>
+              <a:t>03</a:t>
+            </a:r>
+            <a:endParaRPr lang="en-US" sz="2600" dirty="0"/>
+          </a:p>
+        </p:txBody>
+      </p:sp>
+      <p:sp>
+        <p:nvSpPr>
+          <p:cNvPr id="14" name="Text 12"/>
+          <p:cNvSpPr/>
+          <p:nvPr/>
+        </p:nvSpPr>
+        <p:spPr>
+          <a:xfrm>
+            <a:off x="1828800" y="4343400"/>
+            <a:ext cx="3291840" cy="548640"/>
+          </a:xfrm>
+          <a:prstGeom prst="rect">
+            <a:avLst/>
+          </a:prstGeom>
+          <a:noFill/>
+          <a:ln/>
+        </p:spPr>
+        <p:txBody>
+          <a:bodyPr wrap="square" lIns="0" tIns="0" rIns="0" bIns="0" rtlCol="0" anchor="ctr"/>
+          <a:lstStyle/>
+          <a:p>
+            <a:pPr indent="0" marL="0">
+              <a:buNone/>
+            </a:pPr>
+            <a:r>
+              <a:rPr lang="en-US" sz="2100" dirty="0">
+                <a:solidFill>
+                  <a:srgbClr val="4A6B5D"/>
+                </a:solidFill>
+                <a:latin typeface="Georgia" pitchFamily="34" charset="0"/>
+                <a:ea typeface="Georgia" pitchFamily="34" charset="-122"/>
+                <a:cs typeface="Georgia" pitchFamily="34" charset="-120"/>
+              </a:rPr>
+              <a:t>Representation</a:t>
+            </a:r>
+            <a:endParaRPr lang="en-US" sz="2100" dirty="0"/>
+          </a:p>
+        </p:txBody>
+      </p:sp>
+      <p:sp>
+        <p:nvSpPr>
+          <p:cNvPr id="15" name="Text 13"/>
+          <p:cNvSpPr/>
+          <p:nvPr/>
+        </p:nvSpPr>
+        <p:spPr>
+          <a:xfrm>
+            <a:off x="5303520" y="4343400"/>
+            <a:ext cx="6675120" cy="548640"/>
+          </a:xfrm>
+          <a:prstGeom prst="rect">
+            <a:avLst/>
+          </a:prstGeom>
+          <a:noFill/>
+          <a:ln/>
+        </p:spPr>
+        <p:txBody>
+          <a:bodyPr wrap="square" lIns="0" tIns="0" rIns="0" bIns="0" rtlCol="0" anchor="ctr"/>
+          <a:lstStyle/>
+          <a:p>
+            <a:pPr indent="0" marL="0">
+              <a:buNone/>
+            </a:pPr>
+            <a:r>
+              <a:rPr lang="en-US" sz="1600" dirty="0">
+                <a:solidFill>
+                  <a:srgbClr val="24313F"/>
+                </a:solidFill>
+                <a:latin typeface="Georgia" pitchFamily="34" charset="0"/>
+                <a:ea typeface="Georgia" pitchFamily="34" charset="-122"/>
+                <a:cs typeface="Georgia" pitchFamily="34" charset="-120"/>
+              </a:rPr>
+              <a:t>what it therefore says about the person, place or event</a:t>
+            </a:r>
+            <a:endParaRPr lang="en-US" sz="1600" dirty="0"/>
+          </a:p>
+        </p:txBody>
+      </p:sp>
+      <p:sp>
+        <p:nvSpPr>
+          <p:cNvPr id="16" name="Text 14"/>
+          <p:cNvSpPr/>
+          <p:nvPr/>
+        </p:nvSpPr>
+        <p:spPr>
+          <a:xfrm>
+            <a:off x="822960" y="5486400"/>
+            <a:ext cx="10424160" cy="320040"/>
+          </a:xfrm>
+          <a:prstGeom prst="rect">
+            <a:avLst/>
+          </a:prstGeom>
+          <a:noFill/>
+          <a:ln/>
+        </p:spPr>
+        <p:txBody>
+          <a:bodyPr wrap="square" lIns="0" tIns="0" rIns="0" bIns="0" rtlCol="0" anchor="t"/>
+          <a:lstStyle/>
+          <a:p>
+            <a:pPr indent="0" marL="0">
+              <a:lnSpc>
+                <a:spcPts val="1700"/>
+              </a:lnSpc>
+              <a:buNone/>
+            </a:pPr>
+            <a:r>
+              <a:rPr lang="en-US" sz="1050" b="1" spc="100" kern="0" dirty="0">
+                <a:solidFill>
+                  <a:srgbClr val="7A7F72"/>
+                </a:solidFill>
+                <a:latin typeface="Arial" pitchFamily="34" charset="0"/>
+                <a:ea typeface="Arial" pitchFamily="34" charset="-122"/>
+                <a:cs typeface="Arial" pitchFamily="34" charset="-120"/>
+              </a:rPr>
+              <a:t>MARKED   </a:t>
+            </a:r>
+            <a:pPr indent="0" marL="0">
+              <a:lnSpc>
+                <a:spcPts val="1700"/>
+              </a:lnSpc>
+              <a:buNone/>
+            </a:pPr>
+            <a:r>
+              <a:rPr lang="en-US" sz="1250" dirty="0">
+                <a:solidFill>
+                  <a:srgbClr val="7A7F72"/>
+                </a:solidFill>
+                <a:latin typeface="Georgia" pitchFamily="34" charset="0"/>
+                <a:ea typeface="Georgia" pitchFamily="34" charset="-122"/>
+                <a:cs typeface="Georgia" pitchFamily="34" charset="-120"/>
+              </a:rPr>
+              <a:t>Written in exam style and collected. Marked in the official Paper 2 language, so the feedback transfers straight to A1.</a:t>
+            </a:r>
+            <a:endParaRPr lang="en-US" sz="1050" dirty="0"/>
+          </a:p>
+        </p:txBody>
+      </p:sp>
+      <p:sp>
+        <p:nvSpPr>
+          <p:cNvPr id="17" name="Shape 15"/>
+          <p:cNvSpPr/>
+          <p:nvPr/>
+        </p:nvSpPr>
+        <p:spPr>
+          <a:xfrm>
+            <a:off x="822960" y="6382512"/>
+            <a:ext cx="10543032" cy="0"/>
+          </a:xfrm>
+          <a:prstGeom prst="line">
+            <a:avLst/>
+          </a:prstGeom>
+          <a:noFill/>
           <a:ln w="9525">
             <a:solidFill>
               <a:srgbClr val="D9D4C4"/>
@@ -9294,545 +9800,39 @@
           </a:ln>
         </p:spPr>
       </p:sp>
-      <p:pic>
-        <p:nvPicPr>
-          <p:cNvPr id="6" name="Image 0" descr="/Users/dogan/Documents/Vaults/Courses/wiki/classes/media-studies/decks/_build/img/goodfellas-copa-1.jpg">    </p:cNvPr>
-          <p:cNvPicPr>
-            <a:picLocks noChangeAspect="1"/>
-          </p:cNvPicPr>
-          <p:nvPr/>
-        </p:nvPicPr>
-        <p:blipFill>
-          <a:blip r:embed="rId1"/>
-          <a:stretch>
-            <a:fillRect/>
-          </a:stretch>
-        </p:blipFill>
-        <p:spPr>
-          <a:xfrm>
-            <a:off x="1738058" y="1179576"/>
-            <a:ext cx="3258441" cy="1828800"/>
-          </a:xfrm>
-          <a:prstGeom prst="rect">
-            <a:avLst/>
-          </a:prstGeom>
-        </p:spPr>
-      </p:pic>
-      <p:sp>
-        <p:nvSpPr>
-          <p:cNvPr id="7" name="Text 4"/>
-          <p:cNvSpPr/>
-          <p:nvPr/>
-        </p:nvSpPr>
-        <p:spPr>
-          <a:xfrm>
-            <a:off x="822960" y="3172968"/>
-            <a:ext cx="2377440" cy="292608"/>
-          </a:xfrm>
-          <a:prstGeom prst="rect">
-            <a:avLst/>
-          </a:prstGeom>
-          <a:noFill/>
-          <a:ln/>
-        </p:spPr>
-        <p:txBody>
-          <a:bodyPr wrap="square" lIns="0" tIns="0" rIns="0" bIns="0" rtlCol="0" anchor="ctr"/>
-          <a:lstStyle/>
-          <a:p>
-            <a:pPr indent="0" marL="0">
-              <a:buNone/>
-            </a:pPr>
-            <a:r>
-              <a:rPr lang="en-US" sz="1150" b="1" spc="100" kern="0" dirty="0">
-                <a:solidFill>
-                  <a:srgbClr val="4A6B5D"/>
+      <p:sp>
+        <p:nvSpPr>
+          <p:cNvPr id="18" name="Text 16"/>
+          <p:cNvSpPr/>
+          <p:nvPr/>
+        </p:nvSpPr>
+        <p:spPr>
+          <a:xfrm>
+            <a:off x="822960" y="6419088"/>
+            <a:ext cx="7315200" cy="274320"/>
+          </a:xfrm>
+          <a:prstGeom prst="rect">
+            <a:avLst/>
+          </a:prstGeom>
+          <a:noFill/>
+          <a:ln/>
+        </p:spPr>
+        <p:txBody>
+          <a:bodyPr wrap="square" lIns="0" tIns="0" rIns="0" bIns="0" rtlCol="0" anchor="ctr"/>
+          <a:lstStyle/>
+          <a:p>
+            <a:pPr indent="0" marL="0">
+              <a:buNone/>
+            </a:pPr>
+            <a:r>
+              <a:rPr lang="en-US" sz="900" spc="150" kern="0" dirty="0">
+                <a:solidFill>
+                  <a:srgbClr val="7A7F72"/>
                 </a:solidFill>
                 <a:latin typeface="Arial" pitchFamily="34" charset="0"/>
                 <a:ea typeface="Arial" pitchFamily="34" charset="-122"/>
                 <a:cs typeface="Arial" pitchFamily="34" charset="-120"/>
               </a:rPr>
-              <a:t>CS3 · Camera</a:t>
-            </a:r>
-            <a:endParaRPr lang="en-US" sz="1150" dirty="0"/>
-          </a:p>
-        </p:txBody>
-      </p:sp>
-      <p:sp>
-        <p:nvSpPr>
-          <p:cNvPr id="8" name="Text 5"/>
-          <p:cNvSpPr/>
-          <p:nvPr/>
-        </p:nvSpPr>
-        <p:spPr>
-          <a:xfrm>
-            <a:off x="3200400" y="3172968"/>
-            <a:ext cx="2711196" cy="292608"/>
-          </a:xfrm>
-          <a:prstGeom prst="rect">
-            <a:avLst/>
-          </a:prstGeom>
-          <a:noFill/>
-          <a:ln/>
-        </p:spPr>
-        <p:txBody>
-          <a:bodyPr wrap="square" lIns="0" tIns="0" rIns="0" bIns="0" rtlCol="0" anchor="ctr"/>
-          <a:lstStyle/>
-          <a:p>
-            <a:pPr indent="0" marL="0">
-              <a:buNone/>
-            </a:pPr>
-            <a:r>
-              <a:rPr lang="en-US" sz="1200" i="1" dirty="0">
-                <a:solidFill>
-                  <a:srgbClr val="7A7F72"/>
-                </a:solidFill>
-                <a:latin typeface="Georgia" pitchFamily="34" charset="0"/>
-                <a:ea typeface="Georgia" pitchFamily="34" charset="-122"/>
-                <a:cs typeface="Georgia" pitchFamily="34" charset="-120"/>
-              </a:rPr>
-              <a:t>a shot vocabulary, proven on six frames</a:t>
-            </a:r>
-            <a:endParaRPr lang="en-US" sz="1200" dirty="0"/>
-          </a:p>
-        </p:txBody>
-      </p:sp>
-      <p:sp>
-        <p:nvSpPr>
-          <p:cNvPr id="9" name="Shape 6"/>
-          <p:cNvSpPr/>
-          <p:nvPr/>
-        </p:nvSpPr>
-        <p:spPr>
-          <a:xfrm>
-            <a:off x="6277356" y="1051560"/>
-            <a:ext cx="5088636" cy="2084832"/>
-          </a:xfrm>
-          <a:prstGeom prst="rect">
-            <a:avLst/>
-          </a:prstGeom>
-          <a:solidFill>
-            <a:srgbClr val="FAF8F1"/>
-          </a:solidFill>
-          <a:ln w="9525">
-            <a:solidFill>
-              <a:srgbClr val="D9D4C4"/>
-            </a:solidFill>
-            <a:prstDash val="solid"/>
-          </a:ln>
-        </p:spPr>
-      </p:sp>
-      <p:pic>
-        <p:nvPicPr>
-          <p:cNvPr id="10" name="Image 1" descr="/Users/dogan/Documents/Vaults/Courses/wiki/classes/media-studies/decks/_build/img/foley-room.jpg">    </p:cNvPr>
-          <p:cNvPicPr>
-            <a:picLocks noChangeAspect="1"/>
-          </p:cNvPicPr>
-          <p:nvPr/>
-        </p:nvPicPr>
-        <p:blipFill>
-          <a:blip r:embed="rId2"/>
-          <a:stretch>
-            <a:fillRect/>
-          </a:stretch>
-        </p:blipFill>
-        <p:spPr>
-          <a:xfrm>
-            <a:off x="8212455" y="1179576"/>
-            <a:ext cx="1218438" cy="1828800"/>
-          </a:xfrm>
-          <a:prstGeom prst="rect">
-            <a:avLst/>
-          </a:prstGeom>
-        </p:spPr>
-      </p:pic>
-      <p:sp>
-        <p:nvSpPr>
-          <p:cNvPr id="11" name="Text 7"/>
-          <p:cNvSpPr/>
-          <p:nvPr/>
-        </p:nvSpPr>
-        <p:spPr>
-          <a:xfrm>
-            <a:off x="6277356" y="3172968"/>
-            <a:ext cx="2377440" cy="292608"/>
-          </a:xfrm>
-          <a:prstGeom prst="rect">
-            <a:avLst/>
-          </a:prstGeom>
-          <a:noFill/>
-          <a:ln/>
-        </p:spPr>
-        <p:txBody>
-          <a:bodyPr wrap="square" lIns="0" tIns="0" rIns="0" bIns="0" rtlCol="0" anchor="ctr"/>
-          <a:lstStyle/>
-          <a:p>
-            <a:pPr indent="0" marL="0">
-              <a:buNone/>
-            </a:pPr>
-            <a:r>
-              <a:rPr lang="en-US" sz="1150" b="1" spc="100" kern="0" dirty="0">
-                <a:solidFill>
-                  <a:srgbClr val="4A6B5D"/>
-                </a:solidFill>
-                <a:latin typeface="Arial" pitchFamily="34" charset="0"/>
-                <a:ea typeface="Arial" pitchFamily="34" charset="-122"/>
-                <a:cs typeface="Arial" pitchFamily="34" charset="-120"/>
-              </a:rPr>
-              <a:t>CS4 · Sound</a:t>
-            </a:r>
-            <a:endParaRPr lang="en-US" sz="1150" dirty="0"/>
-          </a:p>
-        </p:txBody>
-      </p:sp>
-      <p:sp>
-        <p:nvSpPr>
-          <p:cNvPr id="12" name="Text 8"/>
-          <p:cNvSpPr/>
-          <p:nvPr/>
-        </p:nvSpPr>
-        <p:spPr>
-          <a:xfrm>
-            <a:off x="8654796" y="3172968"/>
-            <a:ext cx="2711196" cy="292608"/>
-          </a:xfrm>
-          <a:prstGeom prst="rect">
-            <a:avLst/>
-          </a:prstGeom>
-          <a:noFill/>
-          <a:ln/>
-        </p:spPr>
-        <p:txBody>
-          <a:bodyPr wrap="square" lIns="0" tIns="0" rIns="0" bIns="0" rtlCol="0" anchor="ctr"/>
-          <a:lstStyle/>
-          <a:p>
-            <a:pPr indent="0" marL="0">
-              <a:buNone/>
-            </a:pPr>
-            <a:r>
-              <a:rPr lang="en-US" sz="1200" i="1" dirty="0">
-                <a:solidFill>
-                  <a:srgbClr val="7A7F72"/>
-                </a:solidFill>
-                <a:latin typeface="Georgia" pitchFamily="34" charset="0"/>
-                <a:ea typeface="Georgia" pitchFamily="34" charset="-122"/>
-                <a:cs typeface="Georgia" pitchFamily="34" charset="-120"/>
-              </a:rPr>
-              <a:t>a soundscape for this opening, already built</a:t>
-            </a:r>
-            <a:endParaRPr lang="en-US" sz="1200" dirty="0"/>
-          </a:p>
-        </p:txBody>
-      </p:sp>
-      <p:sp>
-        <p:nvSpPr>
-          <p:cNvPr id="13" name="Shape 9"/>
-          <p:cNvSpPr/>
-          <p:nvPr/>
-        </p:nvSpPr>
-        <p:spPr>
-          <a:xfrm>
-            <a:off x="822960" y="3703320"/>
-            <a:ext cx="5088636" cy="2084832"/>
-          </a:xfrm>
-          <a:prstGeom prst="rect">
-            <a:avLst/>
-          </a:prstGeom>
-          <a:solidFill>
-            <a:srgbClr val="FAF8F1"/>
-          </a:solidFill>
-          <a:ln w="9525">
-            <a:solidFill>
-              <a:srgbClr val="D9D4C4"/>
-            </a:solidFill>
-            <a:prstDash val="solid"/>
-          </a:ln>
-        </p:spPr>
-      </p:sp>
-      <p:pic>
-        <p:nvPicPr>
-          <p:cNvPr id="14" name="Image 2" descr="/Users/dogan/Documents/Vaults/Courses/wiki/classes/media-studies/decks/_build/img/gbh-concierge.jpg">    </p:cNvPr>
-          <p:cNvPicPr>
-            <a:picLocks noChangeAspect="1"/>
-          </p:cNvPicPr>
-          <p:nvPr/>
-        </p:nvPicPr>
-        <p:blipFill>
-          <a:blip r:embed="rId3"/>
-          <a:stretch>
-            <a:fillRect/>
-          </a:stretch>
-        </p:blipFill>
-        <p:spPr>
-          <a:xfrm>
-            <a:off x="1248061" y="3831336"/>
-            <a:ext cx="4238435" cy="1828800"/>
-          </a:xfrm>
-          <a:prstGeom prst="rect">
-            <a:avLst/>
-          </a:prstGeom>
-        </p:spPr>
-      </p:pic>
-      <p:sp>
-        <p:nvSpPr>
-          <p:cNvPr id="15" name="Text 10"/>
-          <p:cNvSpPr/>
-          <p:nvPr/>
-        </p:nvSpPr>
-        <p:spPr>
-          <a:xfrm>
-            <a:off x="822960" y="5824728"/>
-            <a:ext cx="2377440" cy="292608"/>
-          </a:xfrm>
-          <a:prstGeom prst="rect">
-            <a:avLst/>
-          </a:prstGeom>
-          <a:noFill/>
-          <a:ln/>
-        </p:spPr>
-        <p:txBody>
-          <a:bodyPr wrap="square" lIns="0" tIns="0" rIns="0" bIns="0" rtlCol="0" anchor="ctr"/>
-          <a:lstStyle/>
-          <a:p>
-            <a:pPr indent="0" marL="0">
-              <a:buNone/>
-            </a:pPr>
-            <a:r>
-              <a:rPr lang="en-US" sz="1150" b="1" spc="100" kern="0" dirty="0">
-                <a:solidFill>
-                  <a:srgbClr val="4A6B5D"/>
-                </a:solidFill>
-                <a:latin typeface="Arial" pitchFamily="34" charset="0"/>
-                <a:ea typeface="Arial" pitchFamily="34" charset="-122"/>
-                <a:cs typeface="Arial" pitchFamily="34" charset="-120"/>
-              </a:rPr>
-              <a:t>CS5 · Design</a:t>
-            </a:r>
-            <a:endParaRPr lang="en-US" sz="1150" dirty="0"/>
-          </a:p>
-        </p:txBody>
-      </p:sp>
-      <p:sp>
-        <p:nvSpPr>
-          <p:cNvPr id="16" name="Text 11"/>
-          <p:cNvSpPr/>
-          <p:nvPr/>
-        </p:nvSpPr>
-        <p:spPr>
-          <a:xfrm>
-            <a:off x="3200400" y="5824728"/>
-            <a:ext cx="2711196" cy="292608"/>
-          </a:xfrm>
-          <a:prstGeom prst="rect">
-            <a:avLst/>
-          </a:prstGeom>
-          <a:noFill/>
-          <a:ln/>
-        </p:spPr>
-        <p:txBody>
-          <a:bodyPr wrap="square" lIns="0" tIns="0" rIns="0" bIns="0" rtlCol="0" anchor="ctr"/>
-          <a:lstStyle/>
-          <a:p>
-            <a:pPr indent="0" marL="0">
-              <a:buNone/>
-            </a:pPr>
-            <a:r>
-              <a:rPr lang="en-US" sz="1200" i="1" dirty="0">
-                <a:solidFill>
-                  <a:srgbClr val="7A7F72"/>
-                </a:solidFill>
-                <a:latin typeface="Georgia" pitchFamily="34" charset="0"/>
-                <a:ea typeface="Georgia" pitchFamily="34" charset="-122"/>
-                <a:cs typeface="Georgia" pitchFamily="34" charset="-120"/>
-              </a:rPr>
-              <a:t>a board the reviewer holds beside your plan</a:t>
-            </a:r>
-            <a:endParaRPr lang="en-US" sz="1200" dirty="0"/>
-          </a:p>
-        </p:txBody>
-      </p:sp>
-      <p:sp>
-        <p:nvSpPr>
-          <p:cNvPr id="17" name="Shape 12"/>
-          <p:cNvSpPr/>
-          <p:nvPr/>
-        </p:nvSpPr>
-        <p:spPr>
-          <a:xfrm>
-            <a:off x="6277356" y="3703320"/>
-            <a:ext cx="5088636" cy="2084832"/>
-          </a:xfrm>
-          <a:prstGeom prst="rect">
-            <a:avLst/>
-          </a:prstGeom>
-          <a:solidFill>
-            <a:srgbClr val="FAF8F1"/>
-          </a:solidFill>
-          <a:ln w="9525">
-            <a:solidFill>
-              <a:srgbClr val="D9D4C4"/>
-            </a:solidFill>
-            <a:prstDash val="solid"/>
-          </a:ln>
-        </p:spPr>
-      </p:sp>
-      <p:pic>
-        <p:nvPicPr>
-          <p:cNvPr id="18" name="Image 3" descr="/Users/dogan/Documents/Vaults/Courses/wiki/classes/media-studies/decks/_build/img/adolescence-bts.jpg">    </p:cNvPr>
-          <p:cNvPicPr>
-            <a:picLocks noChangeAspect="1"/>
-          </p:cNvPicPr>
-          <p:nvPr/>
-        </p:nvPicPr>
-        <p:blipFill>
-          <a:blip r:embed="rId4"/>
-          <a:stretch>
-            <a:fillRect/>
-          </a:stretch>
-        </p:blipFill>
-        <p:spPr>
-          <a:xfrm>
-            <a:off x="7199678" y="3831336"/>
-            <a:ext cx="3243991" cy="1828800"/>
-          </a:xfrm>
-          <a:prstGeom prst="rect">
-            <a:avLst/>
-          </a:prstGeom>
-        </p:spPr>
-      </p:pic>
-      <p:sp>
-        <p:nvSpPr>
-          <p:cNvPr id="19" name="Text 13"/>
-          <p:cNvSpPr/>
-          <p:nvPr/>
-        </p:nvSpPr>
-        <p:spPr>
-          <a:xfrm>
-            <a:off x="6277356" y="5824728"/>
-            <a:ext cx="2377440" cy="292608"/>
-          </a:xfrm>
-          <a:prstGeom prst="rect">
-            <a:avLst/>
-          </a:prstGeom>
-          <a:noFill/>
-          <a:ln/>
-        </p:spPr>
-        <p:txBody>
-          <a:bodyPr wrap="square" lIns="0" tIns="0" rIns="0" bIns="0" rtlCol="0" anchor="ctr"/>
-          <a:lstStyle/>
-          <a:p>
-            <a:pPr indent="0" marL="0">
-              <a:buNone/>
-            </a:pPr>
-            <a:r>
-              <a:rPr lang="en-US" sz="1150" b="1" spc="100" kern="0" dirty="0">
-                <a:solidFill>
-                  <a:srgbClr val="4A6B5D"/>
-                </a:solidFill>
-                <a:latin typeface="Arial" pitchFamily="34" charset="0"/>
-                <a:ea typeface="Arial" pitchFamily="34" charset="-122"/>
-                <a:cs typeface="Arial" pitchFamily="34" charset="-120"/>
-              </a:rPr>
-              <a:t>CS6 · Edit</a:t>
-            </a:r>
-            <a:endParaRPr lang="en-US" sz="1150" dirty="0"/>
-          </a:p>
-        </p:txBody>
-      </p:sp>
-      <p:sp>
-        <p:nvSpPr>
-          <p:cNvPr id="20" name="Text 14"/>
-          <p:cNvSpPr/>
-          <p:nvPr/>
-        </p:nvSpPr>
-        <p:spPr>
-          <a:xfrm>
-            <a:off x="8654796" y="5824728"/>
-            <a:ext cx="2711196" cy="292608"/>
-          </a:xfrm>
-          <a:prstGeom prst="rect">
-            <a:avLst/>
-          </a:prstGeom>
-          <a:noFill/>
-          <a:ln/>
-        </p:spPr>
-        <p:txBody>
-          <a:bodyPr wrap="square" lIns="0" tIns="0" rIns="0" bIns="0" rtlCol="0" anchor="ctr"/>
-          <a:lstStyle/>
-          <a:p>
-            <a:pPr indent="0" marL="0">
-              <a:buNone/>
-            </a:pPr>
-            <a:r>
-              <a:rPr lang="en-US" sz="1200" i="1" dirty="0">
-                <a:solidFill>
-                  <a:srgbClr val="7A7F72"/>
-                </a:solidFill>
-                <a:latin typeface="Georgia" pitchFamily="34" charset="0"/>
-                <a:ea typeface="Georgia" pitchFamily="34" charset="-122"/>
-                <a:cs typeface="Georgia" pitchFamily="34" charset="-120"/>
-              </a:rPr>
-              <a:t>a workflow tested, and a kit that works</a:t>
-            </a:r>
-            <a:endParaRPr lang="en-US" sz="1200" dirty="0"/>
-          </a:p>
-        </p:txBody>
-      </p:sp>
-      <p:sp>
-        <p:nvSpPr>
-          <p:cNvPr id="21" name="Shape 15"/>
-          <p:cNvSpPr/>
-          <p:nvPr/>
-        </p:nvSpPr>
-        <p:spPr>
-          <a:xfrm>
-            <a:off x="822960" y="6382512"/>
-            <a:ext cx="10543032" cy="0"/>
-          </a:xfrm>
-          <a:prstGeom prst="line">
-            <a:avLst/>
-          </a:prstGeom>
-          <a:noFill/>
-          <a:ln w="9525">
-            <a:solidFill>
-              <a:srgbClr val="D9D4C4"/>
-            </a:solidFill>
-            <a:prstDash val="solid"/>
-          </a:ln>
-        </p:spPr>
-      </p:sp>
-      <p:sp>
-        <p:nvSpPr>
-          <p:cNvPr id="22" name="Text 16"/>
-          <p:cNvSpPr/>
-          <p:nvPr/>
-        </p:nvSpPr>
-        <p:spPr>
-          <a:xfrm>
-            <a:off x="822960" y="6419088"/>
-            <a:ext cx="7315200" cy="274320"/>
-          </a:xfrm>
-          <a:prstGeom prst="rect">
-            <a:avLst/>
-          </a:prstGeom>
-          <a:noFill/>
-          <a:ln/>
-        </p:spPr>
-        <p:txBody>
-          <a:bodyPr wrap="square" lIns="0" tIns="0" rIns="0" bIns="0" rtlCol="0" anchor="ctr"/>
-          <a:lstStyle/>
-          <a:p>
-            <a:pPr indent="0" marL="0">
-              <a:buNone/>
-            </a:pPr>
-            <a:r>
-              <a:rPr lang="en-US" sz="900" spc="150" kern="0" dirty="0">
-                <a:solidFill>
-                  <a:srgbClr val="7A7F72"/>
-                </a:solidFill>
-                <a:latin typeface="Arial" pitchFamily="34" charset="0"/>
-                <a:ea typeface="Arial" pitchFamily="34" charset="-122"/>
-                <a:cs typeface="Arial" pitchFamily="34" charset="-120"/>
-              </a:rPr>
               <a:t>MEDIA STUDIES 9607 · SEMESTER I</a:t>
             </a:r>
             <a:endParaRPr lang="en-US" sz="900" dirty="0"/>
@@ -9841,7 +9841,7 @@
       </p:sp>
       <p:sp>
         <p:nvSpPr>
-          <p:cNvPr id="23" name="Text 17"/>
+          <p:cNvPr id="19" name="Text 17"/>
           <p:cNvSpPr/>
           <p:nvPr/>
         </p:nvSpPr>
